--- a/assets/Dume.pptx
+++ b/assets/Dume.pptx
@@ -35,12 +35,18 @@
   <p:notesSz cx="6858000" cy="9144000"/>
   <p:embeddedFontLst>
     <p:embeddedFont>
-      <p:font typeface="Inter"/>
-      <p:bold r:id="rId25"/>
+      <p:font typeface="Segoe UI" panose="020B0502040204020203" pitchFamily="34" charset="0"/>
+      <p:regular r:id="rId25"/>
+      <p:bold r:id="rId26"/>
+      <p:italic r:id="rId27"/>
+      <p:boldItalic r:id="rId28"/>
     </p:embeddedFont>
     <p:embeddedFont>
-      <p:font typeface="Space Grotesk"/>
-      <p:bold r:id="rId26"/>
+      <p:font typeface="Trebuchet MS" panose="020B0603020202020204" pitchFamily="34" charset="0"/>
+      <p:regular r:id="rId29"/>
+      <p:bold r:id="rId30"/>
+      <p:italic r:id="rId31"/>
+      <p:boldItalic r:id="rId32"/>
     </p:embeddedFont>
   </p:embeddedFontLst>
   <p:defaultTextStyle>
@@ -3780,7 +3786,7 @@
         <p:spPr>
           <a:xfrm>
             <a:off x="1190625" y="642937"/>
-            <a:ext cx="5134012" cy="180975"/>
+            <a:ext cx="3669274" cy="173124"/>
           </a:xfrm>
           <a:prstGeom prst="rect">
             <a:avLst/>
@@ -3799,7 +3805,7 @@
                 <a:solidFill>
                   <a:srgbClr val="38BDF8"/>
                 </a:solidFill>
-                <a:latin typeface="Space Grotesk"/>
+                <a:latin typeface="Trebuchet MS" panose="020B0603020202020204" pitchFamily="34" charset="0"/>
               </a:rPr>
               <a:t>INTEGRACIÓN MECATRÓNICA · PROYECTO FINAL 6-DOF</a:t>
             </a:r>
@@ -3815,7 +3821,7 @@
         <p:spPr>
           <a:xfrm>
             <a:off x="762000" y="1316609"/>
-            <a:ext cx="11430000" cy="547687"/>
+            <a:ext cx="7348294" cy="551433"/>
           </a:xfrm>
           <a:prstGeom prst="rect">
             <a:avLst/>
@@ -3838,7 +3844,7 @@
                 <a:solidFill>
                   <a:srgbClr val="F8FAFC"/>
                 </a:solidFill>
-                <a:latin typeface="Space Grotesk"/>
+                <a:latin typeface="Trebuchet MS" panose="020B0603020202020204" pitchFamily="34" charset="0"/>
               </a:rPr>
               <a:t>Brazo</a:t>
             </a:r>
@@ -3847,7 +3853,7 @@
                 <a:solidFill>
                   <a:srgbClr val="F8FAFC"/>
                 </a:solidFill>
-                <a:latin typeface="Space Grotesk"/>
+                <a:latin typeface="Trebuchet MS" panose="020B0603020202020204" pitchFamily="34" charset="0"/>
               </a:rPr>
               <a:t> </a:t>
             </a:r>
@@ -3856,7 +3862,7 @@
                 <a:solidFill>
                   <a:srgbClr val="F8FAFC"/>
                 </a:solidFill>
-                <a:latin typeface="Space Grotesk"/>
+                <a:latin typeface="Trebuchet MS" panose="020B0603020202020204" pitchFamily="34" charset="0"/>
               </a:rPr>
               <a:t>Robótico</a:t>
             </a:r>
@@ -3865,7 +3871,7 @@
                 <a:solidFill>
                   <a:srgbClr val="F8FAFC"/>
                 </a:solidFill>
-                <a:latin typeface="Space Grotesk"/>
+                <a:latin typeface="Trebuchet MS" panose="020B0603020202020204" pitchFamily="34" charset="0"/>
               </a:rPr>
               <a:t> </a:t>
             </a:r>
@@ -3874,7 +3880,7 @@
                 <a:solidFill>
                   <a:srgbClr val="F8FAFC"/>
                 </a:solidFill>
-                <a:latin typeface="Space Grotesk"/>
+                <a:latin typeface="Trebuchet MS" panose="020B0603020202020204" pitchFamily="34" charset="0"/>
               </a:rPr>
               <a:t>Articulado</a:t>
             </a:r>
@@ -3883,7 +3889,7 @@
                 <a:solidFill>
                   <a:srgbClr val="F8FAFC"/>
                 </a:solidFill>
-                <a:latin typeface="Space Grotesk"/>
+                <a:latin typeface="Trebuchet MS" panose="020B0603020202020204" pitchFamily="34" charset="0"/>
               </a:rPr>
               <a:t> 6-DOF</a:t>
             </a:r>
@@ -3899,7 +3905,7 @@
         <p:spPr>
           <a:xfrm>
             <a:off x="762000" y="1902581"/>
-            <a:ext cx="7905750" cy="586680"/>
+            <a:ext cx="7905750" cy="564065"/>
           </a:xfrm>
           <a:prstGeom prst="rect">
             <a:avLst/>
@@ -3922,7 +3928,7 @@
                 <a:solidFill>
                   <a:srgbClr val="94A3B8"/>
                 </a:solidFill>
-                <a:latin typeface="Inter"/>
+                <a:latin typeface="Segoe UI" panose="020B0502040204020203" pitchFamily="34" charset="0"/>
               </a:rPr>
               <a:t>Transición</a:t>
             </a:r>
@@ -3931,7 +3937,7 @@
                 <a:solidFill>
                   <a:srgbClr val="94A3B8"/>
                 </a:solidFill>
-                <a:latin typeface="Inter"/>
+                <a:latin typeface="Segoe UI" panose="020B0502040204020203" pitchFamily="34" charset="0"/>
               </a:rPr>
               <a:t> de </a:t>
             </a:r>
@@ -3940,7 +3946,7 @@
                 <a:solidFill>
                   <a:srgbClr val="94A3B8"/>
                 </a:solidFill>
-                <a:latin typeface="Inter"/>
+                <a:latin typeface="Segoe UI" panose="020B0502040204020203" pitchFamily="34" charset="0"/>
               </a:rPr>
               <a:t>Actuación</a:t>
             </a:r>
@@ -3949,7 +3955,7 @@
                 <a:solidFill>
                   <a:srgbClr val="94A3B8"/>
                 </a:solidFill>
-                <a:latin typeface="Inter"/>
+                <a:latin typeface="Segoe UI" panose="020B0502040204020203" pitchFamily="34" charset="0"/>
               </a:rPr>
               <a:t> Directa a </a:t>
             </a:r>
@@ -3958,7 +3964,7 @@
                 <a:solidFill>
                   <a:srgbClr val="94A3B8"/>
                 </a:solidFill>
-                <a:latin typeface="Inter"/>
+                <a:latin typeface="Segoe UI" panose="020B0502040204020203" pitchFamily="34" charset="0"/>
               </a:rPr>
               <a:t>Transmisión</a:t>
             </a:r>
@@ -3967,7 +3973,7 @@
                 <a:solidFill>
                   <a:srgbClr val="94A3B8"/>
                 </a:solidFill>
-                <a:latin typeface="Inter"/>
+                <a:latin typeface="Segoe UI" panose="020B0502040204020203" pitchFamily="34" charset="0"/>
               </a:rPr>
               <a:t> </a:t>
             </a:r>
@@ -3976,7 +3982,7 @@
                 <a:solidFill>
                   <a:srgbClr val="94A3B8"/>
                 </a:solidFill>
-                <a:latin typeface="Inter"/>
+                <a:latin typeface="Segoe UI" panose="020B0502040204020203" pitchFamily="34" charset="0"/>
               </a:rPr>
               <a:t>por</a:t>
             </a:r>
@@ -3985,7 +3991,7 @@
                 <a:solidFill>
                   <a:srgbClr val="94A3B8"/>
                 </a:solidFill>
-                <a:latin typeface="Inter"/>
+                <a:latin typeface="Segoe UI" panose="020B0502040204020203" pitchFamily="34" charset="0"/>
               </a:rPr>
               <a:t> </a:t>
             </a:r>
@@ -3994,7 +4000,7 @@
                 <a:solidFill>
                   <a:srgbClr val="94A3B8"/>
                 </a:solidFill>
-                <a:latin typeface="Inter"/>
+                <a:latin typeface="Segoe UI" panose="020B0502040204020203" pitchFamily="34" charset="0"/>
               </a:rPr>
               <a:t>Poleas</a:t>
             </a:r>
@@ -4003,7 +4009,7 @@
                 <a:solidFill>
                   <a:srgbClr val="94A3B8"/>
                 </a:solidFill>
-                <a:latin typeface="Inter"/>
+                <a:latin typeface="Segoe UI" panose="020B0502040204020203" pitchFamily="34" charset="0"/>
               </a:rPr>
               <a:t> </a:t>
             </a:r>
@@ -4012,7 +4018,7 @@
                 <a:solidFill>
                   <a:srgbClr val="94A3B8"/>
                 </a:solidFill>
-                <a:latin typeface="Inter"/>
+                <a:latin typeface="Segoe UI" panose="020B0502040204020203" pitchFamily="34" charset="0"/>
               </a:rPr>
               <a:t>Síncronas</a:t>
             </a:r>
@@ -4021,7 +4027,7 @@
                 <a:solidFill>
                   <a:srgbClr val="94A3B8"/>
                 </a:solidFill>
-                <a:latin typeface="Inter"/>
+                <a:latin typeface="Segoe UI" panose="020B0502040204020203" pitchFamily="34" charset="0"/>
               </a:rPr>
               <a:t>, </a:t>
             </a:r>
@@ -4030,7 +4036,7 @@
                 <a:solidFill>
                   <a:srgbClr val="94A3B8"/>
                 </a:solidFill>
-                <a:latin typeface="Inter"/>
+                <a:latin typeface="Segoe UI" panose="020B0502040204020203" pitchFamily="34" charset="0"/>
               </a:rPr>
               <a:t>Reducción</a:t>
             </a:r>
@@ -4039,7 +4045,7 @@
                 <a:solidFill>
                   <a:srgbClr val="94A3B8"/>
                 </a:solidFill>
-                <a:latin typeface="Inter"/>
+                <a:latin typeface="Segoe UI" panose="020B0502040204020203" pitchFamily="34" charset="0"/>
               </a:rPr>
               <a:t> de </a:t>
             </a:r>
@@ -4048,7 +4054,7 @@
                 <a:solidFill>
                   <a:srgbClr val="94A3B8"/>
                 </a:solidFill>
-                <a:latin typeface="Inter"/>
+                <a:latin typeface="Segoe UI" panose="020B0502040204020203" pitchFamily="34" charset="0"/>
               </a:rPr>
               <a:t>Inercia</a:t>
             </a:r>
@@ -4057,7 +4063,7 @@
                 <a:solidFill>
                   <a:srgbClr val="94A3B8"/>
                 </a:solidFill>
-                <a:latin typeface="Inter"/>
+                <a:latin typeface="Segoe UI" panose="020B0502040204020203" pitchFamily="34" charset="0"/>
               </a:rPr>
               <a:t> y </a:t>
             </a:r>
@@ -4066,7 +4072,7 @@
                 <a:solidFill>
                   <a:srgbClr val="94A3B8"/>
                 </a:solidFill>
-                <a:latin typeface="Inter"/>
+                <a:latin typeface="Segoe UI" panose="020B0502040204020203" pitchFamily="34" charset="0"/>
               </a:rPr>
               <a:t>Cálculos</a:t>
             </a:r>
@@ -4075,7 +4081,7 @@
                 <a:solidFill>
                   <a:srgbClr val="94A3B8"/>
                 </a:solidFill>
-                <a:latin typeface="Inter"/>
+                <a:latin typeface="Segoe UI" panose="020B0502040204020203" pitchFamily="34" charset="0"/>
               </a:rPr>
               <a:t> con FS=3</a:t>
             </a:r>
@@ -4091,7 +4097,7 @@
         <p:spPr>
           <a:xfrm>
             <a:off x="762000" y="6043612"/>
-            <a:ext cx="5726906" cy="180975"/>
+            <a:ext cx="4199868" cy="173124"/>
           </a:xfrm>
           <a:prstGeom prst="rect">
             <a:avLst/>
@@ -4110,7 +4116,7 @@
                 <a:solidFill>
                   <a:srgbClr val="64748B"/>
                 </a:solidFill>
-                <a:latin typeface="Inter"/>
+                <a:latin typeface="Segoe UI" panose="020B0502040204020203" pitchFamily="34" charset="0"/>
               </a:rPr>
               <a:t>Especificación Técnica de los 22 Puntos de Ingeniería Mecatrónica</a:t>
             </a:r>
@@ -4145,7 +4151,7 @@
                 <a:solidFill>
                   <a:srgbClr val="38BDF8"/>
                 </a:solidFill>
-                <a:latin typeface="Inter"/>
+                <a:latin typeface="Segoe UI" panose="020B0502040204020203" pitchFamily="34" charset="0"/>
               </a:rPr>
               <a:t>Payload 1.5 kg - 5 kg</a:t>
             </a:r>
@@ -4180,7 +4186,7 @@
                 <a:solidFill>
                   <a:srgbClr val="34D399"/>
                 </a:solidFill>
-                <a:latin typeface="Inter"/>
+                <a:latin typeface="Segoe UI" panose="020B0502040204020203" pitchFamily="34" charset="0"/>
               </a:rPr>
               <a:t>FS = 3</a:t>
             </a:r>
@@ -4221,7 +4227,7 @@
                 <a:solidFill>
                   <a:srgbClr val="00B0F0"/>
                 </a:solidFill>
-                <a:latin typeface="Space Grotesk"/>
+                <a:latin typeface="Trebuchet MS" panose="020B0603020202020204" pitchFamily="34" charset="0"/>
               </a:rPr>
               <a:t>D</a:t>
             </a:r>
@@ -4230,7 +4236,7 @@
                 <a:solidFill>
                   <a:srgbClr val="F8FAFC"/>
                 </a:solidFill>
-                <a:latin typeface="Space Grotesk"/>
+                <a:latin typeface="Trebuchet MS" panose="020B0603020202020204" pitchFamily="34" charset="0"/>
               </a:rPr>
               <a:t>ispositivo</a:t>
             </a:r>
@@ -4239,7 +4245,7 @@
                 <a:solidFill>
                   <a:srgbClr val="F8FAFC"/>
                 </a:solidFill>
-                <a:latin typeface="Space Grotesk"/>
+                <a:latin typeface="Trebuchet MS" panose="020B0603020202020204" pitchFamily="34" charset="0"/>
               </a:rPr>
               <a:t> </a:t>
             </a:r>
@@ -4251,7 +4257,7 @@
                 <a:solidFill>
                   <a:srgbClr val="00B0F0"/>
                 </a:solidFill>
-                <a:latin typeface="Space Grotesk"/>
+                <a:latin typeface="Trebuchet MS" panose="020B0603020202020204" pitchFamily="34" charset="0"/>
               </a:rPr>
               <a:t>U</a:t>
             </a:r>
@@ -4260,7 +4266,7 @@
                 <a:solidFill>
                   <a:srgbClr val="F8FAFC"/>
                 </a:solidFill>
-                <a:latin typeface="Space Grotesk"/>
+                <a:latin typeface="Trebuchet MS" panose="020B0603020202020204" pitchFamily="34" charset="0"/>
               </a:rPr>
               <a:t>niversal </a:t>
             </a:r>
@@ -4272,7 +4278,7 @@
                 <a:solidFill>
                   <a:srgbClr val="F8FAFC"/>
                 </a:solidFill>
-                <a:latin typeface="Space Grotesk"/>
+                <a:latin typeface="Trebuchet MS" panose="020B0603020202020204" pitchFamily="34" charset="0"/>
               </a:rPr>
               <a:t>de </a:t>
             </a:r>
@@ -4284,7 +4290,7 @@
                 <a:solidFill>
                   <a:srgbClr val="00B0F0"/>
                 </a:solidFill>
-                <a:latin typeface="Space Grotesk"/>
+                <a:latin typeface="Trebuchet MS" panose="020B0603020202020204" pitchFamily="34" charset="0"/>
               </a:rPr>
               <a:t>M</a:t>
             </a:r>
@@ -4293,7 +4299,7 @@
                 <a:solidFill>
                   <a:srgbClr val="F8FAFC"/>
                 </a:solidFill>
-                <a:latin typeface="Space Grotesk"/>
+                <a:latin typeface="Trebuchet MS" panose="020B0603020202020204" pitchFamily="34" charset="0"/>
               </a:rPr>
               <a:t>anipulación</a:t>
             </a:r>
@@ -4302,7 +4308,7 @@
                 <a:solidFill>
                   <a:srgbClr val="F8FAFC"/>
                 </a:solidFill>
-                <a:latin typeface="Space Grotesk"/>
+                <a:latin typeface="Trebuchet MS" panose="020B0603020202020204" pitchFamily="34" charset="0"/>
               </a:rPr>
               <a:t> </a:t>
             </a:r>
@@ -4314,7 +4320,7 @@
                 <a:solidFill>
                   <a:srgbClr val="00B0F0"/>
                 </a:solidFill>
-                <a:latin typeface="Space Grotesk"/>
+                <a:latin typeface="Trebuchet MS" panose="020B0603020202020204" pitchFamily="34" charset="0"/>
               </a:rPr>
               <a:t>E</a:t>
             </a:r>
@@ -4323,7 +4329,7 @@
                 <a:solidFill>
                   <a:srgbClr val="F8FAFC"/>
                 </a:solidFill>
-                <a:latin typeface="Space Grotesk"/>
+                <a:latin typeface="Trebuchet MS" panose="020B0603020202020204" pitchFamily="34" charset="0"/>
               </a:rPr>
               <a:t>xperimental</a:t>
             </a:r>
@@ -4364,7 +4370,7 @@
                 <a:solidFill>
                   <a:srgbClr val="00B0F0"/>
                 </a:solidFill>
-                <a:latin typeface="Space Grotesk"/>
+                <a:latin typeface="Trebuchet MS" panose="020B0603020202020204" pitchFamily="34" charset="0"/>
               </a:rPr>
               <a:t>DUM-E</a:t>
             </a:r>
@@ -4372,7 +4378,7 @@
               <a:solidFill>
                 <a:srgbClr val="F8FAFC"/>
               </a:solidFill>
-              <a:latin typeface="Space Grotesk"/>
+              <a:latin typeface="Trebuchet MS" panose="020B0603020202020204" pitchFamily="34" charset="0"/>
             </a:endParaRPr>
           </a:p>
         </p:txBody>
@@ -4517,7 +4523,7 @@
         <p:spPr>
           <a:xfrm>
             <a:off x="762000" y="6162675"/>
-            <a:ext cx="11430000" cy="161925"/>
+            <a:ext cx="3000821" cy="161583"/>
           </a:xfrm>
           <a:prstGeom prst="rect">
             <a:avLst/>
@@ -4536,7 +4542,7 @@
                 <a:solidFill>
                   <a:srgbClr val="0F172A"/>
                 </a:solidFill>
-                <a:latin typeface="Inter"/>
+                <a:latin typeface="Segoe UI" panose="020B0502040204020203" pitchFamily="34" charset="0"/>
               </a:rPr>
               <a:t>Parámetros de Masa Inerte vs. Momento Dinámico</a:t>
             </a:r>
@@ -4552,7 +4558,7 @@
         <p:spPr>
           <a:xfrm>
             <a:off x="762000" y="533400"/>
-            <a:ext cx="11430000" cy="161925"/>
+            <a:ext cx="2832507" cy="161583"/>
           </a:xfrm>
           <a:prstGeom prst="rect">
             <a:avLst/>
@@ -4571,7 +4577,7 @@
                 <a:solidFill>
                   <a:srgbClr val="0284C7"/>
                 </a:solidFill>
-                <a:latin typeface="Inter"/>
+                <a:latin typeface="Segoe UI" panose="020B0502040204020203" pitchFamily="34" charset="0"/>
               </a:rPr>
               <a:t>RESTRICCIONES DE DISEÑO · PUNTOS 9 Y 10</a:t>
             </a:r>
@@ -4587,7 +4593,7 @@
         <p:spPr>
           <a:xfrm>
             <a:off x="762000" y="771525"/>
-            <a:ext cx="11430000" cy="438150"/>
+            <a:ext cx="6245299" cy="415498"/>
           </a:xfrm>
           <a:prstGeom prst="rect">
             <a:avLst/>
@@ -4606,7 +4612,7 @@
                 <a:solidFill>
                   <a:srgbClr val="0F172A"/>
                 </a:solidFill>
-                <a:latin typeface="Space Grotesk"/>
+                <a:latin typeface="Trebuchet MS" panose="020B0603020202020204" pitchFamily="34" charset="0"/>
               </a:rPr>
               <a:t>Restricciones Dimensionales y de Masa</a:t>
             </a:r>
@@ -4622,7 +4628,7 @@
         <p:spPr>
           <a:xfrm>
             <a:off x="1076325" y="2647950"/>
-            <a:ext cx="5950743" cy="247650"/>
+            <a:ext cx="3172215" cy="253916"/>
           </a:xfrm>
           <a:prstGeom prst="rect">
             <a:avLst/>
@@ -4641,7 +4647,7 @@
                 <a:solidFill>
                   <a:srgbClr val="0F172A"/>
                 </a:solidFill>
-                <a:latin typeface="Inter"/>
+                <a:latin typeface="Segoe UI" panose="020B0502040204020203" pitchFamily="34" charset="0"/>
               </a:rPr>
               <a:t>Envolvente Cinemática de 6 Ejes</a:t>
             </a:r>
@@ -4676,7 +4682,7 @@
                 <a:solidFill>
                   <a:srgbClr val="334155"/>
                 </a:solidFill>
-                <a:latin typeface="Inter"/>
+                <a:latin typeface="Segoe UI" panose="020B0502040204020203" pitchFamily="34" charset="0"/>
               </a:rPr>
               <a:t>Alcance</a:t>
             </a:r>
@@ -4685,7 +4691,7 @@
                 <a:solidFill>
                   <a:srgbClr val="334155"/>
                 </a:solidFill>
-                <a:latin typeface="Inter"/>
+                <a:latin typeface="Segoe UI" panose="020B0502040204020203" pitchFamily="34" charset="0"/>
               </a:rPr>
               <a:t> Horizontal </a:t>
             </a:r>
@@ -4694,7 +4700,7 @@
                 <a:solidFill>
                   <a:srgbClr val="334155"/>
                 </a:solidFill>
-                <a:latin typeface="Inter"/>
+                <a:latin typeface="Segoe UI" panose="020B0502040204020203" pitchFamily="34" charset="0"/>
               </a:rPr>
               <a:t>Extendido</a:t>
             </a:r>
@@ -4703,7 +4709,7 @@
                 <a:solidFill>
                   <a:srgbClr val="334155"/>
                 </a:solidFill>
-                <a:latin typeface="Inter"/>
+                <a:latin typeface="Segoe UI" panose="020B0502040204020203" pitchFamily="34" charset="0"/>
               </a:rPr>
               <a:t>:</a:t>
             </a:r>
@@ -4712,7 +4718,7 @@
                 <a:solidFill>
                   <a:srgbClr val="334155"/>
                 </a:solidFill>
-                <a:latin typeface="Inter"/>
+                <a:latin typeface="Segoe UI" panose="020B0502040204020203" pitchFamily="34" charset="0"/>
               </a:rPr>
               <a:t> 0.77 </a:t>
             </a:r>
@@ -4721,7 +4727,7 @@
                 <a:solidFill>
                   <a:srgbClr val="334155"/>
                 </a:solidFill>
-                <a:latin typeface="Inter"/>
+                <a:latin typeface="Segoe UI" panose="020B0502040204020203" pitchFamily="34" charset="0"/>
               </a:rPr>
               <a:t>m.</a:t>
             </a:r>
@@ -4729,7 +4735,7 @@
               <a:solidFill>
                 <a:srgbClr val="334155"/>
               </a:solidFill>
-              <a:latin typeface="Inter"/>
+              <a:latin typeface="Segoe UI" panose="020B0502040204020203" pitchFamily="34" charset="0"/>
             </a:endParaRPr>
           </a:p>
         </p:txBody>
@@ -4743,7 +4749,7 @@
         <p:spPr>
           <a:xfrm>
             <a:off x="1076325" y="3619500"/>
-            <a:ext cx="3712427" cy="184666"/>
+            <a:ext cx="4141968" cy="184666"/>
           </a:xfrm>
           <a:prstGeom prst="rect">
             <a:avLst/>
@@ -4762,7 +4768,7 @@
                 <a:solidFill>
                   <a:srgbClr val="334155"/>
                 </a:solidFill>
-                <a:latin typeface="Inter"/>
+                <a:latin typeface="Segoe UI" panose="020B0502040204020203" pitchFamily="34" charset="0"/>
               </a:rPr>
               <a:t>Eslabón</a:t>
             </a:r>
@@ -4771,7 +4777,7 @@
                 <a:solidFill>
                   <a:srgbClr val="334155"/>
                 </a:solidFill>
-                <a:latin typeface="Inter"/>
+                <a:latin typeface="Segoe UI" panose="020B0502040204020203" pitchFamily="34" charset="0"/>
               </a:rPr>
               <a:t> 1 (</a:t>
             </a:r>
@@ -4780,7 +4786,7 @@
                 <a:solidFill>
                   <a:srgbClr val="334155"/>
                 </a:solidFill>
-                <a:latin typeface="Inter"/>
+                <a:latin typeface="Segoe UI" panose="020B0502040204020203" pitchFamily="34" charset="0"/>
               </a:rPr>
               <a:t>Hombro-Codo</a:t>
             </a:r>
@@ -4789,7 +4795,7 @@
                 <a:solidFill>
                   <a:srgbClr val="334155"/>
                 </a:solidFill>
-                <a:latin typeface="Inter"/>
+                <a:latin typeface="Segoe UI" panose="020B0502040204020203" pitchFamily="34" charset="0"/>
               </a:rPr>
               <a:t>):</a:t>
             </a:r>
@@ -4798,7 +4804,7 @@
                 <a:solidFill>
                   <a:srgbClr val="334155"/>
                 </a:solidFill>
-                <a:latin typeface="Inter"/>
+                <a:latin typeface="Segoe UI" panose="020B0502040204020203" pitchFamily="34" charset="0"/>
               </a:rPr>
               <a:t> </a:t>
             </a:r>
@@ -4807,7 +4813,7 @@
                 <a:solidFill>
                   <a:srgbClr val="334155"/>
                 </a:solidFill>
-                <a:latin typeface="Inter"/>
+                <a:latin typeface="Segoe UI" panose="020B0502040204020203" pitchFamily="34" charset="0"/>
               </a:rPr>
               <a:t>Longitud</a:t>
             </a:r>
@@ -4816,7 +4822,7 @@
                 <a:solidFill>
                   <a:srgbClr val="334155"/>
                 </a:solidFill>
-                <a:latin typeface="Inter"/>
+                <a:latin typeface="Segoe UI" panose="020B0502040204020203" pitchFamily="34" charset="0"/>
               </a:rPr>
               <a:t> </a:t>
             </a:r>
@@ -4825,7 +4831,7 @@
                 <a:solidFill>
                   <a:srgbClr val="334155"/>
                 </a:solidFill>
-                <a:latin typeface="Inter"/>
+                <a:latin typeface="Segoe UI" panose="020B0502040204020203" pitchFamily="34" charset="0"/>
               </a:rPr>
               <a:t>planteada</a:t>
             </a:r>
@@ -4834,7 +4840,7 @@
                 <a:solidFill>
                   <a:srgbClr val="334155"/>
                 </a:solidFill>
-                <a:latin typeface="Inter"/>
+                <a:latin typeface="Segoe UI" panose="020B0502040204020203" pitchFamily="34" charset="0"/>
               </a:rPr>
               <a:t> de 264 mm.</a:t>
             </a:r>
@@ -4850,7 +4856,7 @@
         <p:spPr>
           <a:xfrm>
             <a:off x="1076325" y="3981450"/>
-            <a:ext cx="3703771" cy="184666"/>
+            <a:ext cx="4110484" cy="184666"/>
           </a:xfrm>
           <a:prstGeom prst="rect">
             <a:avLst/>
@@ -4869,7 +4875,7 @@
                 <a:solidFill>
                   <a:srgbClr val="334155"/>
                 </a:solidFill>
-                <a:latin typeface="Inter"/>
+                <a:latin typeface="Segoe UI" panose="020B0502040204020203" pitchFamily="34" charset="0"/>
               </a:rPr>
               <a:t>Eslabón</a:t>
             </a:r>
@@ -4878,7 +4884,7 @@
                 <a:solidFill>
                   <a:srgbClr val="334155"/>
                 </a:solidFill>
-                <a:latin typeface="Inter"/>
+                <a:latin typeface="Segoe UI" panose="020B0502040204020203" pitchFamily="34" charset="0"/>
               </a:rPr>
               <a:t> 2 (</a:t>
             </a:r>
@@ -4887,7 +4893,7 @@
                 <a:solidFill>
                   <a:srgbClr val="334155"/>
                 </a:solidFill>
-                <a:latin typeface="Inter"/>
+                <a:latin typeface="Segoe UI" panose="020B0502040204020203" pitchFamily="34" charset="0"/>
               </a:rPr>
               <a:t>Codo-Muñeca</a:t>
             </a:r>
@@ -4896,7 +4902,7 @@
                 <a:solidFill>
                   <a:srgbClr val="334155"/>
                 </a:solidFill>
-                <a:latin typeface="Inter"/>
+                <a:latin typeface="Segoe UI" panose="020B0502040204020203" pitchFamily="34" charset="0"/>
               </a:rPr>
               <a:t>):</a:t>
             </a:r>
@@ -4905,7 +4911,7 @@
                 <a:solidFill>
                   <a:srgbClr val="334155"/>
                 </a:solidFill>
-                <a:latin typeface="Inter"/>
+                <a:latin typeface="Segoe UI" panose="020B0502040204020203" pitchFamily="34" charset="0"/>
               </a:rPr>
               <a:t> </a:t>
             </a:r>
@@ -4914,7 +4920,7 @@
                 <a:solidFill>
                   <a:srgbClr val="334155"/>
                 </a:solidFill>
-                <a:latin typeface="Inter"/>
+                <a:latin typeface="Segoe UI" panose="020B0502040204020203" pitchFamily="34" charset="0"/>
               </a:rPr>
               <a:t>Longitud</a:t>
             </a:r>
@@ -4923,7 +4929,7 @@
                 <a:solidFill>
                   <a:srgbClr val="334155"/>
                 </a:solidFill>
-                <a:latin typeface="Inter"/>
+                <a:latin typeface="Segoe UI" panose="020B0502040204020203" pitchFamily="34" charset="0"/>
               </a:rPr>
               <a:t> </a:t>
             </a:r>
@@ -4932,7 +4938,7 @@
                 <a:solidFill>
                   <a:srgbClr val="334155"/>
                 </a:solidFill>
-                <a:latin typeface="Inter"/>
+                <a:latin typeface="Segoe UI" panose="020B0502040204020203" pitchFamily="34" charset="0"/>
               </a:rPr>
               <a:t>planteada</a:t>
             </a:r>
@@ -4941,7 +4947,7 @@
                 <a:solidFill>
                   <a:srgbClr val="334155"/>
                 </a:solidFill>
-                <a:latin typeface="Inter"/>
+                <a:latin typeface="Segoe UI" panose="020B0502040204020203" pitchFamily="34" charset="0"/>
               </a:rPr>
               <a:t> de 242 mm.</a:t>
             </a:r>
@@ -4976,7 +4982,7 @@
                 <a:solidFill>
                   <a:srgbClr val="334155"/>
                 </a:solidFill>
-                <a:latin typeface="Inter"/>
+                <a:latin typeface="Segoe UI" panose="020B0502040204020203" pitchFamily="34" charset="0"/>
               </a:rPr>
               <a:t>Espacio de </a:t>
             </a:r>
@@ -4985,7 +4991,7 @@
                 <a:solidFill>
                   <a:srgbClr val="334155"/>
                 </a:solidFill>
-                <a:latin typeface="Inter"/>
+                <a:latin typeface="Segoe UI" panose="020B0502040204020203" pitchFamily="34" charset="0"/>
               </a:rPr>
               <a:t>Instalación</a:t>
             </a:r>
@@ -4994,7 +5000,7 @@
                 <a:solidFill>
                   <a:srgbClr val="334155"/>
                 </a:solidFill>
-                <a:latin typeface="Inter"/>
+                <a:latin typeface="Segoe UI" panose="020B0502040204020203" pitchFamily="34" charset="0"/>
               </a:rPr>
               <a:t> </a:t>
             </a:r>
@@ -5003,7 +5009,7 @@
                 <a:solidFill>
                   <a:srgbClr val="334155"/>
                 </a:solidFill>
-                <a:latin typeface="Inter"/>
+                <a:latin typeface="Segoe UI" panose="020B0502040204020203" pitchFamily="34" charset="0"/>
               </a:rPr>
               <a:t>en</a:t>
             </a:r>
@@ -5012,7 +5018,7 @@
                 <a:solidFill>
                   <a:srgbClr val="334155"/>
                 </a:solidFill>
-                <a:latin typeface="Inter"/>
+                <a:latin typeface="Segoe UI" panose="020B0502040204020203" pitchFamily="34" charset="0"/>
               </a:rPr>
               <a:t> Mesa:</a:t>
             </a:r>
@@ -5021,7 +5027,7 @@
                 <a:solidFill>
                   <a:srgbClr val="334155"/>
                 </a:solidFill>
-                <a:latin typeface="Inter"/>
+                <a:latin typeface="Segoe UI" panose="020B0502040204020203" pitchFamily="34" charset="0"/>
               </a:rPr>
               <a:t> Base de </a:t>
             </a:r>
@@ -5030,7 +5036,7 @@
                 <a:solidFill>
                   <a:srgbClr val="334155"/>
                 </a:solidFill>
-                <a:latin typeface="Inter"/>
+                <a:latin typeface="Segoe UI" panose="020B0502040204020203" pitchFamily="34" charset="0"/>
               </a:rPr>
               <a:t>apoyo</a:t>
             </a:r>
@@ -5038,7 +5044,7 @@
               <a:solidFill>
                 <a:srgbClr val="334155"/>
               </a:solidFill>
-              <a:latin typeface="Inter"/>
+              <a:latin typeface="Segoe UI" panose="020B0502040204020203" pitchFamily="34" charset="0"/>
             </a:endParaRPr>
           </a:p>
         </p:txBody>
@@ -5052,7 +5058,7 @@
         <p:spPr>
           <a:xfrm>
             <a:off x="6581775" y="2552700"/>
-            <a:ext cx="5610225" cy="247650"/>
+            <a:ext cx="3229923" cy="253916"/>
           </a:xfrm>
           <a:prstGeom prst="rect">
             <a:avLst/>
@@ -5071,7 +5077,7 @@
                 <a:solidFill>
                   <a:srgbClr val="0F172A"/>
                 </a:solidFill>
-                <a:latin typeface="Inter"/>
+                <a:latin typeface="Segoe UI" panose="020B0502040204020203" pitchFamily="34" charset="0"/>
               </a:rPr>
               <a:t>Distribución de Masa Estructural</a:t>
             </a:r>
@@ -5087,7 +5093,7 @@
         <p:spPr>
           <a:xfrm>
             <a:off x="6581775" y="2971800"/>
-            <a:ext cx="4629150" cy="381000"/>
+            <a:ext cx="4629150" cy="184666"/>
           </a:xfrm>
           <a:prstGeom prst="rect">
             <a:avLst/>
@@ -5106,7 +5112,7 @@
                 <a:solidFill>
                   <a:srgbClr val="334155"/>
                 </a:solidFill>
-                <a:latin typeface="Inter"/>
+                <a:latin typeface="Segoe UI" panose="020B0502040204020203" pitchFamily="34" charset="0"/>
               </a:rPr>
               <a:t>Masa Móvil Suspendida:</a:t>
             </a:r>
@@ -5115,7 +5121,7 @@
                 <a:solidFill>
                   <a:srgbClr val="334155"/>
                 </a:solidFill>
-                <a:latin typeface="Inter"/>
+                <a:latin typeface="Segoe UI" panose="020B0502040204020203" pitchFamily="34" charset="0"/>
               </a:rPr>
               <a:t> Apenas 1.2 kg de piezas huecas y poleas.</a:t>
             </a:r>
@@ -5150,7 +5156,7 @@
                 <a:solidFill>
                   <a:srgbClr val="334155"/>
                 </a:solidFill>
-                <a:latin typeface="Inter"/>
+                <a:latin typeface="Segoe UI" panose="020B0502040204020203" pitchFamily="34" charset="0"/>
               </a:rPr>
               <a:t>Masa Concentrada en Base:</a:t>
             </a:r>
@@ -5159,7 +5165,7 @@
                 <a:solidFill>
                   <a:srgbClr val="334155"/>
                 </a:solidFill>
-                <a:latin typeface="Inter"/>
+                <a:latin typeface="Segoe UI" panose="020B0502040204020203" pitchFamily="34" charset="0"/>
               </a:rPr>
               <a:t> Motores pesados y baleros descansando en mesa.</a:t>
             </a:r>
@@ -5175,7 +5181,7 @@
         <p:spPr>
           <a:xfrm>
             <a:off x="6581775" y="4076700"/>
-            <a:ext cx="5610225" cy="190500"/>
+            <a:ext cx="4258345" cy="184666"/>
           </a:xfrm>
           <a:prstGeom prst="rect">
             <a:avLst/>
@@ -5194,7 +5200,7 @@
                 <a:solidFill>
                   <a:srgbClr val="334155"/>
                 </a:solidFill>
-                <a:latin typeface="Inter"/>
+                <a:latin typeface="Segoe UI" panose="020B0502040204020203" pitchFamily="34" charset="0"/>
               </a:rPr>
               <a:t>Carga Nominal Operativa:</a:t>
             </a:r>
@@ -5203,7 +5209,7 @@
                 <a:solidFill>
                   <a:srgbClr val="334155"/>
                 </a:solidFill>
-                <a:latin typeface="Inter"/>
+                <a:latin typeface="Segoe UI" panose="020B0502040204020203" pitchFamily="34" charset="0"/>
               </a:rPr>
               <a:t> 1.5 kg útil con factor estricto FS=3.</a:t>
             </a:r>
@@ -5238,7 +5244,7 @@
                 <a:solidFill>
                   <a:srgbClr val="334155"/>
                 </a:solidFill>
-                <a:latin typeface="Inter"/>
+                <a:latin typeface="Segoe UI" panose="020B0502040204020203" pitchFamily="34" charset="0"/>
               </a:rPr>
               <a:t>Capacidad Estructural:</a:t>
             </a:r>
@@ -5247,7 +5253,7 @@
                 <a:solidFill>
                   <a:srgbClr val="334155"/>
                 </a:solidFill>
-                <a:latin typeface="Inter"/>
+                <a:latin typeface="Segoe UI" panose="020B0502040204020203" pitchFamily="34" charset="0"/>
               </a:rPr>
               <a:t> Dimensionado cinemático para admitir hasta 5 kg.</a:t>
             </a:r>
@@ -5515,7 +5521,7 @@
         <p:spPr>
           <a:xfrm>
             <a:off x="762000" y="6162675"/>
-            <a:ext cx="11430000" cy="161925"/>
+            <a:ext cx="3169137" cy="161583"/>
           </a:xfrm>
           <a:prstGeom prst="rect">
             <a:avLst/>
@@ -5534,7 +5540,7 @@
                 <a:solidFill>
                   <a:srgbClr val="0F172A"/>
                 </a:solidFill>
-                <a:latin typeface="Inter"/>
+                <a:latin typeface="Segoe UI" panose="020B0502040204020203" pitchFamily="34" charset="0"/>
               </a:rPr>
               <a:t>Evaluación Estructural de Polímeros y Metales Ligeros</a:t>
             </a:r>
@@ -5550,7 +5556,7 @@
         <p:spPr>
           <a:xfrm>
             <a:off x="762000" y="533400"/>
-            <a:ext cx="11430000" cy="161925"/>
+            <a:ext cx="2524730" cy="161583"/>
           </a:xfrm>
           <a:prstGeom prst="rect">
             <a:avLst/>
@@ -5569,7 +5575,7 @@
                 <a:solidFill>
                   <a:srgbClr val="0284C7"/>
                 </a:solidFill>
-                <a:latin typeface="Inter"/>
+                <a:latin typeface="Segoe UI" panose="020B0502040204020203" pitchFamily="34" charset="0"/>
               </a:rPr>
               <a:t>RESTRICCIONES DE DISEÑO · PUNTO 11</a:t>
             </a:r>
@@ -5585,7 +5591,7 @@
         <p:spPr>
           <a:xfrm>
             <a:off x="762000" y="771525"/>
-            <a:ext cx="11430000" cy="438150"/>
+            <a:ext cx="8450840" cy="415498"/>
           </a:xfrm>
           <a:prstGeom prst="rect">
             <a:avLst/>
@@ -5604,7 +5610,7 @@
                 <a:solidFill>
                   <a:srgbClr val="0F172A"/>
                 </a:solidFill>
-                <a:latin typeface="Space Grotesk"/>
+                <a:latin typeface="Trebuchet MS" panose="020B0603020202020204" pitchFamily="34" charset="0"/>
               </a:rPr>
               <a:t>Materiales de Fabricación: Selección y Restricciones</a:t>
             </a:r>
@@ -5620,7 +5626,7 @@
         <p:spPr>
           <a:xfrm>
             <a:off x="962025" y="3311574"/>
-            <a:ext cx="3942094" cy="219075"/>
+            <a:ext cx="1139736" cy="219291"/>
           </a:xfrm>
           <a:prstGeom prst="rect">
             <a:avLst/>
@@ -5639,7 +5645,7 @@
                 <a:solidFill>
                   <a:srgbClr val="166534"/>
                 </a:solidFill>
-                <a:latin typeface="Inter"/>
+                <a:latin typeface="Segoe UI" panose="020B0502040204020203" pitchFamily="34" charset="0"/>
               </a:rPr>
               <a:t>PETG / Nylon</a:t>
             </a:r>
@@ -5655,7 +5661,7 @@
         <p:spPr>
           <a:xfrm>
             <a:off x="962025" y="3625899"/>
-            <a:ext cx="3754375" cy="161925"/>
+            <a:ext cx="1510029" cy="161583"/>
           </a:xfrm>
           <a:prstGeom prst="rect">
             <a:avLst/>
@@ -5674,7 +5680,7 @@
                 <a:solidFill>
                   <a:srgbClr val="14532D"/>
                 </a:solidFill>
-                <a:latin typeface="Inter"/>
+                <a:latin typeface="Segoe UI" panose="020B0502040204020203" pitchFamily="34" charset="0"/>
               </a:rPr>
               <a:t>En consideración activa.</a:t>
             </a:r>
@@ -5713,7 +5719,7 @@
                 <a:solidFill>
                   <a:srgbClr val="334155"/>
                 </a:solidFill>
-                <a:latin typeface="Inter"/>
+                <a:latin typeface="Segoe UI" panose="020B0502040204020203" pitchFamily="34" charset="0"/>
               </a:rPr>
               <a:t>PETG con 8 perímetros y 100% relleno para poleas y carcasas. Nylon evaluado por su alta tenacidad ante fricción mecánica en engranes.</a:t>
             </a:r>
@@ -5729,7 +5735,7 @@
         <p:spPr>
           <a:xfrm>
             <a:off x="4594175" y="3311574"/>
-            <a:ext cx="3942094" cy="219075"/>
+            <a:ext cx="1249637" cy="219291"/>
           </a:xfrm>
           <a:prstGeom prst="rect">
             <a:avLst/>
@@ -5748,7 +5754,7 @@
                 <a:solidFill>
                   <a:srgbClr val="991B1B"/>
                 </a:solidFill>
-                <a:latin typeface="Inter"/>
+                <a:latin typeface="Segoe UI" panose="020B0502040204020203" pitchFamily="34" charset="0"/>
               </a:rPr>
               <a:t>TPU Prohibido</a:t>
             </a:r>
@@ -5764,7 +5770,7 @@
         <p:spPr>
           <a:xfrm>
             <a:off x="4594175" y="3625899"/>
-            <a:ext cx="3754375" cy="161925"/>
+            <a:ext cx="1510029" cy="161583"/>
           </a:xfrm>
           <a:prstGeom prst="rect">
             <a:avLst/>
@@ -5783,7 +5789,7 @@
                 <a:solidFill>
                   <a:srgbClr val="7F1D1D"/>
                 </a:solidFill>
-                <a:latin typeface="Inter"/>
+                <a:latin typeface="Segoe UI" panose="020B0502040204020203" pitchFamily="34" charset="0"/>
               </a:rPr>
               <a:t>Inviable en transmisión.</a:t>
             </a:r>
@@ -5822,7 +5828,7 @@
                 <a:solidFill>
                   <a:srgbClr val="334155"/>
                 </a:solidFill>
-                <a:latin typeface="Inter"/>
+                <a:latin typeface="Segoe UI" panose="020B0502040204020203" pitchFamily="34" charset="0"/>
               </a:rPr>
               <a:t>Su elasticidad causaría flexión de dientes, pérdida de tensión y salto de pasos inmediato bajo torque. Solo admitido en almohadillas del gripper.</a:t>
             </a:r>
@@ -5838,7 +5844,7 @@
         <p:spPr>
           <a:xfrm>
             <a:off x="8226325" y="3311574"/>
-            <a:ext cx="3942094" cy="219075"/>
+            <a:ext cx="1864998" cy="219291"/>
           </a:xfrm>
           <a:prstGeom prst="rect">
             <a:avLst/>
@@ -5857,7 +5863,7 @@
                 <a:solidFill>
                   <a:srgbClr val="0369A1"/>
                 </a:solidFill>
-                <a:latin typeface="Inter"/>
+                <a:latin typeface="Segoe UI" panose="020B0502040204020203" pitchFamily="34" charset="0"/>
               </a:rPr>
               <a:t>Refuerzo de Aluminio</a:t>
             </a:r>
@@ -5873,7 +5879,7 @@
         <p:spPr>
           <a:xfrm>
             <a:off x="8226325" y="3625899"/>
-            <a:ext cx="3754375" cy="161925"/>
+            <a:ext cx="1570943" cy="161583"/>
           </a:xfrm>
           <a:prstGeom prst="rect">
             <a:avLst/>
@@ -5892,7 +5898,7 @@
                 <a:solidFill>
                   <a:srgbClr val="075985"/>
                 </a:solidFill>
-                <a:latin typeface="Inter"/>
+                <a:latin typeface="Segoe UI" panose="020B0502040204020203" pitchFamily="34" charset="0"/>
               </a:rPr>
               <a:t>Rigidez complementaria.</a:t>
             </a:r>
@@ -5931,7 +5937,7 @@
                 <a:solidFill>
                   <a:srgbClr val="334155"/>
                 </a:solidFill>
-                <a:latin typeface="Inter"/>
+                <a:latin typeface="Segoe UI" panose="020B0502040204020203" pitchFamily="34" charset="0"/>
               </a:rPr>
               <a:t>Consideración de placas o perfiles de aluminio en eslabones largos para evitar deflexión elástica ante momentos flectores de 46 N·m.</a:t>
             </a:r>
@@ -6078,7 +6084,7 @@
         <p:spPr>
           <a:xfrm>
             <a:off x="762000" y="6162675"/>
-            <a:ext cx="11430000" cy="161925"/>
+            <a:ext cx="2830903" cy="161583"/>
           </a:xfrm>
           <a:prstGeom prst="rect">
             <a:avLst/>
@@ -6097,7 +6103,7 @@
                 <a:solidFill>
                   <a:srgbClr val="0F172A"/>
                 </a:solidFill>
-                <a:latin typeface="Inter"/>
+                <a:latin typeface="Segoe UI" panose="020B0502040204020203" pitchFamily="34" charset="0"/>
               </a:rPr>
               <a:t>Diagrama de Distribución de Potencia y Señales</a:t>
             </a:r>
@@ -6113,7 +6119,7 @@
         <p:spPr>
           <a:xfrm>
             <a:off x="762000" y="533400"/>
-            <a:ext cx="11430000" cy="161925"/>
+            <a:ext cx="2524730" cy="161583"/>
           </a:xfrm>
           <a:prstGeom prst="rect">
             <a:avLst/>
@@ -6132,7 +6138,7 @@
                 <a:solidFill>
                   <a:srgbClr val="0284C7"/>
                 </a:solidFill>
-                <a:latin typeface="Inter"/>
+                <a:latin typeface="Segoe UI" panose="020B0502040204020203" pitchFamily="34" charset="0"/>
               </a:rPr>
               <a:t>RESTRICCIONES DE DISEÑO · PUNTO 12</a:t>
             </a:r>
@@ -6148,7 +6154,7 @@
         <p:spPr>
           <a:xfrm>
             <a:off x="762000" y="771525"/>
-            <a:ext cx="11430000" cy="438150"/>
+            <a:ext cx="5822107" cy="415498"/>
           </a:xfrm>
           <a:prstGeom prst="rect">
             <a:avLst/>
@@ -6167,7 +6173,7 @@
                 <a:solidFill>
                   <a:srgbClr val="0F172A"/>
                 </a:solidFill>
-                <a:latin typeface="Space Grotesk"/>
+                <a:latin typeface="Trebuchet MS" panose="020B0603020202020204" pitchFamily="34" charset="0"/>
               </a:rPr>
               <a:t>Alimentación y Consumo Energético</a:t>
             </a:r>
@@ -6183,7 +6189,7 @@
         <p:spPr>
           <a:xfrm>
             <a:off x="1076325" y="2733675"/>
-            <a:ext cx="5950743" cy="247650"/>
+            <a:ext cx="3080395" cy="253916"/>
           </a:xfrm>
           <a:prstGeom prst="rect">
             <a:avLst/>
@@ -6202,7 +6208,7 @@
                 <a:solidFill>
                   <a:srgbClr val="0F172A"/>
                 </a:solidFill>
-                <a:latin typeface="Inter"/>
+                <a:latin typeface="Segoe UI" panose="020B0502040204020203" pitchFamily="34" charset="0"/>
               </a:rPr>
               <a:t>Suministro y Niveles de Voltaje</a:t>
             </a:r>
@@ -6237,7 +6243,7 @@
                 <a:solidFill>
                   <a:srgbClr val="334155"/>
                 </a:solidFill>
-                <a:latin typeface="Inter"/>
+                <a:latin typeface="Segoe UI" panose="020B0502040204020203" pitchFamily="34" charset="0"/>
               </a:rPr>
               <a:t>Etapa de Alta Potencia:</a:t>
             </a:r>
@@ -6246,7 +6252,7 @@
                 <a:solidFill>
                   <a:srgbClr val="334155"/>
                 </a:solidFill>
-                <a:latin typeface="Inter"/>
+                <a:latin typeface="Segoe UI" panose="020B0502040204020203" pitchFamily="34" charset="0"/>
               </a:rPr>
               <a:t> 36V a 48V DC para drivers industriales DM860 (NEMA 34).</a:t>
             </a:r>
@@ -6281,7 +6287,7 @@
                 <a:solidFill>
                   <a:srgbClr val="334155"/>
                 </a:solidFill>
-                <a:latin typeface="Inter"/>
+                <a:latin typeface="Segoe UI" panose="020B0502040204020203" pitchFamily="34" charset="0"/>
               </a:rPr>
               <a:t>Etapa Secundaria:</a:t>
             </a:r>
@@ -6290,7 +6296,7 @@
                 <a:solidFill>
                   <a:srgbClr val="334155"/>
                 </a:solidFill>
-                <a:latin typeface="Inter"/>
+                <a:latin typeface="Segoe UI" panose="020B0502040204020203" pitchFamily="34" charset="0"/>
               </a:rPr>
               <a:t> 24V DC regulado para controladores de NEMA 17 con planetarias.</a:t>
             </a:r>
@@ -6325,7 +6331,7 @@
                 <a:solidFill>
                   <a:srgbClr val="334155"/>
                 </a:solidFill>
-                <a:latin typeface="Inter"/>
+                <a:latin typeface="Segoe UI" panose="020B0502040204020203" pitchFamily="34" charset="0"/>
               </a:rPr>
               <a:t>Lógica de Control:</a:t>
             </a:r>
@@ -6334,7 +6340,7 @@
                 <a:solidFill>
                   <a:srgbClr val="334155"/>
                 </a:solidFill>
-                <a:latin typeface="Inter"/>
+                <a:latin typeface="Segoe UI" panose="020B0502040204020203" pitchFamily="34" charset="0"/>
               </a:rPr>
               <a:t> 5V / 3.3V con aislamiento óptico contra ruido electromagnético.</a:t>
             </a:r>
@@ -6350,7 +6356,7 @@
         <p:spPr>
           <a:xfrm>
             <a:off x="6581775" y="2733675"/>
-            <a:ext cx="5610225" cy="247650"/>
+            <a:ext cx="2748445" cy="253916"/>
           </a:xfrm>
           <a:prstGeom prst="rect">
             <a:avLst/>
@@ -6369,7 +6375,7 @@
                 <a:solidFill>
                   <a:srgbClr val="0F172A"/>
                 </a:solidFill>
-                <a:latin typeface="Inter"/>
+                <a:latin typeface="Segoe UI" panose="020B0502040204020203" pitchFamily="34" charset="0"/>
               </a:rPr>
               <a:t>Corriente y Gestión Térmica</a:t>
             </a:r>
@@ -6404,7 +6410,7 @@
                 <a:solidFill>
                   <a:srgbClr val="334155"/>
                 </a:solidFill>
-                <a:latin typeface="Inter"/>
+                <a:latin typeface="Segoe UI" panose="020B0502040204020203" pitchFamily="34" charset="0"/>
               </a:rPr>
               <a:t>Demanda Simultánea:</a:t>
             </a:r>
@@ -6413,7 +6419,7 @@
                 <a:solidFill>
                   <a:srgbClr val="334155"/>
                 </a:solidFill>
-                <a:latin typeface="Inter"/>
+                <a:latin typeface="Segoe UI" panose="020B0502040204020203" pitchFamily="34" charset="0"/>
               </a:rPr>
               <a:t> Consumo pico acotado a 12A – 15A en aceleración.</a:t>
             </a:r>
@@ -6448,7 +6454,7 @@
                 <a:solidFill>
                   <a:srgbClr val="334155"/>
                 </a:solidFill>
-                <a:latin typeface="Inter"/>
+                <a:latin typeface="Segoe UI" panose="020B0502040204020203" pitchFamily="34" charset="0"/>
               </a:rPr>
               <a:t>Disipación Concentrada:</a:t>
             </a:r>
@@ -6457,7 +6463,7 @@
                 <a:solidFill>
                   <a:srgbClr val="334155"/>
                 </a:solidFill>
-                <a:latin typeface="Inter"/>
+                <a:latin typeface="Segoe UI" panose="020B0502040204020203" pitchFamily="34" charset="0"/>
               </a:rPr>
               <a:t> Drivers y fuente montados en la base con ventilación forzada.</a:t>
             </a:r>
@@ -6492,7 +6498,7 @@
                 <a:solidFill>
                   <a:srgbClr val="334155"/>
                 </a:solidFill>
-                <a:latin typeface="Inter"/>
+                <a:latin typeface="Segoe UI" panose="020B0502040204020203" pitchFamily="34" charset="0"/>
               </a:rPr>
               <a:t>Aislamiento en Eslabones:</a:t>
             </a:r>
@@ -6501,7 +6507,7 @@
                 <a:solidFill>
                   <a:srgbClr val="334155"/>
                 </a:solidFill>
-                <a:latin typeface="Inter"/>
+                <a:latin typeface="Segoe UI" panose="020B0502040204020203" pitchFamily="34" charset="0"/>
               </a:rPr>
               <a:t> Motores alejados de piezas plásticas, previniendo ablandamiento.</a:t>
             </a:r>
@@ -6696,7 +6702,7 @@
         <p:spPr>
           <a:xfrm>
             <a:off x="762000" y="6162675"/>
-            <a:ext cx="11430000" cy="161925"/>
+            <a:ext cx="2380460" cy="161583"/>
           </a:xfrm>
           <a:prstGeom prst="rect">
             <a:avLst/>
@@ -6715,7 +6721,7 @@
                 <a:solidFill>
                   <a:srgbClr val="0F172A"/>
                 </a:solidFill>
-                <a:latin typeface="Inter"/>
+                <a:latin typeface="Segoe UI" panose="020B0502040204020203" pitchFamily="34" charset="0"/>
               </a:rPr>
               <a:t>Estrategia de Optimización Presupuestal</a:t>
             </a:r>
@@ -6731,7 +6737,7 @@
         <p:spPr>
           <a:xfrm>
             <a:off x="762000" y="533400"/>
-            <a:ext cx="11430000" cy="161925"/>
+            <a:ext cx="2909451" cy="161583"/>
           </a:xfrm>
           <a:prstGeom prst="rect">
             <a:avLst/>
@@ -6750,7 +6756,7 @@
                 <a:solidFill>
                   <a:srgbClr val="0284C7"/>
                 </a:solidFill>
-                <a:latin typeface="Inter"/>
+                <a:latin typeface="Segoe UI" panose="020B0502040204020203" pitchFamily="34" charset="0"/>
               </a:rPr>
               <a:t>RESTRICCIONES DE DISEÑO · PUNTOS 13 Y 14</a:t>
             </a:r>
@@ -6766,7 +6772,7 @@
         <p:spPr>
           <a:xfrm>
             <a:off x="762000" y="771525"/>
-            <a:ext cx="11430000" cy="438150"/>
+            <a:ext cx="6860853" cy="415498"/>
           </a:xfrm>
           <a:prstGeom prst="rect">
             <a:avLst/>
@@ -6785,7 +6791,7 @@
                 <a:solidFill>
                   <a:srgbClr val="0F172A"/>
                 </a:solidFill>
-                <a:latin typeface="Space Grotesk"/>
+                <a:latin typeface="Trebuchet MS" panose="020B0603020202020204" pitchFamily="34" charset="0"/>
               </a:rPr>
               <a:t>Presupuesto e Inventario de Componentes</a:t>
             </a:r>
@@ -6824,7 +6830,7 @@
                 <a:solidFill>
                   <a:srgbClr val="14532D"/>
                 </a:solidFill>
-                <a:latin typeface="Inter"/>
+                <a:latin typeface="Segoe UI" panose="020B0502040204020203" pitchFamily="34" charset="0"/>
               </a:rPr>
               <a:t>Ya </a:t>
             </a:r>
@@ -6833,7 +6839,7 @@
                 <a:solidFill>
                   <a:srgbClr val="14532D"/>
                 </a:solidFill>
-                <a:latin typeface="Inter"/>
+                <a:latin typeface="Segoe UI" panose="020B0502040204020203" pitchFamily="34" charset="0"/>
               </a:rPr>
               <a:t>disponibles</a:t>
             </a:r>
@@ -6842,7 +6848,7 @@
                 <a:solidFill>
                   <a:srgbClr val="14532D"/>
                 </a:solidFill>
-                <a:latin typeface="Inter"/>
+                <a:latin typeface="Segoe UI" panose="020B0502040204020203" pitchFamily="34" charset="0"/>
               </a:rPr>
               <a:t> al 100%:</a:t>
             </a:r>
@@ -6851,7 +6857,7 @@
                 <a:solidFill>
                   <a:srgbClr val="14532D"/>
                 </a:solidFill>
-                <a:latin typeface="Inter"/>
+                <a:latin typeface="Segoe UI" panose="020B0502040204020203" pitchFamily="34" charset="0"/>
               </a:rPr>
               <a:t> </a:t>
             </a:r>
@@ -6860,7 +6866,7 @@
                 <a:solidFill>
                   <a:srgbClr val="14532D"/>
                 </a:solidFill>
-                <a:latin typeface="Inter"/>
+                <a:latin typeface="Segoe UI" panose="020B0502040204020203" pitchFamily="34" charset="0"/>
               </a:rPr>
               <a:t>Todos</a:t>
             </a:r>
@@ -6869,7 +6875,7 @@
                 <a:solidFill>
                   <a:srgbClr val="14532D"/>
                 </a:solidFill>
-                <a:latin typeface="Inter"/>
+                <a:latin typeface="Segoe UI" panose="020B0502040204020203" pitchFamily="34" charset="0"/>
               </a:rPr>
               <a:t> </a:t>
             </a:r>
@@ -6878,7 +6884,7 @@
                 <a:solidFill>
                   <a:srgbClr val="14532D"/>
                 </a:solidFill>
-                <a:latin typeface="Inter"/>
+                <a:latin typeface="Segoe UI" panose="020B0502040204020203" pitchFamily="34" charset="0"/>
               </a:rPr>
               <a:t>los</a:t>
             </a:r>
@@ -6887,7 +6893,7 @@
                 <a:solidFill>
                   <a:srgbClr val="14532D"/>
                 </a:solidFill>
-                <a:latin typeface="Inter"/>
+                <a:latin typeface="Segoe UI" panose="020B0502040204020203" pitchFamily="34" charset="0"/>
               </a:rPr>
               <a:t> </a:t>
             </a:r>
@@ -6896,7 +6902,7 @@
                 <a:solidFill>
                   <a:srgbClr val="14532D"/>
                 </a:solidFill>
-                <a:latin typeface="Inter"/>
+                <a:latin typeface="Segoe UI" panose="020B0502040204020203" pitchFamily="34" charset="0"/>
               </a:rPr>
               <a:t>motores</a:t>
             </a:r>
@@ -6905,7 +6911,7 @@
                 <a:solidFill>
                   <a:srgbClr val="14532D"/>
                 </a:solidFill>
-                <a:latin typeface="Inter"/>
+                <a:latin typeface="Segoe UI" panose="020B0502040204020203" pitchFamily="34" charset="0"/>
               </a:rPr>
               <a:t> a pasos (NEMA 34 y NEMA 17) y </a:t>
             </a:r>
@@ -6914,7 +6920,7 @@
                 <a:solidFill>
                   <a:srgbClr val="14532D"/>
                 </a:solidFill>
-                <a:latin typeface="Inter"/>
+                <a:latin typeface="Segoe UI" panose="020B0502040204020203" pitchFamily="34" charset="0"/>
               </a:rPr>
               <a:t>los</a:t>
             </a:r>
@@ -6923,7 +6929,7 @@
                 <a:solidFill>
                   <a:srgbClr val="14532D"/>
                 </a:solidFill>
-                <a:latin typeface="Inter"/>
+                <a:latin typeface="Segoe UI" panose="020B0502040204020203" pitchFamily="34" charset="0"/>
               </a:rPr>
               <a:t> </a:t>
             </a:r>
@@ -6932,7 +6938,7 @@
                 <a:solidFill>
                   <a:srgbClr val="14532D"/>
                 </a:solidFill>
-                <a:latin typeface="Inter"/>
+                <a:latin typeface="Segoe UI" panose="020B0502040204020203" pitchFamily="34" charset="0"/>
               </a:rPr>
               <a:t>motorreductores</a:t>
             </a:r>
@@ -6941,7 +6947,7 @@
                 <a:solidFill>
                   <a:srgbClr val="14532D"/>
                 </a:solidFill>
-                <a:latin typeface="Inter"/>
+                <a:latin typeface="Segoe UI" panose="020B0502040204020203" pitchFamily="34" charset="0"/>
               </a:rPr>
               <a:t> </a:t>
             </a:r>
@@ -6950,7 +6956,7 @@
                 <a:solidFill>
                   <a:srgbClr val="14532D"/>
                 </a:solidFill>
-                <a:latin typeface="Inter"/>
+                <a:latin typeface="Segoe UI" panose="020B0502040204020203" pitchFamily="34" charset="0"/>
               </a:rPr>
               <a:t>planetarios</a:t>
             </a:r>
@@ -6959,7 +6965,7 @@
                 <a:solidFill>
                   <a:srgbClr val="14532D"/>
                 </a:solidFill>
-                <a:latin typeface="Inter"/>
+                <a:latin typeface="Segoe UI" panose="020B0502040204020203" pitchFamily="34" charset="0"/>
               </a:rPr>
               <a:t> </a:t>
             </a:r>
@@ -6968,7 +6974,7 @@
                 <a:solidFill>
                   <a:srgbClr val="14532D"/>
                 </a:solidFill>
-                <a:latin typeface="Inter"/>
+                <a:latin typeface="Segoe UI" panose="020B0502040204020203" pitchFamily="34" charset="0"/>
               </a:rPr>
               <a:t>10:1 </a:t>
             </a:r>
@@ -6977,7 +6983,7 @@
                 <a:solidFill>
                   <a:srgbClr val="14532D"/>
                 </a:solidFill>
-                <a:latin typeface="Inter"/>
+                <a:latin typeface="Segoe UI" panose="020B0502040204020203" pitchFamily="34" charset="0"/>
               </a:rPr>
               <a:t>están</a:t>
             </a:r>
@@ -6986,7 +6992,7 @@
                 <a:solidFill>
                   <a:srgbClr val="14532D"/>
                 </a:solidFill>
-                <a:latin typeface="Inter"/>
+                <a:latin typeface="Segoe UI" panose="020B0502040204020203" pitchFamily="34" charset="0"/>
               </a:rPr>
               <a:t> </a:t>
             </a:r>
@@ -6995,7 +7001,7 @@
                 <a:solidFill>
                   <a:srgbClr val="14532D"/>
                 </a:solidFill>
-                <a:latin typeface="Inter"/>
+                <a:latin typeface="Segoe UI" panose="020B0502040204020203" pitchFamily="34" charset="0"/>
               </a:rPr>
               <a:t>físicamente</a:t>
             </a:r>
@@ -7004,7 +7010,7 @@
                 <a:solidFill>
                   <a:srgbClr val="14532D"/>
                 </a:solidFill>
-                <a:latin typeface="Inter"/>
+                <a:latin typeface="Segoe UI" panose="020B0502040204020203" pitchFamily="34" charset="0"/>
               </a:rPr>
               <a:t> </a:t>
             </a:r>
@@ -7013,7 +7019,7 @@
                 <a:solidFill>
                   <a:srgbClr val="14532D"/>
                 </a:solidFill>
-                <a:latin typeface="Inter"/>
+                <a:latin typeface="Segoe UI" panose="020B0502040204020203" pitchFamily="34" charset="0"/>
               </a:rPr>
               <a:t>en</a:t>
             </a:r>
@@ -7022,7 +7028,7 @@
                 <a:solidFill>
                   <a:srgbClr val="14532D"/>
                 </a:solidFill>
-                <a:latin typeface="Inter"/>
+                <a:latin typeface="Segoe UI" panose="020B0502040204020203" pitchFamily="34" charset="0"/>
               </a:rPr>
               <a:t> </a:t>
             </a:r>
@@ -7031,7 +7037,7 @@
                 <a:solidFill>
                   <a:srgbClr val="14532D"/>
                 </a:solidFill>
-                <a:latin typeface="Inter"/>
+                <a:latin typeface="Segoe UI" panose="020B0502040204020203" pitchFamily="34" charset="0"/>
               </a:rPr>
               <a:t>inventari</a:t>
             </a:r>
@@ -7040,7 +7046,7 @@
                 <a:solidFill>
                   <a:srgbClr val="14532D"/>
                 </a:solidFill>
-                <a:latin typeface="Inter"/>
+                <a:latin typeface="Segoe UI" panose="020B0502040204020203" pitchFamily="34" charset="0"/>
               </a:rPr>
               <a:t>o</a:t>
             </a:r>
@@ -7049,7 +7055,7 @@
                 <a:solidFill>
                   <a:srgbClr val="14532D"/>
                 </a:solidFill>
-                <a:latin typeface="Inter"/>
+                <a:latin typeface="Segoe UI" panose="020B0502040204020203" pitchFamily="34" charset="0"/>
               </a:rPr>
               <a:t> y </a:t>
             </a:r>
@@ -7058,7 +7064,7 @@
                 <a:solidFill>
                   <a:srgbClr val="14532D"/>
                 </a:solidFill>
-                <a:latin typeface="Inter"/>
+                <a:latin typeface="Segoe UI" panose="020B0502040204020203" pitchFamily="34" charset="0"/>
               </a:rPr>
               <a:t>ya</a:t>
             </a:r>
@@ -7067,7 +7073,7 @@
                 <a:solidFill>
                   <a:srgbClr val="14532D"/>
                 </a:solidFill>
-                <a:latin typeface="Inter"/>
+                <a:latin typeface="Segoe UI" panose="020B0502040204020203" pitchFamily="34" charset="0"/>
               </a:rPr>
               <a:t> </a:t>
             </a:r>
@@ -7076,7 +7082,7 @@
                 <a:solidFill>
                   <a:srgbClr val="14532D"/>
                 </a:solidFill>
-                <a:latin typeface="Inter"/>
+                <a:latin typeface="Segoe UI" panose="020B0502040204020203" pitchFamily="34" charset="0"/>
               </a:rPr>
               <a:t>disponemos</a:t>
             </a:r>
@@ -7085,7 +7091,7 @@
                 <a:solidFill>
                   <a:srgbClr val="14532D"/>
                 </a:solidFill>
-                <a:latin typeface="Inter"/>
+                <a:latin typeface="Segoe UI" panose="020B0502040204020203" pitchFamily="34" charset="0"/>
               </a:rPr>
               <a:t> de </a:t>
             </a:r>
@@ -7094,7 +7100,7 @@
                 <a:solidFill>
                   <a:srgbClr val="14532D"/>
                 </a:solidFill>
-                <a:latin typeface="Inter"/>
+                <a:latin typeface="Segoe UI" panose="020B0502040204020203" pitchFamily="34" charset="0"/>
               </a:rPr>
               <a:t>ellos</a:t>
             </a:r>
@@ -7103,7 +7109,7 @@
                 <a:solidFill>
                   <a:srgbClr val="14532D"/>
                 </a:solidFill>
-                <a:latin typeface="Inter"/>
+                <a:latin typeface="Segoe UI" panose="020B0502040204020203" pitchFamily="34" charset="0"/>
               </a:rPr>
               <a:t>.</a:t>
             </a:r>
@@ -7142,7 +7148,7 @@
                 <a:solidFill>
                   <a:srgbClr val="14532D"/>
                 </a:solidFill>
-                <a:latin typeface="Inter"/>
+                <a:latin typeface="Segoe UI" panose="020B0502040204020203" pitchFamily="34" charset="0"/>
               </a:rPr>
               <a:t>Inversión amortizada:</a:t>
             </a:r>
@@ -7151,7 +7157,7 @@
                 <a:solidFill>
                   <a:srgbClr val="14532D"/>
                 </a:solidFill>
-                <a:latin typeface="Inter"/>
+                <a:latin typeface="Segoe UI" panose="020B0502040204020203" pitchFamily="34" charset="0"/>
               </a:rPr>
               <a:t> No se requiere comprar nuevos actuadores ni cajas reductoras metálicas caras.</a:t>
             </a:r>
@@ -7167,7 +7173,7 @@
         <p:spPr>
           <a:xfrm>
             <a:off x="1428750" y="2800350"/>
-            <a:ext cx="3725465" cy="266700"/>
+            <a:ext cx="2729914" cy="253916"/>
           </a:xfrm>
           <a:prstGeom prst="rect">
             <a:avLst/>
@@ -7186,7 +7192,7 @@
                 <a:solidFill>
                   <a:srgbClr val="166534"/>
                 </a:solidFill>
-                <a:latin typeface="Space Grotesk"/>
+                <a:latin typeface="Trebuchet MS" panose="020B0603020202020204" pitchFamily="34" charset="0"/>
               </a:rPr>
               <a:t>Componentes en Inventario</a:t>
             </a:r>
@@ -7202,7 +7208,7 @@
         <p:spPr>
           <a:xfrm>
             <a:off x="6420296" y="2562225"/>
-            <a:ext cx="4900612" cy="266700"/>
+            <a:ext cx="3573927" cy="253916"/>
           </a:xfrm>
           <a:prstGeom prst="rect">
             <a:avLst/>
@@ -7221,7 +7227,7 @@
                 <a:solidFill>
                   <a:srgbClr val="0F172A"/>
                 </a:solidFill>
-                <a:latin typeface="Space Grotesk"/>
+                <a:latin typeface="Trebuchet MS" panose="020B0603020202020204" pitchFamily="34" charset="0"/>
               </a:rPr>
               <a:t>Componentes Faltantes por Adquirir</a:t>
             </a:r>
@@ -7260,7 +7266,7 @@
                 <a:solidFill>
                   <a:srgbClr val="334155"/>
                 </a:solidFill>
-                <a:latin typeface="Inter"/>
+                <a:latin typeface="Segoe UI" panose="020B0502040204020203" pitchFamily="34" charset="0"/>
               </a:rPr>
               <a:t>Rodamientos</a:t>
             </a:r>
@@ -7269,7 +7275,7 @@
                 <a:solidFill>
                   <a:srgbClr val="334155"/>
                 </a:solidFill>
-                <a:latin typeface="Inter"/>
+                <a:latin typeface="Segoe UI" panose="020B0502040204020203" pitchFamily="34" charset="0"/>
               </a:rPr>
               <a:t> y </a:t>
             </a:r>
@@ -7278,7 +7284,7 @@
                 <a:solidFill>
                   <a:srgbClr val="334155"/>
                 </a:solidFill>
-                <a:latin typeface="Inter"/>
+                <a:latin typeface="Segoe UI" panose="020B0502040204020203" pitchFamily="34" charset="0"/>
               </a:rPr>
               <a:t>Baleros</a:t>
             </a:r>
@@ -7287,7 +7293,7 @@
                 <a:solidFill>
                   <a:srgbClr val="334155"/>
                 </a:solidFill>
-                <a:latin typeface="Inter"/>
+                <a:latin typeface="Segoe UI" panose="020B0502040204020203" pitchFamily="34" charset="0"/>
               </a:rPr>
               <a:t>:</a:t>
             </a:r>
@@ -7296,7 +7302,7 @@
                 <a:solidFill>
                   <a:srgbClr val="334155"/>
                 </a:solidFill>
-                <a:latin typeface="Inter"/>
+                <a:latin typeface="Segoe UI" panose="020B0502040204020203" pitchFamily="34" charset="0"/>
               </a:rPr>
               <a:t> </a:t>
             </a:r>
@@ -7305,7 +7311,7 @@
                 <a:solidFill>
                   <a:srgbClr val="334155"/>
                 </a:solidFill>
-                <a:latin typeface="Inter"/>
+                <a:latin typeface="Segoe UI" panose="020B0502040204020203" pitchFamily="34" charset="0"/>
               </a:rPr>
               <a:t>Modelos</a:t>
             </a:r>
@@ -7314,7 +7320,7 @@
                 <a:solidFill>
                   <a:srgbClr val="334155"/>
                 </a:solidFill>
-                <a:latin typeface="Inter"/>
+                <a:latin typeface="Segoe UI" panose="020B0502040204020203" pitchFamily="34" charset="0"/>
               </a:rPr>
               <a:t> 608ZZ y </a:t>
             </a:r>
@@ -7323,7 +7329,7 @@
                 <a:solidFill>
                   <a:srgbClr val="334155"/>
                 </a:solidFill>
-                <a:latin typeface="Inter"/>
+                <a:latin typeface="Segoe UI" panose="020B0502040204020203" pitchFamily="34" charset="0"/>
               </a:rPr>
               <a:t>rodamientos</a:t>
             </a:r>
@@ -7332,7 +7338,7 @@
                 <a:solidFill>
                   <a:srgbClr val="334155"/>
                 </a:solidFill>
-                <a:latin typeface="Inter"/>
+                <a:latin typeface="Segoe UI" panose="020B0502040204020203" pitchFamily="34" charset="0"/>
               </a:rPr>
               <a:t> </a:t>
             </a:r>
@@ -7341,7 +7347,7 @@
                 <a:solidFill>
                   <a:srgbClr val="334155"/>
                 </a:solidFill>
-                <a:latin typeface="Inter"/>
+                <a:latin typeface="Segoe UI" panose="020B0502040204020203" pitchFamily="34" charset="0"/>
               </a:rPr>
               <a:t>axiales</a:t>
             </a:r>
@@ -7350,7 +7356,7 @@
                 <a:solidFill>
                   <a:srgbClr val="334155"/>
                 </a:solidFill>
-                <a:latin typeface="Inter"/>
+                <a:latin typeface="Segoe UI" panose="020B0502040204020203" pitchFamily="34" charset="0"/>
               </a:rPr>
               <a:t> para </a:t>
             </a:r>
@@ -7359,7 +7365,7 @@
                 <a:solidFill>
                   <a:srgbClr val="334155"/>
                 </a:solidFill>
-                <a:latin typeface="Inter"/>
+                <a:latin typeface="Segoe UI" panose="020B0502040204020203" pitchFamily="34" charset="0"/>
               </a:rPr>
               <a:t>ejes</a:t>
             </a:r>
@@ -7368,7 +7374,7 @@
                 <a:solidFill>
                   <a:srgbClr val="334155"/>
                 </a:solidFill>
-                <a:latin typeface="Inter"/>
+                <a:latin typeface="Segoe UI" panose="020B0502040204020203" pitchFamily="34" charset="0"/>
               </a:rPr>
               <a:t> de </a:t>
             </a:r>
@@ -7377,7 +7383,7 @@
                 <a:solidFill>
                   <a:srgbClr val="334155"/>
                 </a:solidFill>
-                <a:latin typeface="Inter"/>
+                <a:latin typeface="Segoe UI" panose="020B0502040204020203" pitchFamily="34" charset="0"/>
               </a:rPr>
               <a:t>articulación</a:t>
             </a:r>
@@ -7386,7 +7392,7 @@
                 <a:solidFill>
                   <a:srgbClr val="334155"/>
                 </a:solidFill>
-                <a:latin typeface="Inter"/>
+                <a:latin typeface="Segoe UI" panose="020B0502040204020203" pitchFamily="34" charset="0"/>
               </a:rPr>
               <a:t> o </a:t>
             </a:r>
@@ -7395,7 +7401,7 @@
                 <a:solidFill>
                   <a:srgbClr val="334155"/>
                 </a:solidFill>
-                <a:latin typeface="Inter"/>
+                <a:latin typeface="Segoe UI" panose="020B0502040204020203" pitchFamily="34" charset="0"/>
               </a:rPr>
               <a:t>en</a:t>
             </a:r>
@@ -7404,7 +7410,7 @@
                 <a:solidFill>
                   <a:srgbClr val="334155"/>
                 </a:solidFill>
-                <a:latin typeface="Inter"/>
+                <a:latin typeface="Segoe UI" panose="020B0502040204020203" pitchFamily="34" charset="0"/>
               </a:rPr>
               <a:t> </a:t>
             </a:r>
@@ -7413,7 +7419,7 @@
                 <a:solidFill>
                   <a:srgbClr val="334155"/>
                 </a:solidFill>
-                <a:latin typeface="Inter"/>
+                <a:latin typeface="Segoe UI" panose="020B0502040204020203" pitchFamily="34" charset="0"/>
               </a:rPr>
               <a:t>su</a:t>
             </a:r>
@@ -7422,7 +7428,7 @@
                 <a:solidFill>
                   <a:srgbClr val="334155"/>
                 </a:solidFill>
-                <a:latin typeface="Inter"/>
+                <a:latin typeface="Segoe UI" panose="020B0502040204020203" pitchFamily="34" charset="0"/>
               </a:rPr>
               <a:t> </a:t>
             </a:r>
@@ -7431,7 +7437,7 @@
                 <a:solidFill>
                   <a:srgbClr val="334155"/>
                 </a:solidFill>
-                <a:latin typeface="Inter"/>
+                <a:latin typeface="Segoe UI" panose="020B0502040204020203" pitchFamily="34" charset="0"/>
               </a:rPr>
               <a:t>defecto</a:t>
             </a:r>
@@ -7440,7 +7446,7 @@
                 <a:solidFill>
                   <a:srgbClr val="334155"/>
                 </a:solidFill>
-                <a:latin typeface="Inter"/>
+                <a:latin typeface="Segoe UI" panose="020B0502040204020203" pitchFamily="34" charset="0"/>
               </a:rPr>
               <a:t> </a:t>
             </a:r>
@@ -7449,7 +7455,7 @@
                 <a:solidFill>
                   <a:srgbClr val="334155"/>
                 </a:solidFill>
-                <a:latin typeface="Inter"/>
+                <a:latin typeface="Segoe UI" panose="020B0502040204020203" pitchFamily="34" charset="0"/>
               </a:rPr>
               <a:t>impresos</a:t>
             </a:r>
@@ -7458,7 +7464,7 @@
                 <a:solidFill>
                   <a:srgbClr val="334155"/>
                 </a:solidFill>
-                <a:latin typeface="Inter"/>
+                <a:latin typeface="Segoe UI" panose="020B0502040204020203" pitchFamily="34" charset="0"/>
               </a:rPr>
               <a:t> </a:t>
             </a:r>
@@ -7467,7 +7473,7 @@
                 <a:solidFill>
                   <a:srgbClr val="334155"/>
                 </a:solidFill>
-                <a:latin typeface="Inter"/>
+                <a:latin typeface="Segoe UI" panose="020B0502040204020203" pitchFamily="34" charset="0"/>
               </a:rPr>
               <a:t>en</a:t>
             </a:r>
@@ -7476,7 +7482,7 @@
                 <a:solidFill>
                   <a:srgbClr val="334155"/>
                 </a:solidFill>
-                <a:latin typeface="Inter"/>
+                <a:latin typeface="Segoe UI" panose="020B0502040204020203" pitchFamily="34" charset="0"/>
               </a:rPr>
               <a:t> 3d</a:t>
             </a:r>
@@ -7485,7 +7491,7 @@
                 <a:solidFill>
                   <a:srgbClr val="334155"/>
                 </a:solidFill>
-                <a:latin typeface="Inter"/>
+                <a:latin typeface="Segoe UI" panose="020B0502040204020203" pitchFamily="34" charset="0"/>
               </a:rPr>
               <a:t>.</a:t>
             </a:r>
@@ -7501,7 +7507,7 @@
         <p:spPr>
           <a:xfrm>
             <a:off x="6067871" y="3462337"/>
-            <a:ext cx="5143053" cy="385762"/>
+            <a:ext cx="5143053" cy="369332"/>
           </a:xfrm>
           <a:prstGeom prst="rect">
             <a:avLst/>
@@ -7524,7 +7530,7 @@
                 <a:solidFill>
                   <a:srgbClr val="334155"/>
                 </a:solidFill>
-                <a:latin typeface="Inter"/>
+                <a:latin typeface="Segoe UI" panose="020B0502040204020203" pitchFamily="34" charset="0"/>
               </a:rPr>
               <a:t>Ejes y Tornillería:</a:t>
             </a:r>
@@ -7533,7 +7539,7 @@
                 <a:solidFill>
                   <a:srgbClr val="334155"/>
                 </a:solidFill>
-                <a:latin typeface="Inter"/>
+                <a:latin typeface="Segoe UI" panose="020B0502040204020203" pitchFamily="34" charset="0"/>
               </a:rPr>
               <a:t> Pasadores de acero y pernos métricos para diseñar alojamientos 3D.</a:t>
             </a:r>
@@ -7572,7 +7578,7 @@
                 <a:solidFill>
                   <a:srgbClr val="334155"/>
                 </a:solidFill>
-                <a:latin typeface="Inter"/>
+                <a:latin typeface="Segoe UI" panose="020B0502040204020203" pitchFamily="34" charset="0"/>
               </a:rPr>
               <a:t>Kit de </a:t>
             </a:r>
@@ -7581,7 +7587,7 @@
                 <a:solidFill>
                   <a:srgbClr val="334155"/>
                 </a:solidFill>
-                <a:latin typeface="Inter"/>
+                <a:latin typeface="Segoe UI" panose="020B0502040204020203" pitchFamily="34" charset="0"/>
               </a:rPr>
               <a:t>Bandas</a:t>
             </a:r>
@@ -7590,7 +7596,7 @@
                 <a:solidFill>
                   <a:srgbClr val="334155"/>
                 </a:solidFill>
-                <a:latin typeface="Inter"/>
+                <a:latin typeface="Segoe UI" panose="020B0502040204020203" pitchFamily="34" charset="0"/>
               </a:rPr>
               <a:t>:</a:t>
             </a:r>
@@ -7599,7 +7605,7 @@
                 <a:solidFill>
                   <a:srgbClr val="334155"/>
                 </a:solidFill>
-                <a:latin typeface="Inter"/>
+                <a:latin typeface="Segoe UI" panose="020B0502040204020203" pitchFamily="34" charset="0"/>
               </a:rPr>
               <a:t> Correas GT2 / HTD 3M </a:t>
             </a:r>
@@ -7608,7 +7614,7 @@
                 <a:solidFill>
                   <a:srgbClr val="334155"/>
                 </a:solidFill>
-                <a:latin typeface="Inter"/>
+                <a:latin typeface="Segoe UI" panose="020B0502040204020203" pitchFamily="34" charset="0"/>
               </a:rPr>
               <a:t>dentadas</a:t>
             </a:r>
@@ -7617,7 +7623,7 @@
                 <a:solidFill>
                   <a:srgbClr val="334155"/>
                 </a:solidFill>
-                <a:latin typeface="Inter"/>
+                <a:latin typeface="Segoe UI" panose="020B0502040204020203" pitchFamily="34" charset="0"/>
               </a:rPr>
               <a:t>.</a:t>
             </a:r>
@@ -7662,7 +7668,7 @@
                 <a:solidFill>
                   <a:srgbClr val="C00000"/>
                 </a:solidFill>
-                <a:latin typeface="Inter"/>
+                <a:latin typeface="Segoe UI" panose="020B0502040204020203" pitchFamily="34" charset="0"/>
               </a:rPr>
               <a:t>Aprox</a:t>
             </a:r>
@@ -7671,7 +7677,7 @@
                 <a:solidFill>
                   <a:srgbClr val="C00000"/>
                 </a:solidFill>
-                <a:latin typeface="Inter"/>
+                <a:latin typeface="Segoe UI" panose="020B0502040204020203" pitchFamily="34" charset="0"/>
               </a:rPr>
               <a:t>. 2500</a:t>
             </a:r>
@@ -7679,7 +7685,7 @@
               <a:solidFill>
                 <a:srgbClr val="C00000"/>
               </a:solidFill>
-              <a:latin typeface="Inter"/>
+              <a:latin typeface="Segoe UI" panose="020B0502040204020203" pitchFamily="34" charset="0"/>
             </a:endParaRPr>
           </a:p>
         </p:txBody>
@@ -7945,7 +7951,7 @@
         <p:spPr>
           <a:xfrm>
             <a:off x="762000" y="6162675"/>
-            <a:ext cx="11430000" cy="161925"/>
+            <a:ext cx="2228174" cy="161583"/>
           </a:xfrm>
           <a:prstGeom prst="rect">
             <a:avLst/>
@@ -7964,7 +7970,7 @@
                 <a:solidFill>
                   <a:srgbClr val="0F172A"/>
                 </a:solidFill>
-                <a:latin typeface="Inter"/>
+                <a:latin typeface="Segoe UI" panose="020B0502040204020203" pitchFamily="34" charset="0"/>
               </a:rPr>
               <a:t>Protocolos de Seguridad Mecatrónica</a:t>
             </a:r>
@@ -7980,7 +7986,7 @@
         <p:spPr>
           <a:xfrm>
             <a:off x="762000" y="533400"/>
-            <a:ext cx="11430000" cy="161925"/>
+            <a:ext cx="2524730" cy="161583"/>
           </a:xfrm>
           <a:prstGeom prst="rect">
             <a:avLst/>
@@ -7999,7 +8005,7 @@
                 <a:solidFill>
                   <a:srgbClr val="0284C7"/>
                 </a:solidFill>
-                <a:latin typeface="Inter"/>
+                <a:latin typeface="Segoe UI" panose="020B0502040204020203" pitchFamily="34" charset="0"/>
               </a:rPr>
               <a:t>RESTRICCIONES DE DISEÑO · PUNTO 15</a:t>
             </a:r>
@@ -8015,7 +8021,7 @@
         <p:spPr>
           <a:xfrm>
             <a:off x="762000" y="771525"/>
-            <a:ext cx="11430000" cy="438150"/>
+            <a:ext cx="6687728" cy="415498"/>
           </a:xfrm>
           <a:prstGeom prst="rect">
             <a:avLst/>
@@ -8034,7 +8040,7 @@
                 <a:solidFill>
                   <a:srgbClr val="0F172A"/>
                 </a:solidFill>
-                <a:latin typeface="Space Grotesk"/>
+                <a:latin typeface="Trebuchet MS" panose="020B0603020202020204" pitchFamily="34" charset="0"/>
               </a:rPr>
               <a:t>Condiciones y Restricciones de Seguridad</a:t>
             </a:r>
@@ -8050,7 +8056,7 @@
         <p:spPr>
           <a:xfrm>
             <a:off x="1000125" y="3314700"/>
-            <a:ext cx="3842081" cy="228600"/>
+            <a:ext cx="2162387" cy="230832"/>
           </a:xfrm>
           <a:prstGeom prst="rect">
             <a:avLst/>
@@ -8069,7 +8075,7 @@
                 <a:solidFill>
                   <a:srgbClr val="9A3412"/>
                 </a:solidFill>
-                <a:latin typeface="Inter"/>
+                <a:latin typeface="Segoe UI" panose="020B0502040204020203" pitchFamily="34" charset="0"/>
               </a:rPr>
               <a:t>Validación por Software</a:t>
             </a:r>
@@ -8085,7 +8091,7 @@
         <p:spPr>
           <a:xfrm>
             <a:off x="1000125" y="3657600"/>
-            <a:ext cx="3659125" cy="180975"/>
+            <a:ext cx="1734449" cy="173124"/>
           </a:xfrm>
           <a:prstGeom prst="rect">
             <a:avLst/>
@@ -8104,7 +8110,7 @@
                 <a:solidFill>
                   <a:srgbClr val="431407"/>
                 </a:solidFill>
-                <a:latin typeface="Inter"/>
+                <a:latin typeface="Segoe UI" panose="020B0502040204020203" pitchFamily="34" charset="0"/>
               </a:rPr>
               <a:t>Sin topes mecánicos duros.</a:t>
             </a:r>
@@ -8139,7 +8145,7 @@
                 <a:solidFill>
                   <a:srgbClr val="7C2D12"/>
                 </a:solidFill>
-                <a:latin typeface="Inter"/>
+                <a:latin typeface="Segoe UI" panose="020B0502040204020203" pitchFamily="34" charset="0"/>
               </a:rPr>
               <a:t>Límites cinemáticos controlados por firmware para evitar impactos destructivos y desalineación de correas.</a:t>
             </a:r>
@@ -8155,7 +8161,7 @@
         <p:spPr>
           <a:xfrm>
             <a:off x="4632275" y="3314700"/>
-            <a:ext cx="3842081" cy="228600"/>
+            <a:ext cx="2354619" cy="230832"/>
           </a:xfrm>
           <a:prstGeom prst="rect">
             <a:avLst/>
@@ -8174,7 +8180,7 @@
                 <a:solidFill>
                   <a:srgbClr val="9A3412"/>
                 </a:solidFill>
-                <a:latin typeface="Inter"/>
+                <a:latin typeface="Segoe UI" panose="020B0502040204020203" pitchFamily="34" charset="0"/>
               </a:rPr>
               <a:t>Poleas y Bandas Cubiertas</a:t>
             </a:r>
@@ -8190,7 +8196,7 @@
         <p:spPr>
           <a:xfrm>
             <a:off x="4632275" y="3657600"/>
-            <a:ext cx="3659125" cy="180975"/>
+            <a:ext cx="1930016" cy="173124"/>
           </a:xfrm>
           <a:prstGeom prst="rect">
             <a:avLst/>
@@ -8209,7 +8215,7 @@
                 <a:solidFill>
                   <a:srgbClr val="431407"/>
                 </a:solidFill>
-                <a:latin typeface="Inter"/>
+                <a:latin typeface="Segoe UI" panose="020B0502040204020203" pitchFamily="34" charset="0"/>
               </a:rPr>
               <a:t>Carcasas</a:t>
             </a:r>
@@ -8218,7 +8224,7 @@
                 <a:solidFill>
                   <a:srgbClr val="431407"/>
                 </a:solidFill>
-                <a:latin typeface="Inter"/>
+                <a:latin typeface="Segoe UI" panose="020B0502040204020203" pitchFamily="34" charset="0"/>
               </a:rPr>
               <a:t> </a:t>
             </a:r>
@@ -8227,7 +8233,7 @@
                 <a:solidFill>
                   <a:srgbClr val="431407"/>
                 </a:solidFill>
-                <a:latin typeface="Inter"/>
+                <a:latin typeface="Segoe UI" panose="020B0502040204020203" pitchFamily="34" charset="0"/>
               </a:rPr>
               <a:t>protectoras</a:t>
             </a:r>
@@ -8236,7 +8242,7 @@
                 <a:solidFill>
                   <a:srgbClr val="431407"/>
                 </a:solidFill>
-                <a:latin typeface="Inter"/>
+                <a:latin typeface="Segoe UI" panose="020B0502040204020203" pitchFamily="34" charset="0"/>
               </a:rPr>
               <a:t> </a:t>
             </a:r>
@@ -8245,7 +8251,7 @@
                 <a:solidFill>
                   <a:srgbClr val="431407"/>
                 </a:solidFill>
-                <a:latin typeface="Inter"/>
+                <a:latin typeface="Segoe UI" panose="020B0502040204020203" pitchFamily="34" charset="0"/>
               </a:rPr>
               <a:t>cerradas</a:t>
             </a:r>
@@ -8254,7 +8260,7 @@
                 <a:solidFill>
                   <a:srgbClr val="431407"/>
                 </a:solidFill>
-                <a:latin typeface="Inter"/>
+                <a:latin typeface="Segoe UI" panose="020B0502040204020203" pitchFamily="34" charset="0"/>
               </a:rPr>
               <a:t>.</a:t>
             </a:r>
@@ -8270,7 +8276,7 @@
         <p:spPr>
           <a:xfrm>
             <a:off x="4632275" y="3952875"/>
-            <a:ext cx="3022550" cy="485775"/>
+            <a:ext cx="3022550" cy="484748"/>
           </a:xfrm>
           <a:prstGeom prst="rect">
             <a:avLst/>
@@ -8289,7 +8295,7 @@
                 <a:solidFill>
                   <a:srgbClr val="7C2D12"/>
                 </a:solidFill>
-                <a:latin typeface="Inter"/>
+                <a:latin typeface="Segoe UI" panose="020B0502040204020203" pitchFamily="34" charset="0"/>
               </a:rPr>
               <a:t>Blindaje</a:t>
             </a:r>
@@ -8298,7 +8304,7 @@
                 <a:solidFill>
                   <a:srgbClr val="7C2D12"/>
                 </a:solidFill>
-                <a:latin typeface="Inter"/>
+                <a:latin typeface="Segoe UI" panose="020B0502040204020203" pitchFamily="34" charset="0"/>
               </a:rPr>
               <a:t> </a:t>
             </a:r>
@@ -8307,7 +8313,7 @@
                 <a:solidFill>
                   <a:srgbClr val="7C2D12"/>
                 </a:solidFill>
-                <a:latin typeface="Inter"/>
+                <a:latin typeface="Segoe UI" panose="020B0502040204020203" pitchFamily="34" charset="0"/>
               </a:rPr>
               <a:t>en</a:t>
             </a:r>
@@ -8316,7 +8322,7 @@
                 <a:solidFill>
                   <a:srgbClr val="7C2D12"/>
                 </a:solidFill>
-                <a:latin typeface="Inter"/>
+                <a:latin typeface="Segoe UI" panose="020B0502040204020203" pitchFamily="34" charset="0"/>
               </a:rPr>
               <a:t> puntos de </a:t>
             </a:r>
@@ -8325,7 +8331,7 @@
                 <a:solidFill>
                   <a:srgbClr val="7C2D12"/>
                 </a:solidFill>
-                <a:latin typeface="Inter"/>
+                <a:latin typeface="Segoe UI" panose="020B0502040204020203" pitchFamily="34" charset="0"/>
               </a:rPr>
               <a:t>pellizco</a:t>
             </a:r>
@@ -8334,7 +8340,7 @@
                 <a:solidFill>
                   <a:srgbClr val="7C2D12"/>
                 </a:solidFill>
-                <a:latin typeface="Inter"/>
+                <a:latin typeface="Segoe UI" panose="020B0502040204020203" pitchFamily="34" charset="0"/>
               </a:rPr>
               <a:t> y zonas de </a:t>
             </a:r>
@@ -8343,7 +8349,7 @@
                 <a:solidFill>
                   <a:srgbClr val="7C2D12"/>
                 </a:solidFill>
-                <a:latin typeface="Inter"/>
+                <a:latin typeface="Segoe UI" panose="020B0502040204020203" pitchFamily="34" charset="0"/>
               </a:rPr>
               <a:t>alta</a:t>
             </a:r>
@@ -8352,7 +8358,7 @@
                 <a:solidFill>
                   <a:srgbClr val="7C2D12"/>
                 </a:solidFill>
-                <a:latin typeface="Inter"/>
+                <a:latin typeface="Segoe UI" panose="020B0502040204020203" pitchFamily="34" charset="0"/>
               </a:rPr>
               <a:t> </a:t>
             </a:r>
@@ -8361,7 +8367,7 @@
                 <a:solidFill>
                   <a:srgbClr val="7C2D12"/>
                 </a:solidFill>
-                <a:latin typeface="Inter"/>
+                <a:latin typeface="Segoe UI" panose="020B0502040204020203" pitchFamily="34" charset="0"/>
               </a:rPr>
               <a:t>tensión</a:t>
             </a:r>
@@ -8370,7 +8376,7 @@
                 <a:solidFill>
                   <a:srgbClr val="7C2D12"/>
                 </a:solidFill>
-                <a:latin typeface="Inter"/>
+                <a:latin typeface="Segoe UI" panose="020B0502040204020203" pitchFamily="34" charset="0"/>
               </a:rPr>
               <a:t> para </a:t>
             </a:r>
@@ -8379,7 +8385,7 @@
                 <a:solidFill>
                   <a:srgbClr val="7C2D12"/>
                 </a:solidFill>
-                <a:latin typeface="Inter"/>
+                <a:latin typeface="Segoe UI" panose="020B0502040204020203" pitchFamily="34" charset="0"/>
               </a:rPr>
               <a:t>prevenir</a:t>
             </a:r>
@@ -8388,7 +8394,7 @@
                 <a:solidFill>
                   <a:srgbClr val="7C2D12"/>
                 </a:solidFill>
-                <a:latin typeface="Inter"/>
+                <a:latin typeface="Segoe UI" panose="020B0502040204020203" pitchFamily="34" charset="0"/>
               </a:rPr>
               <a:t> </a:t>
             </a:r>
@@ -8397,7 +8403,7 @@
                 <a:solidFill>
                   <a:srgbClr val="7C2D12"/>
                 </a:solidFill>
-                <a:latin typeface="Inter"/>
+                <a:latin typeface="Segoe UI" panose="020B0502040204020203" pitchFamily="34" charset="0"/>
               </a:rPr>
               <a:t>atrapamiento</a:t>
             </a:r>
@@ -8406,7 +8412,7 @@
                 <a:solidFill>
                   <a:srgbClr val="7C2D12"/>
                 </a:solidFill>
-                <a:latin typeface="Inter"/>
+                <a:latin typeface="Segoe UI" panose="020B0502040204020203" pitchFamily="34" charset="0"/>
               </a:rPr>
               <a:t> de </a:t>
             </a:r>
@@ -8415,7 +8421,7 @@
                 <a:solidFill>
                   <a:srgbClr val="7C2D12"/>
                 </a:solidFill>
-                <a:latin typeface="Inter"/>
+                <a:latin typeface="Segoe UI" panose="020B0502040204020203" pitchFamily="34" charset="0"/>
               </a:rPr>
               <a:t>dedos</a:t>
             </a:r>
@@ -8424,7 +8430,7 @@
                 <a:solidFill>
                   <a:srgbClr val="7C2D12"/>
                 </a:solidFill>
-                <a:latin typeface="Inter"/>
+                <a:latin typeface="Segoe UI" panose="020B0502040204020203" pitchFamily="34" charset="0"/>
               </a:rPr>
               <a:t> o cables.</a:t>
             </a:r>
@@ -8440,7 +8446,7 @@
         <p:spPr>
           <a:xfrm>
             <a:off x="8264425" y="3314700"/>
-            <a:ext cx="3842081" cy="228600"/>
+            <a:ext cx="1790618" cy="230832"/>
           </a:xfrm>
           <a:prstGeom prst="rect">
             <a:avLst/>
@@ -8459,7 +8465,7 @@
                 <a:solidFill>
                   <a:srgbClr val="9A3412"/>
                 </a:solidFill>
-                <a:latin typeface="Inter"/>
+                <a:latin typeface="Segoe UI" panose="020B0502040204020203" pitchFamily="34" charset="0"/>
               </a:rPr>
               <a:t>Paro de Emergencia</a:t>
             </a:r>
@@ -8475,7 +8481,7 @@
         <p:spPr>
           <a:xfrm>
             <a:off x="8264425" y="3657600"/>
-            <a:ext cx="3659125" cy="180975"/>
+            <a:ext cx="1886735" cy="173124"/>
           </a:xfrm>
           <a:prstGeom prst="rect">
             <a:avLst/>
@@ -8494,7 +8500,7 @@
                 <a:solidFill>
                   <a:srgbClr val="431407"/>
                 </a:solidFill>
-                <a:latin typeface="Inter"/>
+                <a:latin typeface="Segoe UI" panose="020B0502040204020203" pitchFamily="34" charset="0"/>
               </a:rPr>
               <a:t>Interrupción electromecánica.</a:t>
             </a:r>
@@ -8529,7 +8535,7 @@
                 <a:solidFill>
                   <a:srgbClr val="7C2D12"/>
                 </a:solidFill>
-                <a:latin typeface="Inter"/>
+                <a:latin typeface="Segoe UI" panose="020B0502040204020203" pitchFamily="34" charset="0"/>
               </a:rPr>
               <a:t>Boton</a:t>
             </a:r>
@@ -8538,7 +8544,7 @@
                 <a:solidFill>
                   <a:srgbClr val="7C2D12"/>
                 </a:solidFill>
-                <a:latin typeface="Inter"/>
+                <a:latin typeface="Segoe UI" panose="020B0502040204020203" pitchFamily="34" charset="0"/>
               </a:rPr>
               <a:t> </a:t>
             </a:r>
@@ -8547,7 +8553,7 @@
                 <a:solidFill>
                   <a:srgbClr val="7C2D12"/>
                 </a:solidFill>
-                <a:latin typeface="Inter"/>
+                <a:latin typeface="Segoe UI" panose="020B0502040204020203" pitchFamily="34" charset="0"/>
               </a:rPr>
               <a:t>físic</a:t>
             </a:r>
@@ -8556,7 +8562,7 @@
                 <a:solidFill>
                   <a:srgbClr val="7C2D12"/>
                 </a:solidFill>
-                <a:latin typeface="Inter"/>
+                <a:latin typeface="Segoe UI" panose="020B0502040204020203" pitchFamily="34" charset="0"/>
               </a:rPr>
               <a:t>o</a:t>
             </a:r>
@@ -8565,7 +8571,7 @@
                 <a:solidFill>
                   <a:srgbClr val="7C2D12"/>
                 </a:solidFill>
-                <a:latin typeface="Inter"/>
+                <a:latin typeface="Segoe UI" panose="020B0502040204020203" pitchFamily="34" charset="0"/>
               </a:rPr>
               <a:t> de corte </a:t>
             </a:r>
@@ -8574,7 +8580,7 @@
                 <a:solidFill>
                   <a:srgbClr val="7C2D12"/>
                 </a:solidFill>
-                <a:latin typeface="Inter"/>
+                <a:latin typeface="Segoe UI" panose="020B0502040204020203" pitchFamily="34" charset="0"/>
               </a:rPr>
               <a:t>instantáneo</a:t>
             </a:r>
@@ -8583,7 +8589,7 @@
                 <a:solidFill>
                   <a:srgbClr val="7C2D12"/>
                 </a:solidFill>
-                <a:latin typeface="Inter"/>
+                <a:latin typeface="Segoe UI" panose="020B0502040204020203" pitchFamily="34" charset="0"/>
               </a:rPr>
               <a:t> que </a:t>
             </a:r>
@@ -8592,7 +8598,7 @@
                 <a:solidFill>
                   <a:srgbClr val="7C2D12"/>
                 </a:solidFill>
-                <a:latin typeface="Inter"/>
+                <a:latin typeface="Segoe UI" panose="020B0502040204020203" pitchFamily="34" charset="0"/>
               </a:rPr>
               <a:t>desenergiza</a:t>
             </a:r>
@@ -8601,7 +8607,7 @@
                 <a:solidFill>
                   <a:srgbClr val="7C2D12"/>
                 </a:solidFill>
-                <a:latin typeface="Inter"/>
+                <a:latin typeface="Segoe UI" panose="020B0502040204020203" pitchFamily="34" charset="0"/>
               </a:rPr>
               <a:t> la </a:t>
             </a:r>
@@ -8610,7 +8616,7 @@
                 <a:solidFill>
                   <a:srgbClr val="7C2D12"/>
                 </a:solidFill>
-                <a:latin typeface="Inter"/>
+                <a:latin typeface="Segoe UI" panose="020B0502040204020203" pitchFamily="34" charset="0"/>
               </a:rPr>
               <a:t>línea</a:t>
             </a:r>
@@ -8619,7 +8625,7 @@
                 <a:solidFill>
                   <a:srgbClr val="7C2D12"/>
                 </a:solidFill>
-                <a:latin typeface="Inter"/>
+                <a:latin typeface="Segoe UI" panose="020B0502040204020203" pitchFamily="34" charset="0"/>
               </a:rPr>
               <a:t> de </a:t>
             </a:r>
@@ -8628,7 +8634,7 @@
                 <a:solidFill>
                   <a:srgbClr val="7C2D12"/>
                 </a:solidFill>
-                <a:latin typeface="Inter"/>
+                <a:latin typeface="Segoe UI" panose="020B0502040204020203" pitchFamily="34" charset="0"/>
               </a:rPr>
               <a:t>potencia</a:t>
             </a:r>
@@ -8637,7 +8643,7 @@
                 <a:solidFill>
                   <a:srgbClr val="7C2D12"/>
                 </a:solidFill>
-                <a:latin typeface="Inter"/>
+                <a:latin typeface="Segoe UI" panose="020B0502040204020203" pitchFamily="34" charset="0"/>
               </a:rPr>
               <a:t> y </a:t>
             </a:r>
@@ -8646,7 +8652,7 @@
                 <a:solidFill>
                   <a:srgbClr val="7C2D12"/>
                 </a:solidFill>
-                <a:latin typeface="Inter"/>
+                <a:latin typeface="Segoe UI" panose="020B0502040204020203" pitchFamily="34" charset="0"/>
               </a:rPr>
               <a:t>congela</a:t>
             </a:r>
@@ -8655,7 +8661,7 @@
                 <a:solidFill>
                   <a:srgbClr val="7C2D12"/>
                 </a:solidFill>
-                <a:latin typeface="Inter"/>
+                <a:latin typeface="Segoe UI" panose="020B0502040204020203" pitchFamily="34" charset="0"/>
               </a:rPr>
               <a:t> </a:t>
             </a:r>
@@ -8664,7 +8670,7 @@
                 <a:solidFill>
                   <a:srgbClr val="7C2D12"/>
                 </a:solidFill>
-                <a:latin typeface="Inter"/>
+                <a:latin typeface="Segoe UI" panose="020B0502040204020203" pitchFamily="34" charset="0"/>
               </a:rPr>
               <a:t>el</a:t>
             </a:r>
@@ -8673,7 +8679,7 @@
                 <a:solidFill>
                   <a:srgbClr val="7C2D12"/>
                 </a:solidFill>
-                <a:latin typeface="Inter"/>
+                <a:latin typeface="Segoe UI" panose="020B0502040204020203" pitchFamily="34" charset="0"/>
               </a:rPr>
               <a:t> </a:t>
             </a:r>
@@ -8682,7 +8688,7 @@
                 <a:solidFill>
                   <a:srgbClr val="7C2D12"/>
                 </a:solidFill>
-                <a:latin typeface="Inter"/>
+                <a:latin typeface="Segoe UI" panose="020B0502040204020203" pitchFamily="34" charset="0"/>
               </a:rPr>
               <a:t>manipulador</a:t>
             </a:r>
@@ -8691,7 +8697,7 @@
                 <a:solidFill>
                   <a:srgbClr val="7C2D12"/>
                 </a:solidFill>
-                <a:latin typeface="Inter"/>
+                <a:latin typeface="Segoe UI" panose="020B0502040204020203" pitchFamily="34" charset="0"/>
               </a:rPr>
               <a:t> de </a:t>
             </a:r>
@@ -8700,7 +8706,7 @@
                 <a:solidFill>
                   <a:srgbClr val="7C2D12"/>
                 </a:solidFill>
-                <a:latin typeface="Inter"/>
+                <a:latin typeface="Segoe UI" panose="020B0502040204020203" pitchFamily="34" charset="0"/>
               </a:rPr>
               <a:t>inmediato</a:t>
             </a:r>
@@ -8709,7 +8715,7 @@
                 <a:solidFill>
                   <a:srgbClr val="7C2D12"/>
                 </a:solidFill>
-                <a:latin typeface="Inter"/>
+                <a:latin typeface="Segoe UI" panose="020B0502040204020203" pitchFamily="34" charset="0"/>
               </a:rPr>
               <a:t>.</a:t>
             </a:r>
@@ -8954,7 +8960,7 @@
         <p:spPr>
           <a:xfrm>
             <a:off x="762000" y="6162675"/>
-            <a:ext cx="2858155" cy="161583"/>
+            <a:ext cx="3080972" cy="161583"/>
           </a:xfrm>
           <a:prstGeom prst="rect">
             <a:avLst/>
@@ -8973,7 +8979,7 @@
                 <a:solidFill>
                   <a:srgbClr val="0F172A"/>
                 </a:solidFill>
-                <a:latin typeface="Inter"/>
+                <a:latin typeface="Segoe UI" panose="020B0502040204020203" pitchFamily="34" charset="0"/>
               </a:rPr>
               <a:t>Parámetros</a:t>
             </a:r>
@@ -8982,7 +8988,7 @@
                 <a:solidFill>
                   <a:srgbClr val="0F172A"/>
                 </a:solidFill>
-                <a:latin typeface="Inter"/>
+                <a:latin typeface="Segoe UI" panose="020B0502040204020203" pitchFamily="34" charset="0"/>
               </a:rPr>
               <a:t> de </a:t>
             </a:r>
@@ -8991,7 +8997,7 @@
                 <a:solidFill>
                   <a:srgbClr val="0F172A"/>
                 </a:solidFill>
-                <a:latin typeface="Inter"/>
+                <a:latin typeface="Segoe UI" panose="020B0502040204020203" pitchFamily="34" charset="0"/>
               </a:rPr>
               <a:t>Evaluación</a:t>
             </a:r>
@@ -9000,7 +9006,7 @@
                 <a:solidFill>
                   <a:srgbClr val="0F172A"/>
                 </a:solidFill>
-                <a:latin typeface="Inter"/>
+                <a:latin typeface="Segoe UI" panose="020B0502040204020203" pitchFamily="34" charset="0"/>
               </a:rPr>
               <a:t> y </a:t>
             </a:r>
@@ -9009,7 +9015,7 @@
                 <a:solidFill>
                   <a:srgbClr val="0F172A"/>
                 </a:solidFill>
-                <a:latin typeface="Inter"/>
+                <a:latin typeface="Segoe UI" panose="020B0502040204020203" pitchFamily="34" charset="0"/>
               </a:rPr>
               <a:t>Validación</a:t>
             </a:r>
@@ -9018,7 +9024,7 @@
                 <a:solidFill>
                   <a:srgbClr val="0F172A"/>
                 </a:solidFill>
-                <a:latin typeface="Inter"/>
+                <a:latin typeface="Segoe UI" panose="020B0502040204020203" pitchFamily="34" charset="0"/>
               </a:rPr>
               <a:t> Experimental</a:t>
             </a:r>
@@ -9034,7 +9040,7 @@
         <p:spPr>
           <a:xfrm>
             <a:off x="762000" y="533400"/>
-            <a:ext cx="11430000" cy="161925"/>
+            <a:ext cx="2731517" cy="161583"/>
           </a:xfrm>
           <a:prstGeom prst="rect">
             <a:avLst/>
@@ -9053,7 +9059,7 @@
                 <a:solidFill>
                   <a:srgbClr val="0284C7"/>
                 </a:solidFill>
-                <a:latin typeface="Inter"/>
+                <a:latin typeface="Segoe UI" panose="020B0502040204020203" pitchFamily="34" charset="0"/>
               </a:rPr>
               <a:t>ARQUITECTURA Y CONCEPTOS · PUNTO 16</a:t>
             </a:r>
@@ -9069,7 +9075,7 @@
         <p:spPr>
           <a:xfrm>
             <a:off x="762000" y="771525"/>
-            <a:ext cx="11430000" cy="438150"/>
+            <a:ext cx="5299656" cy="415498"/>
           </a:xfrm>
           <a:prstGeom prst="rect">
             <a:avLst/>
@@ -9088,7 +9094,7 @@
                 <a:solidFill>
                   <a:srgbClr val="0F172A"/>
                 </a:solidFill>
-                <a:latin typeface="Space Grotesk"/>
+                <a:latin typeface="Trebuchet MS" panose="020B0603020202020204" pitchFamily="34" charset="0"/>
               </a:rPr>
               <a:t>Criterios de Aceptación Medibles</a:t>
             </a:r>
@@ -9104,7 +9110,7 @@
         <p:spPr>
           <a:xfrm>
             <a:off x="962025" y="3043237"/>
-            <a:ext cx="2619375" cy="457200"/>
+            <a:ext cx="1628651" cy="438582"/>
           </a:xfrm>
           <a:prstGeom prst="rect">
             <a:avLst/>
@@ -9123,7 +9129,7 @@
                 <a:solidFill>
                   <a:srgbClr val="0284C7"/>
                 </a:solidFill>
-                <a:latin typeface="Space Grotesk"/>
+                <a:latin typeface="Trebuchet MS" panose="020B0603020202020204" pitchFamily="34" charset="0"/>
               </a:rPr>
               <a:t>1.5 - 5 kg</a:t>
             </a:r>
@@ -9139,7 +9145,7 @@
         <p:spPr>
           <a:xfrm>
             <a:off x="962025" y="3576637"/>
-            <a:ext cx="2750343" cy="190500"/>
+            <a:ext cx="1517403" cy="196208"/>
           </a:xfrm>
           <a:prstGeom prst="rect">
             <a:avLst/>
@@ -9158,7 +9164,7 @@
                 <a:solidFill>
                   <a:srgbClr val="0F172A"/>
                 </a:solidFill>
-                <a:latin typeface="Inter"/>
+                <a:latin typeface="Segoe UI" panose="020B0502040204020203" pitchFamily="34" charset="0"/>
               </a:rPr>
               <a:t>Capacidad de Carga</a:t>
             </a:r>
@@ -9193,7 +9199,7 @@
                 <a:solidFill>
                   <a:srgbClr val="64748B"/>
                 </a:solidFill>
-                <a:latin typeface="Inter"/>
+                <a:latin typeface="Segoe UI" panose="020B0502040204020203" pitchFamily="34" charset="0"/>
               </a:rPr>
               <a:t>Mantenimiento de postura estática horizontal sin salto de pasos en los motores.</a:t>
             </a:r>
@@ -9209,7 +9215,7 @@
         <p:spPr>
           <a:xfrm>
             <a:off x="3686175" y="3043237"/>
-            <a:ext cx="2619375" cy="457200"/>
+            <a:ext cx="1051570" cy="438582"/>
           </a:xfrm>
           <a:prstGeom prst="rect">
             <a:avLst/>
@@ -9228,7 +9234,7 @@
                 <a:solidFill>
                   <a:srgbClr val="0284C7"/>
                 </a:solidFill>
-                <a:latin typeface="Space Grotesk"/>
+                <a:latin typeface="Trebuchet MS" panose="020B0603020202020204" pitchFamily="34" charset="0"/>
               </a:rPr>
               <a:t>FS = 3</a:t>
             </a:r>
@@ -9244,7 +9250,7 @@
         <p:spPr>
           <a:xfrm>
             <a:off x="3686175" y="3576637"/>
-            <a:ext cx="2750343" cy="190500"/>
+            <a:ext cx="1537216" cy="196208"/>
           </a:xfrm>
           <a:prstGeom prst="rect">
             <a:avLst/>
@@ -9263,7 +9269,7 @@
                 <a:solidFill>
                   <a:srgbClr val="0F172A"/>
                 </a:solidFill>
-                <a:latin typeface="Inter"/>
+                <a:latin typeface="Segoe UI" panose="020B0502040204020203" pitchFamily="34" charset="0"/>
               </a:rPr>
               <a:t>Factor de Seguridad</a:t>
             </a:r>
@@ -9298,7 +9304,7 @@
                 <a:solidFill>
                   <a:srgbClr val="64748B"/>
                 </a:solidFill>
-                <a:latin typeface="Inter"/>
+                <a:latin typeface="Segoe UI" panose="020B0502040204020203" pitchFamily="34" charset="0"/>
               </a:rPr>
               <a:t>Margen dinámico para soportar aceleraciones y desaceleraciones sin fatiga de bandas.</a:t>
             </a:r>
@@ -9314,7 +9320,7 @@
         <p:spPr>
           <a:xfrm>
             <a:off x="6410325" y="3043237"/>
-            <a:ext cx="2007986" cy="369332"/>
+            <a:ext cx="2322752" cy="369332"/>
           </a:xfrm>
           <a:prstGeom prst="rect">
             <a:avLst/>
@@ -9333,7 +9339,7 @@
                 <a:solidFill>
                   <a:srgbClr val="0284C7"/>
                 </a:solidFill>
-                <a:latin typeface="Space Grotesk"/>
+                <a:latin typeface="Trebuchet MS" panose="020B0603020202020204" pitchFamily="34" charset="0"/>
               </a:rPr>
               <a:t>Final de Carrera</a:t>
             </a:r>
@@ -9341,7 +9347,7 @@
               <a:solidFill>
                 <a:srgbClr val="0284C7"/>
               </a:solidFill>
-              <a:latin typeface="Space Grotesk"/>
+              <a:latin typeface="Trebuchet MS" panose="020B0603020202020204" pitchFamily="34" charset="0"/>
             </a:endParaRPr>
           </a:p>
         </p:txBody>
@@ -9355,7 +9361,7 @@
         <p:spPr>
           <a:xfrm>
             <a:off x="6410325" y="3576637"/>
-            <a:ext cx="2750343" cy="190500"/>
+            <a:ext cx="1594347" cy="196208"/>
           </a:xfrm>
           <a:prstGeom prst="rect">
             <a:avLst/>
@@ -9374,7 +9380,7 @@
                 <a:solidFill>
                   <a:srgbClr val="0F172A"/>
                 </a:solidFill>
-                <a:latin typeface="Inter"/>
+                <a:latin typeface="Segoe UI" panose="020B0502040204020203" pitchFamily="34" charset="0"/>
               </a:rPr>
               <a:t>Límites</a:t>
             </a:r>
@@ -9383,7 +9389,7 @@
                 <a:solidFill>
                   <a:srgbClr val="0F172A"/>
                 </a:solidFill>
-                <a:latin typeface="Inter"/>
+                <a:latin typeface="Segoe UI" panose="020B0502040204020203" pitchFamily="34" charset="0"/>
               </a:rPr>
               <a:t> </a:t>
             </a:r>
@@ -9392,7 +9398,7 @@
                 <a:solidFill>
                   <a:srgbClr val="0F172A"/>
                 </a:solidFill>
-                <a:latin typeface="Inter"/>
+                <a:latin typeface="Segoe UI" panose="020B0502040204020203" pitchFamily="34" charset="0"/>
               </a:rPr>
               <a:t>por</a:t>
             </a:r>
@@ -9401,7 +9407,7 @@
                 <a:solidFill>
                   <a:srgbClr val="0F172A"/>
                 </a:solidFill>
-                <a:latin typeface="Inter"/>
+                <a:latin typeface="Segoe UI" panose="020B0502040204020203" pitchFamily="34" charset="0"/>
               </a:rPr>
               <a:t> Software</a:t>
             </a:r>
@@ -9436,7 +9442,7 @@
                 <a:solidFill>
                   <a:srgbClr val="64748B"/>
                 </a:solidFill>
-                <a:latin typeface="Inter"/>
+                <a:latin typeface="Segoe UI" panose="020B0502040204020203" pitchFamily="34" charset="0"/>
               </a:rPr>
               <a:t>Detención controlada por código antes de colisión, sin impacto en topes duros.</a:t>
             </a:r>
@@ -9471,7 +9477,7 @@
                 <a:solidFill>
                   <a:srgbClr val="0284C7"/>
                 </a:solidFill>
-                <a:latin typeface="Space Grotesk"/>
+                <a:latin typeface="Trebuchet MS" panose="020B0603020202020204" pitchFamily="34" charset="0"/>
               </a:rPr>
               <a:t>Operación</a:t>
             </a:r>
@@ -9480,7 +9486,7 @@
                 <a:solidFill>
                   <a:srgbClr val="0284C7"/>
                 </a:solidFill>
-                <a:latin typeface="Space Grotesk"/>
+                <a:latin typeface="Trebuchet MS" panose="020B0603020202020204" pitchFamily="34" charset="0"/>
               </a:rPr>
               <a:t> Segura</a:t>
             </a:r>
@@ -9488,7 +9494,7 @@
               <a:solidFill>
                 <a:srgbClr val="0284C7"/>
               </a:solidFill>
-              <a:latin typeface="Space Grotesk"/>
+              <a:latin typeface="Trebuchet MS" panose="020B0603020202020204" pitchFamily="34" charset="0"/>
             </a:endParaRPr>
           </a:p>
         </p:txBody>
@@ -9502,7 +9508,7 @@
         <p:spPr>
           <a:xfrm>
             <a:off x="9134475" y="3805237"/>
-            <a:ext cx="2750343" cy="190500"/>
+            <a:ext cx="1578702" cy="196208"/>
           </a:xfrm>
           <a:prstGeom prst="rect">
             <a:avLst/>
@@ -9521,7 +9527,7 @@
                 <a:solidFill>
                   <a:srgbClr val="0F172A"/>
                 </a:solidFill>
-                <a:latin typeface="Inter"/>
+                <a:latin typeface="Segoe UI" panose="020B0502040204020203" pitchFamily="34" charset="0"/>
               </a:rPr>
               <a:t>Seguridad</a:t>
             </a:r>
@@ -9530,7 +9536,7 @@
                 <a:solidFill>
                   <a:srgbClr val="0F172A"/>
                 </a:solidFill>
-                <a:latin typeface="Inter"/>
+                <a:latin typeface="Segoe UI" panose="020B0502040204020203" pitchFamily="34" charset="0"/>
               </a:rPr>
               <a:t> </a:t>
             </a:r>
@@ -9539,7 +9545,7 @@
                 <a:solidFill>
                   <a:srgbClr val="0F172A"/>
                 </a:solidFill>
-                <a:latin typeface="Inter"/>
+                <a:latin typeface="Segoe UI" panose="020B0502040204020203" pitchFamily="34" charset="0"/>
               </a:rPr>
               <a:t>Operativa</a:t>
             </a:r>
@@ -9547,7 +9553,7 @@
               <a:solidFill>
                 <a:srgbClr val="0F172A"/>
               </a:solidFill>
-              <a:latin typeface="Inter"/>
+              <a:latin typeface="Segoe UI" panose="020B0502040204020203" pitchFamily="34" charset="0"/>
             </a:endParaRPr>
           </a:p>
         </p:txBody>
@@ -9580,7 +9586,7 @@
                 <a:solidFill>
                   <a:srgbClr val="64748B"/>
                 </a:solidFill>
-                <a:latin typeface="Inter"/>
+                <a:latin typeface="Segoe UI" panose="020B0502040204020203" pitchFamily="34" charset="0"/>
               </a:rPr>
               <a:t>Carcasas protectoras en el total de correas síncronas y corte por seta física.</a:t>
             </a:r>
@@ -9836,7 +9842,7 @@
         <p:spPr>
           <a:xfrm>
             <a:off x="762000" y="6162675"/>
-            <a:ext cx="11430000" cy="161925"/>
+            <a:ext cx="3803926" cy="161583"/>
           </a:xfrm>
           <a:prstGeom prst="rect">
             <a:avLst/>
@@ -9855,7 +9861,7 @@
                 <a:solidFill>
                   <a:srgbClr val="0F172A"/>
                 </a:solidFill>
-                <a:latin typeface="Inter"/>
+                <a:latin typeface="Segoe UI" panose="020B0502040204020203" pitchFamily="34" charset="0"/>
               </a:rPr>
               <a:t>Disposición General de Eslabones y Mecanismos de Transmisión</a:t>
             </a:r>
@@ -9871,7 +9877,7 @@
         <p:spPr>
           <a:xfrm>
             <a:off x="762000" y="533400"/>
-            <a:ext cx="11430000" cy="161925"/>
+            <a:ext cx="2731517" cy="161583"/>
           </a:xfrm>
           <a:prstGeom prst="rect">
             <a:avLst/>
@@ -9890,7 +9896,7 @@
                 <a:solidFill>
                   <a:srgbClr val="0284C7"/>
                 </a:solidFill>
-                <a:latin typeface="Inter"/>
+                <a:latin typeface="Segoe UI" panose="020B0502040204020203" pitchFamily="34" charset="0"/>
               </a:rPr>
               <a:t>ARQUITECTURA Y CONCEPTOS · PUNTO 17</a:t>
             </a:r>
@@ -9906,7 +9912,7 @@
         <p:spPr>
           <a:xfrm>
             <a:off x="762000" y="771525"/>
-            <a:ext cx="11430000" cy="438150"/>
+            <a:ext cx="6008824" cy="415498"/>
           </a:xfrm>
           <a:prstGeom prst="rect">
             <a:avLst/>
@@ -9925,7 +9931,7 @@
                 <a:solidFill>
                   <a:srgbClr val="0F172A"/>
                 </a:solidFill>
-                <a:latin typeface="Space Grotesk"/>
+                <a:latin typeface="Trebuchet MS" panose="020B0603020202020204" pitchFamily="34" charset="0"/>
               </a:rPr>
               <a:t>Boceto y Concepto General del Brazo</a:t>
             </a:r>
@@ -9941,7 +9947,7 @@
         <p:spPr>
           <a:xfrm>
             <a:off x="1009650" y="2614612"/>
-            <a:ext cx="6100762" cy="219075"/>
+            <a:ext cx="2884059" cy="219291"/>
           </a:xfrm>
           <a:prstGeom prst="rect">
             <a:avLst/>
@@ -9960,7 +9966,7 @@
                 <a:solidFill>
                   <a:srgbClr val="0F172A"/>
                 </a:solidFill>
-                <a:latin typeface="Inter"/>
+                <a:latin typeface="Segoe UI" panose="020B0502040204020203" pitchFamily="34" charset="0"/>
               </a:rPr>
               <a:t>Topología Antropomórfica 6-DOF</a:t>
             </a:r>
@@ -9976,7 +9982,7 @@
         <p:spPr>
           <a:xfrm>
             <a:off x="1009650" y="2890837"/>
-            <a:ext cx="4743450" cy="600075"/>
+            <a:ext cx="4743450" cy="391774"/>
           </a:xfrm>
           <a:prstGeom prst="rect">
             <a:avLst/>
@@ -9999,7 +10005,7 @@
                 <a:solidFill>
                   <a:srgbClr val="475569"/>
                 </a:solidFill>
-                <a:latin typeface="Inter"/>
+                <a:latin typeface="Segoe UI" panose="020B0502040204020203" pitchFamily="34" charset="0"/>
               </a:rPr>
               <a:t>Brazo articulado de 6 grados de libertad con planta motriz pesada concentrada en la base inferior y poleas concéntricas en los pivotes.</a:t>
             </a:r>
@@ -10015,7 +10021,7 @@
         <p:spPr>
           <a:xfrm>
             <a:off x="1009650" y="4081462"/>
-            <a:ext cx="6100762" cy="219075"/>
+            <a:ext cx="2457211" cy="219291"/>
           </a:xfrm>
           <a:prstGeom prst="rect">
             <a:avLst/>
@@ -10034,7 +10040,7 @@
                 <a:solidFill>
                   <a:srgbClr val="0F172A"/>
                 </a:solidFill>
-                <a:latin typeface="Inter"/>
+                <a:latin typeface="Segoe UI" panose="020B0502040204020203" pitchFamily="34" charset="0"/>
               </a:rPr>
               <a:t>Desacoplamiento Estructural</a:t>
             </a:r>
@@ -10073,7 +10079,7 @@
                 <a:solidFill>
                   <a:srgbClr val="475569"/>
                 </a:solidFill>
-                <a:latin typeface="Inter"/>
+                <a:latin typeface="Segoe UI" panose="020B0502040204020203" pitchFamily="34" charset="0"/>
               </a:rPr>
               <a:t>El chasis móvil consta de eslabones tubulares livianos diseñados en 3D para alojar rodamientos y las trayectorias de las bandas.</a:t>
             </a:r>
@@ -10341,7 +10347,7 @@
         <p:spPr>
           <a:xfrm>
             <a:off x="762000" y="6162675"/>
-            <a:ext cx="11430000" cy="161925"/>
+            <a:ext cx="2168863" cy="161583"/>
           </a:xfrm>
           <a:prstGeom prst="rect">
             <a:avLst/>
@@ -10360,7 +10366,7 @@
                 <a:solidFill>
                   <a:srgbClr val="0F172A"/>
                 </a:solidFill>
-                <a:latin typeface="Inter"/>
+                <a:latin typeface="Segoe UI" panose="020B0502040204020203" pitchFamily="34" charset="0"/>
               </a:rPr>
               <a:t>Interacción Funcional entre Módulos</a:t>
             </a:r>
@@ -10376,7 +10382,7 @@
         <p:spPr>
           <a:xfrm>
             <a:off x="762000" y="533400"/>
-            <a:ext cx="11430000" cy="161925"/>
+            <a:ext cx="2731517" cy="161583"/>
           </a:xfrm>
           <a:prstGeom prst="rect">
             <a:avLst/>
@@ -10395,7 +10401,7 @@
                 <a:solidFill>
                   <a:srgbClr val="0284C7"/>
                 </a:solidFill>
-                <a:latin typeface="Inter"/>
+                <a:latin typeface="Segoe UI" panose="020B0502040204020203" pitchFamily="34" charset="0"/>
               </a:rPr>
               <a:t>ARQUITECTURA Y CONCEPTOS · PUNTO 18</a:t>
             </a:r>
@@ -10411,7 +10417,7 @@
         <p:spPr>
           <a:xfrm>
             <a:off x="762000" y="771525"/>
-            <a:ext cx="11430000" cy="438150"/>
+            <a:ext cx="7718460" cy="415498"/>
           </a:xfrm>
           <a:prstGeom prst="rect">
             <a:avLst/>
@@ -10430,7 +10436,7 @@
                 <a:solidFill>
                   <a:srgbClr val="0F172A"/>
                 </a:solidFill>
-                <a:latin typeface="Space Grotesk"/>
+                <a:latin typeface="Trebuchet MS" panose="020B0603020202020204" pitchFamily="34" charset="0"/>
               </a:rPr>
               <a:t>Subsistemas Mecánico, Electrónico y de Control</a:t>
             </a:r>
@@ -10446,7 +10452,7 @@
         <p:spPr>
           <a:xfrm>
             <a:off x="1000125" y="3314700"/>
-            <a:ext cx="3842081" cy="228600"/>
+            <a:ext cx="867225" cy="230832"/>
           </a:xfrm>
           <a:prstGeom prst="rect">
             <a:avLst/>
@@ -10465,7 +10471,7 @@
                 <a:solidFill>
                   <a:srgbClr val="0F172A"/>
                 </a:solidFill>
-                <a:latin typeface="Inter"/>
+                <a:latin typeface="Segoe UI" panose="020B0502040204020203" pitchFamily="34" charset="0"/>
               </a:rPr>
               <a:t>Mecánico</a:t>
             </a:r>
@@ -10481,7 +10487,7 @@
         <p:spPr>
           <a:xfrm>
             <a:off x="1000125" y="3657600"/>
-            <a:ext cx="3659125" cy="180975"/>
+            <a:ext cx="1865895" cy="173124"/>
           </a:xfrm>
           <a:prstGeom prst="rect">
             <a:avLst/>
@@ -10500,7 +10506,7 @@
                 <a:solidFill>
                   <a:srgbClr val="475569"/>
                 </a:solidFill>
-                <a:latin typeface="Inter"/>
+                <a:latin typeface="Segoe UI" panose="020B0502040204020203" pitchFamily="34" charset="0"/>
               </a:rPr>
               <a:t>Eslabones y poleas síncronas.</a:t>
             </a:r>
@@ -10535,7 +10541,7 @@
                 <a:solidFill>
                   <a:srgbClr val="64748B"/>
                 </a:solidFill>
-                <a:latin typeface="Inter"/>
+                <a:latin typeface="Segoe UI" panose="020B0502040204020203" pitchFamily="34" charset="0"/>
               </a:rPr>
               <a:t>Estructuras de PETG/Nylon con posible refuerzo de aluminio, baleros 608ZZ y pernos métricos templados.</a:t>
             </a:r>
@@ -10551,7 +10557,7 @@
         <p:spPr>
           <a:xfrm>
             <a:off x="4632275" y="3314700"/>
-            <a:ext cx="3842081" cy="228600"/>
+            <a:ext cx="1004314" cy="230832"/>
           </a:xfrm>
           <a:prstGeom prst="rect">
             <a:avLst/>
@@ -10570,7 +10576,7 @@
                 <a:solidFill>
                   <a:srgbClr val="0F172A"/>
                 </a:solidFill>
-                <a:latin typeface="Inter"/>
+                <a:latin typeface="Segoe UI" panose="020B0502040204020203" pitchFamily="34" charset="0"/>
               </a:rPr>
               <a:t>Electrónico</a:t>
             </a:r>
@@ -10586,7 +10592,7 @@
         <p:spPr>
           <a:xfrm>
             <a:off x="4632275" y="3657600"/>
-            <a:ext cx="3659125" cy="180975"/>
+            <a:ext cx="1812997" cy="173124"/>
           </a:xfrm>
           <a:prstGeom prst="rect">
             <a:avLst/>
@@ -10605,7 +10611,7 @@
                 <a:solidFill>
                   <a:srgbClr val="475569"/>
                 </a:solidFill>
-                <a:latin typeface="Inter"/>
+                <a:latin typeface="Segoe UI" panose="020B0502040204020203" pitchFamily="34" charset="0"/>
               </a:rPr>
               <a:t>Potencia e inventario NEMA.</a:t>
             </a:r>
@@ -10640,7 +10646,7 @@
                 <a:solidFill>
                   <a:srgbClr val="64748B"/>
                 </a:solidFill>
-                <a:latin typeface="Inter"/>
+                <a:latin typeface="Segoe UI" panose="020B0502040204020203" pitchFamily="34" charset="0"/>
               </a:rPr>
               <a:t>Drivers DM860/TMC alimentados a 36V/24V, seta de paro de corte directo y motores paso a paso existentes.</a:t>
             </a:r>
@@ -10656,7 +10662,7 @@
         <p:spPr>
           <a:xfrm>
             <a:off x="8264425" y="3314700"/>
-            <a:ext cx="3842081" cy="228600"/>
+            <a:ext cx="677301" cy="230832"/>
           </a:xfrm>
           <a:prstGeom prst="rect">
             <a:avLst/>
@@ -10675,7 +10681,7 @@
                 <a:solidFill>
                   <a:srgbClr val="0F172A"/>
                 </a:solidFill>
-                <a:latin typeface="Inter"/>
+                <a:latin typeface="Segoe UI" panose="020B0502040204020203" pitchFamily="34" charset="0"/>
               </a:rPr>
               <a:t>Control</a:t>
             </a:r>
@@ -10691,7 +10697,7 @@
         <p:spPr>
           <a:xfrm>
             <a:off x="8264425" y="3657600"/>
-            <a:ext cx="3659125" cy="180975"/>
+            <a:ext cx="1885131" cy="173124"/>
           </a:xfrm>
           <a:prstGeom prst="rect">
             <a:avLst/>
@@ -10710,7 +10716,7 @@
                 <a:solidFill>
                   <a:srgbClr val="475569"/>
                 </a:solidFill>
-                <a:latin typeface="Inter"/>
+                <a:latin typeface="Segoe UI" panose="020B0502040204020203" pitchFamily="34" charset="0"/>
               </a:rPr>
               <a:t>Cinemática y límites software.</a:t>
             </a:r>
@@ -10745,7 +10751,7 @@
                 <a:solidFill>
                   <a:srgbClr val="64748B"/>
                 </a:solidFill>
-                <a:latin typeface="Inter"/>
+                <a:latin typeface="Segoe UI" panose="020B0502040204020203" pitchFamily="34" charset="0"/>
               </a:rPr>
               <a:t>Cálculo de trayectorias, rampas de aceleración y supervisión de envolvente sin depender de topes duros.</a:t>
             </a:r>
@@ -11142,7 +11148,7 @@
         <p:spPr>
           <a:xfrm>
             <a:off x="762000" y="6162675"/>
-            <a:ext cx="11430000" cy="161925"/>
+            <a:ext cx="3121047" cy="161583"/>
           </a:xfrm>
           <a:prstGeom prst="rect">
             <a:avLst/>
@@ -11161,7 +11167,7 @@
                 <a:solidFill>
                   <a:srgbClr val="0F172A"/>
                 </a:solidFill>
-                <a:latin typeface="Inter"/>
+                <a:latin typeface="Segoe UI" panose="020B0502040204020203" pitchFamily="34" charset="0"/>
               </a:rPr>
               <a:t>Configuración de Actuación y Transmisión Aprobada</a:t>
             </a:r>
@@ -11177,7 +11183,7 @@
         <p:spPr>
           <a:xfrm>
             <a:off x="762000" y="533400"/>
-            <a:ext cx="11430000" cy="161925"/>
+            <a:ext cx="2731517" cy="161583"/>
           </a:xfrm>
           <a:prstGeom prst="rect">
             <a:avLst/>
@@ -11196,7 +11202,7 @@
                 <a:solidFill>
                   <a:srgbClr val="0284C7"/>
                 </a:solidFill>
-                <a:latin typeface="Inter"/>
+                <a:latin typeface="Segoe UI" panose="020B0502040204020203" pitchFamily="34" charset="0"/>
               </a:rPr>
               <a:t>ARQUITECTURA Y CONCEPTOS · PUNTO 20</a:t>
             </a:r>
@@ -11212,7 +11218,7 @@
         <p:spPr>
           <a:xfrm>
             <a:off x="762000" y="771525"/>
-            <a:ext cx="11430000" cy="438150"/>
+            <a:ext cx="6900094" cy="415498"/>
           </a:xfrm>
           <a:prstGeom prst="rect">
             <a:avLst/>
@@ -11231,7 +11237,7 @@
                 <a:solidFill>
                   <a:srgbClr val="0F172A"/>
                 </a:solidFill>
-                <a:latin typeface="Space Grotesk"/>
+                <a:latin typeface="Trebuchet MS" panose="020B0603020202020204" pitchFamily="34" charset="0"/>
               </a:rPr>
               <a:t>Solución Seleccionada para el Brazo 6-DOF</a:t>
             </a:r>
@@ -11247,7 +11253,7 @@
         <p:spPr>
           <a:xfrm>
             <a:off x="990600" y="3328987"/>
-            <a:ext cx="3867084" cy="228600"/>
+            <a:ext cx="2129622" cy="230832"/>
           </a:xfrm>
           <a:prstGeom prst="rect">
             <a:avLst/>
@@ -11266,7 +11272,7 @@
                 <a:solidFill>
                   <a:srgbClr val="0F172A"/>
                 </a:solidFill>
-                <a:latin typeface="Inter"/>
+                <a:latin typeface="Segoe UI" panose="020B0502040204020203" pitchFamily="34" charset="0"/>
               </a:rPr>
               <a:t>Base &amp; Hombro (J1, J2)</a:t>
             </a:r>
@@ -11282,7 +11288,7 @@
         <p:spPr>
           <a:xfrm>
             <a:off x="990600" y="3671887"/>
-            <a:ext cx="3682937" cy="180975"/>
+            <a:ext cx="2188100" cy="173124"/>
           </a:xfrm>
           <a:prstGeom prst="rect">
             <a:avLst/>
@@ -11301,7 +11307,7 @@
                 <a:solidFill>
                   <a:srgbClr val="475569"/>
                 </a:solidFill>
-                <a:latin typeface="Inter"/>
+                <a:latin typeface="Segoe UI" panose="020B0502040204020203" pitchFamily="34" charset="0"/>
               </a:rPr>
               <a:t>NEMA 34 + Reducción por Poleas.</a:t>
             </a:r>
@@ -11317,7 +11323,7 @@
         <p:spPr>
           <a:xfrm>
             <a:off x="990600" y="3967162"/>
-            <a:ext cx="3041600" cy="485775"/>
+            <a:ext cx="3041600" cy="323165"/>
           </a:xfrm>
           <a:prstGeom prst="rect">
             <a:avLst/>
@@ -11336,7 +11342,7 @@
                 <a:solidFill>
                   <a:srgbClr val="64748B"/>
                 </a:solidFill>
-                <a:latin typeface="Inter"/>
+                <a:latin typeface="Segoe UI" panose="020B0502040204020203" pitchFamily="34" charset="0"/>
               </a:rPr>
               <a:t>Montaje fijo en pedestal con rodamientos axiales; entrega más de 46 N·m en el hombro con FS=3.</a:t>
             </a:r>
@@ -11352,7 +11358,7 @@
         <p:spPr>
           <a:xfrm>
             <a:off x="4622750" y="3328987"/>
-            <a:ext cx="3867084" cy="228600"/>
+            <a:ext cx="2342693" cy="230832"/>
           </a:xfrm>
           <a:prstGeom prst="rect">
             <a:avLst/>
@@ -11371,7 +11377,7 @@
                 <a:solidFill>
                   <a:srgbClr val="0F172A"/>
                 </a:solidFill>
-                <a:latin typeface="Inter"/>
+                <a:latin typeface="Segoe UI" panose="020B0502040204020203" pitchFamily="34" charset="0"/>
               </a:rPr>
               <a:t>Articulación del Codo (J3)</a:t>
             </a:r>
@@ -11387,7 +11393,7 @@
         <p:spPr>
           <a:xfrm>
             <a:off x="4622750" y="3671887"/>
-            <a:ext cx="3682937" cy="180975"/>
+            <a:ext cx="2324354" cy="173124"/>
           </a:xfrm>
           <a:prstGeom prst="rect">
             <a:avLst/>
@@ -11406,7 +11412,7 @@
                 <a:solidFill>
                   <a:srgbClr val="475569"/>
                 </a:solidFill>
-                <a:latin typeface="Inter"/>
+                <a:latin typeface="Segoe UI" panose="020B0502040204020203" pitchFamily="34" charset="0"/>
               </a:rPr>
               <a:t>NEMA 17 + Planetaria 10:1 + Banda.</a:t>
             </a:r>
@@ -11441,7 +11447,7 @@
                 <a:solidFill>
                   <a:srgbClr val="64748B"/>
                 </a:solidFill>
-                <a:latin typeface="Inter"/>
+                <a:latin typeface="Segoe UI" panose="020B0502040204020203" pitchFamily="34" charset="0"/>
               </a:rPr>
               <a:t>Segunda etapa síncrona para alcanzar 26 N·m, absorbiendo flexión mediante poleas dobles en pivote.</a:t>
             </a:r>
@@ -11457,7 +11463,7 @@
         <p:spPr>
           <a:xfrm>
             <a:off x="8254900" y="3328987"/>
-            <a:ext cx="3867084" cy="228600"/>
+            <a:ext cx="2668166" cy="230832"/>
           </a:xfrm>
           <a:prstGeom prst="rect">
             <a:avLst/>
@@ -11476,7 +11482,7 @@
                 <a:solidFill>
                   <a:srgbClr val="0F172A"/>
                 </a:solidFill>
-                <a:latin typeface="Inter"/>
+                <a:latin typeface="Segoe UI" panose="020B0502040204020203" pitchFamily="34" charset="0"/>
               </a:rPr>
               <a:t>Muñeca &amp; Gripper (J4, J5, J6)</a:t>
             </a:r>
@@ -11492,7 +11498,7 @@
         <p:spPr>
           <a:xfrm>
             <a:off x="8254900" y="3671887"/>
-            <a:ext cx="3682937" cy="180975"/>
+            <a:ext cx="2082301" cy="173124"/>
           </a:xfrm>
           <a:prstGeom prst="rect">
             <a:avLst/>
@@ -11511,7 +11517,7 @@
                 <a:solidFill>
                   <a:srgbClr val="475569"/>
                 </a:solidFill>
-                <a:latin typeface="Inter"/>
+                <a:latin typeface="Segoe UI" panose="020B0502040204020203" pitchFamily="34" charset="0"/>
               </a:rPr>
               <a:t>NEMA 17 + Planetarias en Codo.</a:t>
             </a:r>
@@ -11546,7 +11552,7 @@
                 <a:solidFill>
                   <a:srgbClr val="64748B"/>
                 </a:solidFill>
-                <a:latin typeface="Inter"/>
+                <a:latin typeface="Segoe UI" panose="020B0502040204020203" pitchFamily="34" charset="0"/>
               </a:rPr>
               <a:t>Actúan como contrapeso dinámico; transmiten par hacia el efector final con correas GT2 en tramos rectos.</a:t>
             </a:r>
@@ -11693,7 +11699,7 @@
                           <a:solidFill>
                             <a:srgbClr val="0F172A"/>
                           </a:solidFill>
-                          <a:latin typeface="Inter"/>
+                          <a:latin typeface="Segoe UI" panose="020B0502040204020203" pitchFamily="34" charset="0"/>
                         </a:rPr>
                         <a:t>Criterio Técnico</a:t>
                       </a:r>
@@ -11728,7 +11734,7 @@
                           <a:solidFill>
                             <a:srgbClr val="DC2626"/>
                           </a:solidFill>
-                          <a:latin typeface="Inter"/>
+                          <a:latin typeface="Segoe UI" panose="020B0502040204020203" pitchFamily="34" charset="0"/>
                         </a:rPr>
                         <a:t>Motores Directos Colgados</a:t>
                       </a:r>
@@ -11763,7 +11769,7 @@
                           <a:solidFill>
                             <a:srgbClr val="16A34A"/>
                           </a:solidFill>
-                          <a:latin typeface="Inter"/>
+                          <a:latin typeface="Segoe UI" panose="020B0502040204020203" pitchFamily="34" charset="0"/>
                         </a:rPr>
                         <a:t>Motores en Base + Bandas</a:t>
                       </a:r>
@@ -11798,7 +11804,7 @@
                           <a:solidFill>
                             <a:srgbClr val="0284C7"/>
                           </a:solidFill>
-                          <a:latin typeface="Inter"/>
+                          <a:latin typeface="Segoe UI" panose="020B0502040204020203" pitchFamily="34" charset="0"/>
                         </a:rPr>
                         <a:t>Ventaja Obtenida</a:t>
                       </a:r>
@@ -11840,7 +11846,7 @@
                           <a:solidFill>
                             <a:srgbClr val="334155"/>
                           </a:solidFill>
-                          <a:latin typeface="Inter"/>
+                          <a:latin typeface="Segoe UI" panose="020B0502040204020203" pitchFamily="34" charset="0"/>
                         </a:rPr>
                         <a:t>Masa Móvil Suspendida</a:t>
                       </a:r>
@@ -11875,7 +11881,7 @@
                           <a:solidFill>
                             <a:srgbClr val="DC2626"/>
                           </a:solidFill>
-                          <a:latin typeface="Inter"/>
+                          <a:latin typeface="Segoe UI" panose="020B0502040204020203" pitchFamily="34" charset="0"/>
                         </a:rPr>
                         <a:t>~4.5 kg (motores + cables)</a:t>
                       </a:r>
@@ -11910,7 +11916,7 @@
                           <a:solidFill>
                             <a:srgbClr val="16A34A"/>
                           </a:solidFill>
-                          <a:latin typeface="Inter"/>
+                          <a:latin typeface="Segoe UI" panose="020B0502040204020203" pitchFamily="34" charset="0"/>
                         </a:rPr>
                         <a:t>~1.2 kg (estructura hueca)</a:t>
                       </a:r>
@@ -11945,7 +11951,7 @@
                           <a:solidFill>
                             <a:srgbClr val="334155"/>
                           </a:solidFill>
-                          <a:latin typeface="Inter"/>
+                          <a:latin typeface="Segoe UI" panose="020B0502040204020203" pitchFamily="34" charset="0"/>
                         </a:rPr>
                         <a:t>-73% de inercia gravitatoria</a:t>
                       </a:r>
@@ -11987,7 +11993,7 @@
                           <a:solidFill>
                             <a:srgbClr val="334155"/>
                           </a:solidFill>
-                          <a:latin typeface="Inter"/>
+                          <a:latin typeface="Segoe UI" panose="020B0502040204020203" pitchFamily="34" charset="0"/>
                         </a:rPr>
                         <a:t>Torque Requerido en Hombro</a:t>
                       </a:r>
@@ -12022,7 +12028,7 @@
                           <a:solidFill>
                             <a:srgbClr val="DC2626"/>
                           </a:solidFill>
-                          <a:latin typeface="Inter"/>
+                          <a:latin typeface="Segoe UI" panose="020B0502040204020203" pitchFamily="34" charset="0"/>
                         </a:rPr>
                         <a:t>59.5 N·m a 80 N·m (FS=3)</a:t>
                       </a:r>
@@ -12057,7 +12063,7 @@
                           <a:solidFill>
                             <a:srgbClr val="16A34A"/>
                           </a:solidFill>
-                          <a:latin typeface="Inter"/>
+                          <a:latin typeface="Segoe UI" panose="020B0502040204020203" pitchFamily="34" charset="0"/>
                         </a:rPr>
                         <a:t>46.4 N·m (FS=3)</a:t>
                       </a:r>
@@ -12092,7 +12098,7 @@
                           <a:solidFill>
                             <a:srgbClr val="334155"/>
                           </a:solidFill>
-                          <a:latin typeface="Inter"/>
+                          <a:latin typeface="Segoe UI" panose="020B0502040204020203" pitchFamily="34" charset="0"/>
                         </a:rPr>
                         <a:t>Factible con NEMA 34 comercial</a:t>
                       </a:r>
@@ -12134,7 +12140,7 @@
                           <a:solidFill>
                             <a:srgbClr val="334155"/>
                           </a:solidFill>
-                          <a:latin typeface="Inter"/>
+                          <a:latin typeface="Segoe UI" panose="020B0502040204020203" pitchFamily="34" charset="0"/>
                         </a:rPr>
                         <a:t>Uso de Inventario Existente</a:t>
                       </a:r>
@@ -12169,7 +12175,7 @@
                           <a:solidFill>
                             <a:srgbClr val="DC2626"/>
                           </a:solidFill>
-                          <a:latin typeface="Inter"/>
+                          <a:latin typeface="Segoe UI" panose="020B0502040204020203" pitchFamily="34" charset="0"/>
                         </a:rPr>
                         <a:t>Incompatible (falta torque)</a:t>
                       </a:r>
@@ -12204,7 +12210,7 @@
                           <a:solidFill>
                             <a:srgbClr val="16A34A"/>
                           </a:solidFill>
-                          <a:latin typeface="Inter"/>
+                          <a:latin typeface="Segoe UI" panose="020B0502040204020203" pitchFamily="34" charset="0"/>
                         </a:rPr>
                         <a:t>100% de motores aprovechados</a:t>
                       </a:r>
@@ -12239,7 +12245,7 @@
                           <a:solidFill>
                             <a:srgbClr val="334155"/>
                           </a:solidFill>
-                          <a:latin typeface="Inter"/>
+                          <a:latin typeface="Segoe UI" panose="020B0502040204020203" pitchFamily="34" charset="0"/>
                         </a:rPr>
                         <a:t>Cero gasto en nuevos actuadores</a:t>
                       </a:r>
@@ -12281,7 +12287,7 @@
                           <a:solidFill>
                             <a:srgbClr val="334155"/>
                           </a:solidFill>
-                          <a:latin typeface="Inter"/>
+                          <a:latin typeface="Segoe UI" panose="020B0502040204020203" pitchFamily="34" charset="0"/>
                         </a:rPr>
                         <a:t>Seguridad y Protección</a:t>
                       </a:r>
@@ -12316,7 +12322,7 @@
                           <a:solidFill>
                             <a:srgbClr val="334155"/>
                           </a:solidFill>
-                          <a:latin typeface="Inter"/>
+                          <a:latin typeface="Segoe UI" panose="020B0502040204020203" pitchFamily="34" charset="0"/>
                         </a:rPr>
                         <a:t>Topes físicos con impacto</a:t>
                       </a:r>
@@ -12351,7 +12357,7 @@
                           <a:solidFill>
                             <a:srgbClr val="16A34A"/>
                           </a:solidFill>
-                          <a:latin typeface="Inter"/>
+                          <a:latin typeface="Segoe UI" panose="020B0502040204020203" pitchFamily="34" charset="0"/>
                         </a:rPr>
                         <a:t>Software + Poleas cubiertas</a:t>
                       </a:r>
@@ -12386,7 +12392,7 @@
                           <a:solidFill>
                             <a:srgbClr val="334155"/>
                           </a:solidFill>
-                          <a:latin typeface="Inter"/>
+                          <a:latin typeface="Segoe UI" panose="020B0502040204020203" pitchFamily="34" charset="0"/>
                         </a:rPr>
                         <a:t>Sin colisiones destructivas</a:t>
                       </a:r>
@@ -12428,7 +12434,7 @@
                           <a:solidFill>
                             <a:srgbClr val="334155"/>
                           </a:solidFill>
-                          <a:latin typeface="Inter"/>
+                          <a:latin typeface="Segoe UI" panose="020B0502040204020203" pitchFamily="34" charset="0"/>
                         </a:rPr>
                         <a:t>Riesgo Térmico en Plásticos</a:t>
                       </a:r>
@@ -12463,7 +12469,7 @@
                           <a:solidFill>
                             <a:srgbClr val="DC2626"/>
                           </a:solidFill>
-                          <a:latin typeface="Inter"/>
+                          <a:latin typeface="Segoe UI" panose="020B0502040204020203" pitchFamily="34" charset="0"/>
                         </a:rPr>
                         <a:t>Alto (motores calientan PETG)</a:t>
                       </a:r>
@@ -12498,7 +12504,7 @@
                           <a:solidFill>
                             <a:srgbClr val="16A34A"/>
                           </a:solidFill>
-                          <a:latin typeface="Inter"/>
+                          <a:latin typeface="Segoe UI" panose="020B0502040204020203" pitchFamily="34" charset="0"/>
                         </a:rPr>
                         <a:t>Nulo (actuadores en chasis base)</a:t>
                       </a:r>
@@ -12533,7 +12539,7 @@
                           <a:solidFill>
                             <a:srgbClr val="334155"/>
                           </a:solidFill>
-                          <a:latin typeface="Inter"/>
+                          <a:latin typeface="Segoe UI" panose="020B0502040204020203" pitchFamily="34" charset="0"/>
                         </a:rPr>
                         <a:t>Preserva rigidez dimensional</a:t>
                       </a:r>
@@ -12576,7 +12582,7 @@
         <p:spPr>
           <a:xfrm>
             <a:off x="762000" y="6162675"/>
-            <a:ext cx="11430000" cy="161925"/>
+            <a:ext cx="3249287" cy="161583"/>
           </a:xfrm>
           <a:prstGeom prst="rect">
             <a:avLst/>
@@ -12595,7 +12601,7 @@
                 <a:solidFill>
                   <a:srgbClr val="0F172A"/>
                 </a:solidFill>
-                <a:latin typeface="Inter"/>
+                <a:latin typeface="Segoe UI" panose="020B0502040204020203" pitchFamily="34" charset="0"/>
               </a:rPr>
               <a:t>Matriz Comparativa de Ingeniería y Decisión de Diseño</a:t>
             </a:r>
@@ -12611,7 +12617,7 @@
         <p:spPr>
           <a:xfrm>
             <a:off x="762000" y="533400"/>
-            <a:ext cx="11430000" cy="161925"/>
+            <a:ext cx="2731517" cy="161583"/>
           </a:xfrm>
           <a:prstGeom prst="rect">
             <a:avLst/>
@@ -12630,7 +12636,7 @@
                 <a:solidFill>
                   <a:srgbClr val="0284C7"/>
                 </a:solidFill>
-                <a:latin typeface="Inter"/>
+                <a:latin typeface="Segoe UI" panose="020B0502040204020203" pitchFamily="34" charset="0"/>
               </a:rPr>
               <a:t>ARQUITECTURA Y CONCEPTOS · PUNTO 21</a:t>
             </a:r>
@@ -12646,7 +12652,7 @@
         <p:spPr>
           <a:xfrm>
             <a:off x="762000" y="771525"/>
-            <a:ext cx="11430000" cy="438150"/>
+            <a:ext cx="5822620" cy="415498"/>
           </a:xfrm>
           <a:prstGeom prst="rect">
             <a:avLst/>
@@ -12665,7 +12671,7 @@
                 <a:solidFill>
                   <a:srgbClr val="0F172A"/>
                 </a:solidFill>
-                <a:latin typeface="Space Grotesk"/>
+                <a:latin typeface="Trebuchet MS" panose="020B0603020202020204" pitchFamily="34" charset="0"/>
               </a:rPr>
               <a:t>Justificación Técnica y Comparativa</a:t>
             </a:r>
@@ -12945,7 +12951,7 @@
         <p:spPr>
           <a:xfrm>
             <a:off x="762000" y="6162675"/>
-            <a:ext cx="11430000" cy="161925"/>
+            <a:ext cx="3473708" cy="161583"/>
           </a:xfrm>
           <a:prstGeom prst="rect">
             <a:avLst/>
@@ -12964,7 +12970,7 @@
                 <a:solidFill>
                   <a:srgbClr val="0F172A"/>
                 </a:solidFill>
-                <a:latin typeface="Inter"/>
+                <a:latin typeface="Segoe UI" panose="020B0502040204020203" pitchFamily="34" charset="0"/>
               </a:rPr>
               <a:t>Fase I · Diagnóstico Inicial y Planteamiento de Reingeniería</a:t>
             </a:r>
@@ -12980,7 +12986,7 @@
         <p:spPr>
           <a:xfrm>
             <a:off x="762000" y="533400"/>
-            <a:ext cx="11430000" cy="161925"/>
+            <a:ext cx="2468625" cy="161583"/>
           </a:xfrm>
           <a:prstGeom prst="rect">
             <a:avLst/>
@@ -12999,7 +13005,7 @@
                 <a:solidFill>
                   <a:srgbClr val="0284C7"/>
                 </a:solidFill>
-                <a:latin typeface="Inter"/>
+                <a:latin typeface="Segoe UI" panose="020B0502040204020203" pitchFamily="34" charset="0"/>
               </a:rPr>
               <a:t>DEFINICIÓN DEL PROYECTO · PUNTO 1</a:t>
             </a:r>
@@ -13015,7 +13021,7 @@
         <p:spPr>
           <a:xfrm>
             <a:off x="762000" y="771525"/>
-            <a:ext cx="11430000" cy="438150"/>
+            <a:ext cx="5919890" cy="415498"/>
           </a:xfrm>
           <a:prstGeom prst="rect">
             <a:avLst/>
@@ -13034,7 +13040,7 @@
                 <a:solidFill>
                   <a:srgbClr val="0F172A"/>
                 </a:solidFill>
-                <a:latin typeface="Space Grotesk"/>
+                <a:latin typeface="Trebuchet MS" panose="020B0603020202020204" pitchFamily="34" charset="0"/>
               </a:rPr>
               <a:t>Definición del Problema y Necesidad</a:t>
             </a:r>
@@ -13050,7 +13056,7 @@
         <p:spPr>
           <a:xfrm>
             <a:off x="1009650" y="2614612"/>
-            <a:ext cx="3721340" cy="219291"/>
+            <a:ext cx="4134145" cy="219291"/>
           </a:xfrm>
           <a:prstGeom prst="rect">
             <a:avLst/>
@@ -13069,7 +13075,7 @@
                 <a:solidFill>
                   <a:srgbClr val="0F172A"/>
                 </a:solidFill>
-                <a:latin typeface="Inter"/>
+                <a:latin typeface="Segoe UI" panose="020B0502040204020203" pitchFamily="34" charset="0"/>
               </a:rPr>
               <a:t>Limitación</a:t>
             </a:r>
@@ -13078,7 +13084,7 @@
                 <a:solidFill>
                   <a:srgbClr val="0F172A"/>
                 </a:solidFill>
-                <a:latin typeface="Inter"/>
+                <a:latin typeface="Segoe UI" panose="020B0502040204020203" pitchFamily="34" charset="0"/>
               </a:rPr>
               <a:t> </a:t>
             </a:r>
@@ -13087,7 +13093,7 @@
                 <a:solidFill>
                   <a:srgbClr val="0F172A"/>
                 </a:solidFill>
-                <a:latin typeface="Inter"/>
+                <a:latin typeface="Segoe UI" panose="020B0502040204020203" pitchFamily="34" charset="0"/>
               </a:rPr>
               <a:t>Mecánica</a:t>
             </a:r>
@@ -13096,7 +13102,7 @@
                 <a:solidFill>
                   <a:srgbClr val="0F172A"/>
                 </a:solidFill>
-                <a:latin typeface="Inter"/>
+                <a:latin typeface="Segoe UI" panose="020B0502040204020203" pitchFamily="34" charset="0"/>
               </a:rPr>
               <a:t> de </a:t>
             </a:r>
@@ -13105,7 +13111,7 @@
                 <a:solidFill>
                   <a:srgbClr val="0F172A"/>
                 </a:solidFill>
-                <a:latin typeface="Inter"/>
+                <a:latin typeface="Segoe UI" panose="020B0502040204020203" pitchFamily="34" charset="0"/>
               </a:rPr>
               <a:t>motores</a:t>
             </a:r>
@@ -13114,7 +13120,7 @@
                 <a:solidFill>
                   <a:srgbClr val="0F172A"/>
                 </a:solidFill>
-                <a:latin typeface="Inter"/>
+                <a:latin typeface="Segoe UI" panose="020B0502040204020203" pitchFamily="34" charset="0"/>
               </a:rPr>
               <a:t> </a:t>
             </a:r>
@@ -13123,7 +13129,7 @@
                 <a:solidFill>
                   <a:srgbClr val="0F172A"/>
                 </a:solidFill>
-                <a:latin typeface="Inter"/>
+                <a:latin typeface="Segoe UI" panose="020B0502040204020203" pitchFamily="34" charset="0"/>
               </a:rPr>
               <a:t>c</a:t>
             </a:r>
@@ -13132,7 +13138,7 @@
                 <a:solidFill>
                   <a:srgbClr val="0F172A"/>
                 </a:solidFill>
-                <a:latin typeface="Inter"/>
+                <a:latin typeface="Segoe UI" panose="020B0502040204020203" pitchFamily="34" charset="0"/>
               </a:rPr>
               <a:t>onvencionales</a:t>
             </a:r>
@@ -13140,7 +13146,7 @@
               <a:solidFill>
                 <a:srgbClr val="0F172A"/>
               </a:solidFill>
-              <a:latin typeface="Inter"/>
+              <a:latin typeface="Segoe UI" panose="020B0502040204020203" pitchFamily="34" charset="0"/>
             </a:endParaRPr>
           </a:p>
         </p:txBody>
@@ -13177,7 +13183,7 @@
                 <a:solidFill>
                   <a:srgbClr val="475569"/>
                 </a:solidFill>
-                <a:latin typeface="Inter"/>
+                <a:latin typeface="Segoe UI" panose="020B0502040204020203" pitchFamily="34" charset="0"/>
               </a:rPr>
               <a:t>El </a:t>
             </a:r>
@@ -13186,7 +13192,7 @@
                 <a:solidFill>
                   <a:srgbClr val="475569"/>
                 </a:solidFill>
-                <a:latin typeface="Inter"/>
+                <a:latin typeface="Segoe UI" panose="020B0502040204020203" pitchFamily="34" charset="0"/>
               </a:rPr>
               <a:t>diseño</a:t>
             </a:r>
@@ -13195,7 +13201,7 @@
                 <a:solidFill>
                   <a:srgbClr val="475569"/>
                 </a:solidFill>
-                <a:latin typeface="Inter"/>
+                <a:latin typeface="Segoe UI" panose="020B0502040204020203" pitchFamily="34" charset="0"/>
               </a:rPr>
               <a:t> base con </a:t>
             </a:r>
@@ -13204,7 +13210,7 @@
                 <a:solidFill>
                   <a:srgbClr val="475569"/>
                 </a:solidFill>
-                <a:latin typeface="Inter"/>
+                <a:latin typeface="Segoe UI" panose="020B0502040204020203" pitchFamily="34" charset="0"/>
               </a:rPr>
               <a:t>servomotores</a:t>
             </a:r>
@@ -13213,7 +13219,7 @@
                 <a:solidFill>
                   <a:srgbClr val="475569"/>
                 </a:solidFill>
-                <a:latin typeface="Inter"/>
+                <a:latin typeface="Segoe UI" panose="020B0502040204020203" pitchFamily="34" charset="0"/>
               </a:rPr>
               <a:t> </a:t>
             </a:r>
@@ -13222,7 +13228,7 @@
                 <a:solidFill>
                   <a:srgbClr val="475569"/>
                 </a:solidFill>
-                <a:latin typeface="Inter"/>
+                <a:latin typeface="Segoe UI" panose="020B0502040204020203" pitchFamily="34" charset="0"/>
               </a:rPr>
               <a:t>o</a:t>
             </a:r>
@@ -13231,7 +13237,7 @@
                 <a:solidFill>
                   <a:srgbClr val="475569"/>
                 </a:solidFill>
-                <a:latin typeface="Inter"/>
+                <a:latin typeface="Segoe UI" panose="020B0502040204020203" pitchFamily="34" charset="0"/>
               </a:rPr>
               <a:t> </a:t>
             </a:r>
@@ -13240,7 +13246,7 @@
                 <a:solidFill>
                   <a:srgbClr val="475569"/>
                 </a:solidFill>
-                <a:latin typeface="Inter"/>
+                <a:latin typeface="Segoe UI" panose="020B0502040204020203" pitchFamily="34" charset="0"/>
               </a:rPr>
               <a:t>motores</a:t>
             </a:r>
@@ -13249,7 +13255,7 @@
                 <a:solidFill>
                   <a:srgbClr val="475569"/>
                 </a:solidFill>
-                <a:latin typeface="Inter"/>
+                <a:latin typeface="Segoe UI" panose="020B0502040204020203" pitchFamily="34" charset="0"/>
               </a:rPr>
               <a:t> </a:t>
             </a:r>
@@ -13258,7 +13264,7 @@
                 <a:solidFill>
                   <a:srgbClr val="475569"/>
                 </a:solidFill>
-                <a:latin typeface="Inter"/>
+                <a:latin typeface="Segoe UI" panose="020B0502040204020203" pitchFamily="34" charset="0"/>
               </a:rPr>
               <a:t>directos</a:t>
             </a:r>
@@ -13267,7 +13273,7 @@
                 <a:solidFill>
                   <a:srgbClr val="475569"/>
                 </a:solidFill>
-                <a:latin typeface="Inter"/>
+                <a:latin typeface="Segoe UI" panose="020B0502040204020203" pitchFamily="34" charset="0"/>
               </a:rPr>
               <a:t> </a:t>
             </a:r>
@@ -13276,7 +13282,7 @@
                 <a:solidFill>
                   <a:srgbClr val="475569"/>
                 </a:solidFill>
-                <a:latin typeface="Inter"/>
+                <a:latin typeface="Segoe UI" panose="020B0502040204020203" pitchFamily="34" charset="0"/>
               </a:rPr>
               <a:t>distribuidos</a:t>
             </a:r>
@@ -13285,7 +13291,7 @@
                 <a:solidFill>
                   <a:srgbClr val="475569"/>
                 </a:solidFill>
-                <a:latin typeface="Inter"/>
+                <a:latin typeface="Segoe UI" panose="020B0502040204020203" pitchFamily="34" charset="0"/>
               </a:rPr>
               <a:t> </a:t>
             </a:r>
@@ -13294,7 +13300,7 @@
                 <a:solidFill>
                   <a:srgbClr val="475569"/>
                 </a:solidFill>
-                <a:latin typeface="Inter"/>
+                <a:latin typeface="Segoe UI" panose="020B0502040204020203" pitchFamily="34" charset="0"/>
               </a:rPr>
               <a:t>colapsa</a:t>
             </a:r>
@@ -13303,7 +13309,7 @@
                 <a:solidFill>
                   <a:srgbClr val="475569"/>
                 </a:solidFill>
-                <a:latin typeface="Inter"/>
+                <a:latin typeface="Segoe UI" panose="020B0502040204020203" pitchFamily="34" charset="0"/>
               </a:rPr>
               <a:t> al </a:t>
             </a:r>
@@ -13312,7 +13318,7 @@
                 <a:solidFill>
                   <a:srgbClr val="475569"/>
                 </a:solidFill>
-                <a:latin typeface="Inter"/>
+                <a:latin typeface="Segoe UI" panose="020B0502040204020203" pitchFamily="34" charset="0"/>
               </a:rPr>
               <a:t>exigir</a:t>
             </a:r>
@@ -13321,7 +13327,7 @@
                 <a:solidFill>
                   <a:srgbClr val="475569"/>
                 </a:solidFill>
-                <a:latin typeface="Inter"/>
+                <a:latin typeface="Segoe UI" panose="020B0502040204020203" pitchFamily="34" charset="0"/>
               </a:rPr>
               <a:t> </a:t>
             </a:r>
@@ -13330,7 +13336,7 @@
                 <a:solidFill>
                   <a:srgbClr val="475569"/>
                 </a:solidFill>
-                <a:latin typeface="Inter"/>
+                <a:latin typeface="Segoe UI" panose="020B0502040204020203" pitchFamily="34" charset="0"/>
               </a:rPr>
               <a:t>manipulación</a:t>
             </a:r>
@@ -13339,7 +13345,7 @@
                 <a:solidFill>
                   <a:srgbClr val="475569"/>
                 </a:solidFill>
-                <a:latin typeface="Inter"/>
+                <a:latin typeface="Segoe UI" panose="020B0502040204020203" pitchFamily="34" charset="0"/>
               </a:rPr>
               <a:t> con un factor de </a:t>
             </a:r>
@@ -13348,7 +13354,7 @@
                 <a:solidFill>
                   <a:srgbClr val="475569"/>
                 </a:solidFill>
-                <a:latin typeface="Inter"/>
+                <a:latin typeface="Segoe UI" panose="020B0502040204020203" pitchFamily="34" charset="0"/>
               </a:rPr>
               <a:t>seguridad</a:t>
             </a:r>
@@ -13357,7 +13363,7 @@
                 <a:solidFill>
                   <a:srgbClr val="475569"/>
                 </a:solidFill>
-                <a:latin typeface="Inter"/>
+                <a:latin typeface="Segoe UI" panose="020B0502040204020203" pitchFamily="34" charset="0"/>
               </a:rPr>
               <a:t> FS=3.</a:t>
             </a:r>
@@ -13373,7 +13379,7 @@
         <p:spPr>
           <a:xfrm>
             <a:off x="1009650" y="3881437"/>
-            <a:ext cx="6125765" cy="219075"/>
+            <a:ext cx="3244671" cy="219291"/>
           </a:xfrm>
           <a:prstGeom prst="rect">
             <a:avLst/>
@@ -13392,7 +13398,7 @@
                 <a:solidFill>
                   <a:srgbClr val="0F172A"/>
                 </a:solidFill>
-                <a:latin typeface="Inter"/>
+                <a:latin typeface="Segoe UI" panose="020B0502040204020203" pitchFamily="34" charset="0"/>
               </a:rPr>
               <a:t>Momento Flector Crítico en Eslabones</a:t>
             </a:r>
@@ -13408,7 +13414,7 @@
         <p:spPr>
           <a:xfrm>
             <a:off x="1009650" y="4157662"/>
-            <a:ext cx="4762500" cy="600075"/>
+            <a:ext cx="4762500" cy="391774"/>
           </a:xfrm>
           <a:prstGeom prst="rect">
             <a:avLst/>
@@ -13431,7 +13437,7 @@
                 <a:solidFill>
                   <a:srgbClr val="475569"/>
                 </a:solidFill>
-                <a:latin typeface="Inter"/>
+                <a:latin typeface="Segoe UI" panose="020B0502040204020203" pitchFamily="34" charset="0"/>
               </a:rPr>
               <a:t>Cargar 1.5 kg a 5 kg en máxima extensión horizontal genera torques de más de 60 N·m en el hombro, inviables con motores directos colgados.</a:t>
             </a:r>
@@ -13894,7 +13900,7 @@
         <p:spPr>
           <a:xfrm>
             <a:off x="762000" y="6162675"/>
-            <a:ext cx="11430000" cy="161925"/>
+            <a:ext cx="2938305" cy="161583"/>
           </a:xfrm>
           <a:prstGeom prst="rect">
             <a:avLst/>
@@ -13913,7 +13919,7 @@
                 <a:solidFill>
                   <a:srgbClr val="0F172A"/>
                 </a:solidFill>
-                <a:latin typeface="Inter"/>
+                <a:latin typeface="Segoe UI" panose="020B0502040204020203" pitchFamily="34" charset="0"/>
               </a:rPr>
               <a:t>Flujo de Potencia, Señales de Control y Seguridad</a:t>
             </a:r>
@@ -13929,7 +13935,7 @@
         <p:spPr>
           <a:xfrm>
             <a:off x="762000" y="533400"/>
-            <a:ext cx="11430000" cy="161925"/>
+            <a:ext cx="2731517" cy="161583"/>
           </a:xfrm>
           <a:prstGeom prst="rect">
             <a:avLst/>
@@ -13948,7 +13954,7 @@
                 <a:solidFill>
                   <a:srgbClr val="0284C7"/>
                 </a:solidFill>
-                <a:latin typeface="Inter"/>
+                <a:latin typeface="Segoe UI" panose="020B0502040204020203" pitchFamily="34" charset="0"/>
               </a:rPr>
               <a:t>ARQUITECTURA Y CONCEPTOS · PUNTO 22</a:t>
             </a:r>
@@ -13964,7 +13970,7 @@
         <p:spPr>
           <a:xfrm>
             <a:off x="762000" y="771525"/>
-            <a:ext cx="11430000" cy="438150"/>
+            <a:ext cx="7450438" cy="415498"/>
           </a:xfrm>
           <a:prstGeom prst="rect">
             <a:avLst/>
@@ -13983,7 +13989,7 @@
                 <a:solidFill>
                   <a:srgbClr val="0F172A"/>
                 </a:solidFill>
-                <a:latin typeface="Space Grotesk"/>
+                <a:latin typeface="Trebuchet MS" panose="020B0603020202020204" pitchFamily="34" charset="0"/>
               </a:rPr>
               <a:t>Diagrama de Arquitectura General del Sistema</a:t>
             </a:r>
@@ -13998,8 +14004,8 @@
         </p:nvSpPr>
         <p:spPr>
           <a:xfrm>
-            <a:off x="590550" y="2676525"/>
-            <a:ext cx="3619500" cy="142875"/>
+            <a:off x="1916994" y="2676525"/>
+            <a:ext cx="966611" cy="138499"/>
           </a:xfrm>
           <a:prstGeom prst="rect">
             <a:avLst/>
@@ -14018,7 +14024,7 @@
                 <a:solidFill>
                   <a:srgbClr val="0284C7"/>
                 </a:solidFill>
-                <a:latin typeface="Inter"/>
+                <a:latin typeface="Segoe UI" panose="020B0502040204020203" pitchFamily="34" charset="0"/>
               </a:rPr>
               <a:t>HOST / INTERFAZ</a:t>
             </a:r>
@@ -14033,8 +14039,8 @@
         </p:nvSpPr>
         <p:spPr>
           <a:xfrm>
-            <a:off x="500062" y="2857500"/>
-            <a:ext cx="3800475" cy="190500"/>
+            <a:off x="1636725" y="2857500"/>
+            <a:ext cx="1527149" cy="184666"/>
           </a:xfrm>
           <a:prstGeom prst="rect">
             <a:avLst/>
@@ -14053,7 +14059,7 @@
                 <a:solidFill>
                   <a:srgbClr val="0F172A"/>
                 </a:solidFill>
-                <a:latin typeface="Inter"/>
+                <a:latin typeface="Segoe UI" panose="020B0502040204020203" pitchFamily="34" charset="0"/>
               </a:rPr>
               <a:t>Control por Software</a:t>
             </a:r>
@@ -14068,8 +14074,8 @@
         </p:nvSpPr>
         <p:spPr>
           <a:xfrm>
-            <a:off x="590550" y="3086100"/>
-            <a:ext cx="3619500" cy="152400"/>
+            <a:off x="1371172" y="3086100"/>
+            <a:ext cx="2058256" cy="150041"/>
           </a:xfrm>
           <a:prstGeom prst="rect">
             <a:avLst/>
@@ -14088,7 +14094,7 @@
                 <a:solidFill>
                   <a:srgbClr val="64748B"/>
                 </a:solidFill>
-                <a:latin typeface="Inter"/>
+                <a:latin typeface="Segoe UI" panose="020B0502040204020203" pitchFamily="34" charset="0"/>
               </a:rPr>
               <a:t>Cinemática Inversa y Límites Virtuales</a:t>
             </a:r>
@@ -14103,8 +14109,8 @@
         </p:nvSpPr>
         <p:spPr>
           <a:xfrm>
-            <a:off x="4286250" y="2676525"/>
-            <a:ext cx="3619500" cy="142875"/>
+            <a:off x="5404304" y="2676525"/>
+            <a:ext cx="1383392" cy="138499"/>
           </a:xfrm>
           <a:prstGeom prst="rect">
             <a:avLst/>
@@ -14123,7 +14129,7 @@
                 <a:solidFill>
                   <a:srgbClr val="0284C7"/>
                 </a:solidFill>
-                <a:latin typeface="Inter"/>
+                <a:latin typeface="Segoe UI" panose="020B0502040204020203" pitchFamily="34" charset="0"/>
               </a:rPr>
               <a:t>PROCESADOR EMBEBIDO</a:t>
             </a:r>
@@ -14138,8 +14144,8 @@
         </p:nvSpPr>
         <p:spPr>
           <a:xfrm>
-            <a:off x="4195762" y="2857500"/>
-            <a:ext cx="3800475" cy="190500"/>
+            <a:off x="5389684" y="2857500"/>
+            <a:ext cx="1412630" cy="184666"/>
           </a:xfrm>
           <a:prstGeom prst="rect">
             <a:avLst/>
@@ -14158,7 +14164,7 @@
                 <a:solidFill>
                   <a:srgbClr val="0F172A"/>
                 </a:solidFill>
-                <a:latin typeface="Inter"/>
+                <a:latin typeface="Segoe UI" panose="020B0502040204020203" pitchFamily="34" charset="0"/>
               </a:rPr>
               <a:t>Generador Step/Dir</a:t>
             </a:r>
@@ -14173,8 +14179,8 @@
         </p:nvSpPr>
         <p:spPr>
           <a:xfrm>
-            <a:off x="4286250" y="3086100"/>
-            <a:ext cx="3619500" cy="152400"/>
+            <a:off x="5207936" y="3086100"/>
+            <a:ext cx="1776127" cy="150041"/>
           </a:xfrm>
           <a:prstGeom prst="rect">
             <a:avLst/>
@@ -14193,7 +14199,7 @@
                 <a:solidFill>
                   <a:srgbClr val="64748B"/>
                 </a:solidFill>
-                <a:latin typeface="Inter"/>
+                <a:latin typeface="Segoe UI" panose="020B0502040204020203" pitchFamily="34" charset="0"/>
               </a:rPr>
               <a:t>Rampas Suaves y Enclavamiento</a:t>
             </a:r>
@@ -14208,8 +14214,8 @@
         </p:nvSpPr>
         <p:spPr>
           <a:xfrm>
-            <a:off x="7981950" y="2676525"/>
-            <a:ext cx="3619500" cy="142875"/>
+            <a:off x="9099202" y="2676525"/>
+            <a:ext cx="1384995" cy="138499"/>
           </a:xfrm>
           <a:prstGeom prst="rect">
             <a:avLst/>
@@ -14228,7 +14234,7 @@
                 <a:solidFill>
                   <a:srgbClr val="EA580C"/>
                 </a:solidFill>
-                <a:latin typeface="Inter"/>
+                <a:latin typeface="Segoe UI" panose="020B0502040204020203" pitchFamily="34" charset="0"/>
               </a:rPr>
               <a:t>SEGURIDAD &amp; POTENCIA</a:t>
             </a:r>
@@ -14243,8 +14249,8 @@
         </p:nvSpPr>
         <p:spPr>
           <a:xfrm>
-            <a:off x="7891462" y="2857500"/>
-            <a:ext cx="3800475" cy="190500"/>
+            <a:off x="9086186" y="2857500"/>
+            <a:ext cx="1411027" cy="184666"/>
           </a:xfrm>
           <a:prstGeom prst="rect">
             <a:avLst/>
@@ -14263,7 +14269,7 @@
                 <a:solidFill>
                   <a:srgbClr val="0F172A"/>
                 </a:solidFill>
-                <a:latin typeface="Inter"/>
+                <a:latin typeface="Segoe UI" panose="020B0502040204020203" pitchFamily="34" charset="0"/>
               </a:rPr>
               <a:t>Seta Paro &amp; Drivers</a:t>
             </a:r>
@@ -14278,8 +14284,8 @@
         </p:nvSpPr>
         <p:spPr>
           <a:xfrm>
-            <a:off x="7981950" y="3086100"/>
-            <a:ext cx="3619500" cy="152400"/>
+            <a:off x="8946115" y="3086100"/>
+            <a:ext cx="1691169" cy="150041"/>
           </a:xfrm>
           <a:prstGeom prst="rect">
             <a:avLst/>
@@ -14298,7 +14304,7 @@
                 <a:solidFill>
                   <a:srgbClr val="64748B"/>
                 </a:solidFill>
-                <a:latin typeface="Inter"/>
+                <a:latin typeface="Segoe UI" panose="020B0502040204020203" pitchFamily="34" charset="0"/>
               </a:rPr>
               <a:t>Corte Físico y Alimentación DC</a:t>
             </a:r>
@@ -14313,8 +14319,8 @@
         </p:nvSpPr>
         <p:spPr>
           <a:xfrm>
-            <a:off x="590550" y="4133850"/>
-            <a:ext cx="3619500" cy="142875"/>
+            <a:off x="1521053" y="4133850"/>
+            <a:ext cx="1758494" cy="138499"/>
           </a:xfrm>
           <a:prstGeom prst="rect">
             <a:avLst/>
@@ -14333,7 +14339,7 @@
                 <a:solidFill>
                   <a:srgbClr val="0F172A"/>
                 </a:solidFill>
-                <a:latin typeface="Inter"/>
+                <a:latin typeface="Segoe UI" panose="020B0502040204020203" pitchFamily="34" charset="0"/>
               </a:rPr>
               <a:t>PLANTA MOTRIZ (INVENTARIO)</a:t>
             </a:r>
@@ -14348,8 +14354,8 @@
         </p:nvSpPr>
         <p:spPr>
           <a:xfrm>
-            <a:off x="500062" y="4314825"/>
-            <a:ext cx="3800475" cy="190500"/>
+            <a:off x="1572926" y="4314825"/>
+            <a:ext cx="1654747" cy="184666"/>
           </a:xfrm>
           <a:prstGeom prst="rect">
             <a:avLst/>
@@ -14368,7 +14374,7 @@
                 <a:solidFill>
                   <a:srgbClr val="0F172A"/>
                 </a:solidFill>
-                <a:latin typeface="Inter"/>
+                <a:latin typeface="Segoe UI" panose="020B0502040204020203" pitchFamily="34" charset="0"/>
               </a:rPr>
               <a:t>Motores NEMA 34 / 17</a:t>
             </a:r>
@@ -14383,8 +14389,8 @@
         </p:nvSpPr>
         <p:spPr>
           <a:xfrm>
-            <a:off x="590550" y="4543425"/>
-            <a:ext cx="3619500" cy="152400"/>
+            <a:off x="1579562" y="4543425"/>
+            <a:ext cx="1641475" cy="150041"/>
           </a:xfrm>
           <a:prstGeom prst="rect">
             <a:avLst/>
@@ -14403,7 +14409,7 @@
                 <a:solidFill>
                   <a:srgbClr val="64748B"/>
                 </a:solidFill>
-                <a:latin typeface="Inter"/>
+                <a:latin typeface="Segoe UI" panose="020B0502040204020203" pitchFamily="34" charset="0"/>
               </a:rPr>
               <a:t>Cajas Planetarias 10:1 en Base</a:t>
             </a:r>
@@ -14418,8 +14424,8 @@
         </p:nvSpPr>
         <p:spPr>
           <a:xfrm>
-            <a:off x="4286250" y="4133850"/>
-            <a:ext cx="3619500" cy="142875"/>
+            <a:off x="5352206" y="4133850"/>
+            <a:ext cx="1487587" cy="138499"/>
           </a:xfrm>
           <a:prstGeom prst="rect">
             <a:avLst/>
@@ -14438,7 +14444,7 @@
                 <a:solidFill>
                   <a:srgbClr val="0F172A"/>
                 </a:solidFill>
-                <a:latin typeface="Inter"/>
+                <a:latin typeface="Segoe UI" panose="020B0502040204020203" pitchFamily="34" charset="0"/>
               </a:rPr>
               <a:t>TRANSMISIÓN PROTEGIDA</a:t>
             </a:r>
@@ -14453,8 +14459,8 @@
         </p:nvSpPr>
         <p:spPr>
           <a:xfrm>
-            <a:off x="4195762" y="4314825"/>
-            <a:ext cx="3800475" cy="190500"/>
+            <a:off x="5132659" y="4314825"/>
+            <a:ext cx="1926681" cy="184666"/>
           </a:xfrm>
           <a:prstGeom prst="rect">
             <a:avLst/>
@@ -14473,7 +14479,7 @@
                 <a:solidFill>
                   <a:srgbClr val="0F172A"/>
                 </a:solidFill>
-                <a:latin typeface="Inter"/>
+                <a:latin typeface="Segoe UI" panose="020B0502040204020203" pitchFamily="34" charset="0"/>
               </a:rPr>
               <a:t>Poleas &amp; Bandas Cubiertas</a:t>
             </a:r>
@@ -14488,8 +14494,8 @@
         </p:nvSpPr>
         <p:spPr>
           <a:xfrm>
-            <a:off x="4286250" y="4543425"/>
-            <a:ext cx="3619500" cy="152400"/>
+            <a:off x="5278468" y="4543425"/>
+            <a:ext cx="1635063" cy="150041"/>
           </a:xfrm>
           <a:prstGeom prst="rect">
             <a:avLst/>
@@ -14508,7 +14514,7 @@
                 <a:solidFill>
                   <a:srgbClr val="64748B"/>
                 </a:solidFill>
-                <a:latin typeface="Inter"/>
+                <a:latin typeface="Segoe UI" panose="020B0502040204020203" pitchFamily="34" charset="0"/>
               </a:rPr>
               <a:t>Baleros 608ZZ en Ejes de Giro</a:t>
             </a:r>
@@ -14523,8 +14529,8 @@
         </p:nvSpPr>
         <p:spPr>
           <a:xfrm>
-            <a:off x="7981950" y="4133850"/>
-            <a:ext cx="3619500" cy="142875"/>
+            <a:off x="9237862" y="4133850"/>
+            <a:ext cx="1107676" cy="138499"/>
           </a:xfrm>
           <a:prstGeom prst="rect">
             <a:avLst/>
@@ -14543,7 +14549,7 @@
                 <a:solidFill>
                   <a:srgbClr val="0F172A"/>
                 </a:solidFill>
-                <a:latin typeface="Inter"/>
+                <a:latin typeface="Segoe UI" panose="020B0502040204020203" pitchFamily="34" charset="0"/>
               </a:rPr>
               <a:t>ESTRUCTURA 6-DOF</a:t>
             </a:r>
@@ -14558,8 +14564,8 @@
         </p:nvSpPr>
         <p:spPr>
           <a:xfrm>
-            <a:off x="7891462" y="4314825"/>
-            <a:ext cx="3800475" cy="190500"/>
+            <a:off x="8817202" y="4314825"/>
+            <a:ext cx="1948995" cy="184666"/>
           </a:xfrm>
           <a:prstGeom prst="rect">
             <a:avLst/>
@@ -14578,7 +14584,7 @@
                 <a:solidFill>
                   <a:srgbClr val="0F172A"/>
                 </a:solidFill>
-                <a:latin typeface="Inter"/>
+                <a:latin typeface="Segoe UI" panose="020B0502040204020203" pitchFamily="34" charset="0"/>
               </a:rPr>
               <a:t>PETG / Aluminio &amp; Gripper</a:t>
             </a:r>
@@ -14593,8 +14599,8 @@
         </p:nvSpPr>
         <p:spPr>
           <a:xfrm>
-            <a:off x="7981950" y="4543425"/>
-            <a:ext cx="3619500" cy="152400"/>
+            <a:off x="8955733" y="4543425"/>
+            <a:ext cx="1671933" cy="150041"/>
           </a:xfrm>
           <a:prstGeom prst="rect">
             <a:avLst/>
@@ -14613,7 +14619,7 @@
                 <a:solidFill>
                   <a:srgbClr val="64748B"/>
                 </a:solidFill>
-                <a:latin typeface="Inter"/>
+                <a:latin typeface="Segoe UI" panose="020B0502040204020203" pitchFamily="34" charset="0"/>
               </a:rPr>
               <a:t>Manipulación con Factor FS=3</a:t>
             </a:r>
@@ -14797,8 +14803,8 @@
         </p:nvSpPr>
         <p:spPr>
           <a:xfrm>
-            <a:off x="241101" y="2266057"/>
-            <a:ext cx="11709796" cy="525660"/>
+            <a:off x="1732528" y="2266057"/>
+            <a:ext cx="8726941" cy="525785"/>
           </a:xfrm>
           <a:prstGeom prst="rect">
             <a:avLst/>
@@ -14821,7 +14827,7 @@
                 <a:solidFill>
                   <a:srgbClr val="F8FAFC"/>
                 </a:solidFill>
-                <a:latin typeface="Space Grotesk"/>
+                <a:latin typeface="Trebuchet MS" panose="020B0603020202020204" pitchFamily="34" charset="0"/>
               </a:rPr>
               <a:t>Proyecto Brazo Robótico Articulado 6-DOF</a:t>
             </a:r>
@@ -14837,7 +14843,7 @@
         <p:spPr>
           <a:xfrm>
             <a:off x="1571625" y="2944117"/>
-            <a:ext cx="9048750" cy="857250"/>
+            <a:ext cx="9048750" cy="559705"/>
           </a:xfrm>
           <a:prstGeom prst="rect">
             <a:avLst/>
@@ -14860,7 +14866,7 @@
                 <a:solidFill>
                   <a:srgbClr val="94A3B8"/>
                 </a:solidFill>
-                <a:latin typeface="Inter"/>
+                <a:latin typeface="Segoe UI" panose="020B0502040204020203" pitchFamily="34" charset="0"/>
               </a:rPr>
               <a:t>Integración mecatrónica completa: transición a bandas síncronas, cálculos dinámicos con FS=3, seguridad por software y aprovechamiento total del inventario.</a:t>
             </a:r>
@@ -14875,8 +14881,8 @@
         </p:nvSpPr>
         <p:spPr>
           <a:xfrm>
-            <a:off x="4530328" y="5163442"/>
-            <a:ext cx="3131343" cy="190500"/>
+            <a:off x="4953828" y="5163442"/>
+            <a:ext cx="2284343" cy="184666"/>
           </a:xfrm>
           <a:prstGeom prst="rect">
             <a:avLst/>
@@ -14895,7 +14901,7 @@
                 <a:solidFill>
                   <a:srgbClr val="CBD5E1"/>
                 </a:solidFill>
-                <a:latin typeface="Inter"/>
+                <a:latin typeface="Segoe UI" panose="020B0502040204020203" pitchFamily="34" charset="0"/>
               </a:rPr>
               <a:t>Sesión de Preguntas y Respuestas</a:t>
             </a:r>
@@ -14910,8 +14916,8 @@
         </p:nvSpPr>
         <p:spPr>
           <a:xfrm>
-            <a:off x="2992040" y="4382392"/>
-            <a:ext cx="1512093" cy="276225"/>
+            <a:off x="3417066" y="4382392"/>
+            <a:ext cx="662040" cy="276999"/>
           </a:xfrm>
           <a:prstGeom prst="rect">
             <a:avLst/>
@@ -14930,7 +14936,7 @@
                 <a:solidFill>
                   <a:srgbClr val="38BDF8"/>
                 </a:solidFill>
-                <a:latin typeface="Inter"/>
+                <a:latin typeface="Segoe UI" panose="020B0502040204020203" pitchFamily="34" charset="0"/>
               </a:rPr>
               <a:t>6 DOF</a:t>
             </a:r>
@@ -14945,8 +14951,8 @@
         </p:nvSpPr>
         <p:spPr>
           <a:xfrm>
-            <a:off x="2992040" y="4658617"/>
-            <a:ext cx="1512093" cy="161925"/>
+            <a:off x="3183028" y="4658617"/>
+            <a:ext cx="1130117" cy="161583"/>
           </a:xfrm>
           <a:prstGeom prst="rect">
             <a:avLst/>
@@ -14965,7 +14971,7 @@
                 <a:solidFill>
                   <a:srgbClr val="64748B"/>
                 </a:solidFill>
-                <a:latin typeface="Inter"/>
+                <a:latin typeface="Segoe UI" panose="020B0502040204020203" pitchFamily="34" charset="0"/>
               </a:rPr>
               <a:t>Grados de Libertad</a:t>
             </a:r>
@@ -14980,8 +14986,8 @@
         </p:nvSpPr>
         <p:spPr>
           <a:xfrm>
-            <a:off x="4535090" y="4382392"/>
-            <a:ext cx="1607343" cy="276225"/>
+            <a:off x="5002451" y="4382392"/>
+            <a:ext cx="672620" cy="276999"/>
           </a:xfrm>
           <a:prstGeom prst="rect">
             <a:avLst/>
@@ -15000,7 +15006,7 @@
                 <a:solidFill>
                   <a:srgbClr val="38BDF8"/>
                 </a:solidFill>
-                <a:latin typeface="Inter"/>
+                <a:latin typeface="Segoe UI" panose="020B0502040204020203" pitchFamily="34" charset="0"/>
               </a:rPr>
               <a:t>FS = 3</a:t>
             </a:r>
@@ -15015,8 +15021,8 @@
         </p:nvSpPr>
         <p:spPr>
           <a:xfrm>
-            <a:off x="4535090" y="4658617"/>
-            <a:ext cx="1607343" cy="161925"/>
+            <a:off x="4742444" y="4658617"/>
+            <a:ext cx="1192634" cy="161583"/>
           </a:xfrm>
           <a:prstGeom prst="rect">
             <a:avLst/>
@@ -15035,7 +15041,7 @@
                 <a:solidFill>
                   <a:srgbClr val="64748B"/>
                 </a:solidFill>
-                <a:latin typeface="Inter"/>
+                <a:latin typeface="Segoe UI" panose="020B0502040204020203" pitchFamily="34" charset="0"/>
               </a:rPr>
               <a:t>Factor de Seguridad</a:t>
             </a:r>
@@ -15050,8 +15056,8 @@
         </p:nvSpPr>
         <p:spPr>
           <a:xfrm>
-            <a:off x="6154340" y="4382392"/>
-            <a:ext cx="1702593" cy="276225"/>
+            <a:off x="6705875" y="4382392"/>
+            <a:ext cx="599523" cy="276999"/>
           </a:xfrm>
           <a:prstGeom prst="rect">
             <a:avLst/>
@@ -15070,7 +15076,7 @@
                 <a:solidFill>
                   <a:srgbClr val="38BDF8"/>
                 </a:solidFill>
-                <a:latin typeface="Inter"/>
+                <a:latin typeface="Segoe UI" panose="020B0502040204020203" pitchFamily="34" charset="0"/>
               </a:rPr>
               <a:t>100%</a:t>
             </a:r>
@@ -15085,8 +15091,8 @@
         </p:nvSpPr>
         <p:spPr>
           <a:xfrm>
-            <a:off x="6154340" y="4658617"/>
-            <a:ext cx="1702593" cy="161925"/>
+            <a:off x="6349206" y="4658617"/>
+            <a:ext cx="1312860" cy="161583"/>
           </a:xfrm>
           <a:prstGeom prst="rect">
             <a:avLst/>
@@ -15105,7 +15111,7 @@
                 <a:solidFill>
                   <a:srgbClr val="64748B"/>
                 </a:solidFill>
-                <a:latin typeface="Inter"/>
+                <a:latin typeface="Segoe UI" panose="020B0502040204020203" pitchFamily="34" charset="0"/>
               </a:rPr>
               <a:t>Motores en Inventario</a:t>
             </a:r>
@@ -15120,8 +15126,8 @@
         </p:nvSpPr>
         <p:spPr>
           <a:xfrm>
-            <a:off x="7886700" y="4382392"/>
-            <a:ext cx="1304925" cy="276225"/>
+            <a:off x="8052619" y="4382392"/>
+            <a:ext cx="973087" cy="276999"/>
           </a:xfrm>
           <a:prstGeom prst="rect">
             <a:avLst/>
@@ -15140,7 +15146,7 @@
                 <a:solidFill>
                   <a:srgbClr val="38BDF8"/>
                 </a:solidFill>
-                <a:latin typeface="Inter"/>
+                <a:latin typeface="Segoe UI" panose="020B0502040204020203" pitchFamily="34" charset="0"/>
               </a:rPr>
               <a:t>Software</a:t>
             </a:r>
@@ -15155,8 +15161,8 @@
         </p:nvSpPr>
         <p:spPr>
           <a:xfrm>
-            <a:off x="7886700" y="4658617"/>
-            <a:ext cx="1304925" cy="161925"/>
+            <a:off x="8055857" y="4658617"/>
+            <a:ext cx="966610" cy="161583"/>
           </a:xfrm>
           <a:prstGeom prst="rect">
             <a:avLst/>
@@ -15175,7 +15181,7 @@
                 <a:solidFill>
                   <a:srgbClr val="64748B"/>
                 </a:solidFill>
-                <a:latin typeface="Inter"/>
+                <a:latin typeface="Segoe UI" panose="020B0502040204020203" pitchFamily="34" charset="0"/>
               </a:rPr>
               <a:t>Límites Virtuales</a:t>
             </a:r>
@@ -15405,7 +15411,7 @@
         <p:spPr>
           <a:xfrm>
             <a:off x="571500" y="571500"/>
-            <a:ext cx="2175271" cy="276225"/>
+            <a:ext cx="1578061" cy="276999"/>
           </a:xfrm>
           <a:prstGeom prst="rect">
             <a:avLst/>
@@ -15424,7 +15430,7 @@
                 <a:solidFill>
                   <a:srgbClr val="000000"/>
                 </a:solidFill>
-                <a:latin typeface="Inter"/>
+                <a:latin typeface="Segoe UI" panose="020B0502040204020203" pitchFamily="34" charset="0"/>
               </a:rPr>
               <a:t>Image Sources</a:t>
             </a:r>
@@ -15440,7 +15446,7 @@
         <p:spPr>
           <a:xfrm>
             <a:off x="1666875" y="1033462"/>
-            <a:ext cx="7560468" cy="152400"/>
+            <a:ext cx="5656998" cy="150041"/>
           </a:xfrm>
           <a:prstGeom prst="rect">
             <a:avLst/>
@@ -15459,7 +15465,7 @@
                 <a:solidFill>
                   <a:srgbClr val="000000"/>
                 </a:solidFill>
-                <a:latin typeface="Inter"/>
+                <a:latin typeface="Segoe UI" panose="020B0502040204020203" pitchFamily="34" charset="0"/>
               </a:rPr>
               <a:t>https://d2t1xqejof9utc.cloudfront.net/screenshots/pics/2c4000bd30abd1d5cc2cf179f11e90cb/large.jpg</a:t>
             </a:r>
@@ -15475,7 +15481,7 @@
         <p:spPr>
           <a:xfrm>
             <a:off x="1666875" y="1233487"/>
-            <a:ext cx="2416968" cy="190500"/>
+            <a:ext cx="1756443" cy="184666"/>
           </a:xfrm>
           <a:prstGeom prst="rect">
             <a:avLst/>
@@ -15494,7 +15500,7 @@
                 <a:solidFill>
                   <a:srgbClr val="000000"/>
                 </a:solidFill>
-                <a:latin typeface="Inter"/>
+                <a:latin typeface="Segoe UI" panose="020B0502040204020203" pitchFamily="34" charset="0"/>
               </a:rPr>
               <a:t>Source: </a:t>
             </a:r>
@@ -15503,7 +15509,7 @@
                 <a:solidFill>
                   <a:srgbClr val="4F46E5"/>
                 </a:solidFill>
-                <a:latin typeface="Inter"/>
+                <a:latin typeface="Segoe UI" panose="020B0502040204020203" pitchFamily="34" charset="0"/>
               </a:rPr>
               <a:t>blog.grabcad.com</a:t>
             </a:r>
@@ -15519,7 +15525,7 @@
         <p:spPr>
           <a:xfrm>
             <a:off x="1666875" y="1804987"/>
-            <a:ext cx="8227218" cy="152400"/>
+            <a:ext cx="6197209" cy="150041"/>
           </a:xfrm>
           <a:prstGeom prst="rect">
             <a:avLst/>
@@ -15538,7 +15544,7 @@
                 <a:solidFill>
                   <a:srgbClr val="000000"/>
                 </a:solidFill>
-                <a:latin typeface="Inter"/>
+                <a:latin typeface="Segoe UI" panose="020B0502040204020203" pitchFamily="34" charset="0"/>
               </a:rPr>
               <a:t>https://vxb.com/cdn/shop/files/nema23-stepper-motor-planetary-gearbox-front.jpg?v=1770448649&amp;width=480</a:t>
             </a:r>
@@ -15554,7 +15560,7 @@
         <p:spPr>
           <a:xfrm>
             <a:off x="1666875" y="2005012"/>
-            <a:ext cx="1535906" cy="190500"/>
+            <a:ext cx="1096006" cy="184666"/>
           </a:xfrm>
           <a:prstGeom prst="rect">
             <a:avLst/>
@@ -15573,7 +15579,7 @@
                 <a:solidFill>
                   <a:srgbClr val="000000"/>
                 </a:solidFill>
-                <a:latin typeface="Inter"/>
+                <a:latin typeface="Segoe UI" panose="020B0502040204020203" pitchFamily="34" charset="0"/>
               </a:rPr>
               <a:t>Source: </a:t>
             </a:r>
@@ -15582,7 +15588,7 @@
                 <a:solidFill>
                   <a:srgbClr val="4F46E5"/>
                 </a:solidFill>
-                <a:latin typeface="Inter"/>
+                <a:latin typeface="Segoe UI" panose="020B0502040204020203" pitchFamily="34" charset="0"/>
               </a:rPr>
               <a:t>vxb.com</a:t>
             </a:r>
@@ -15777,7 +15783,7 @@
         <p:spPr>
           <a:xfrm>
             <a:off x="762000" y="6162675"/>
-            <a:ext cx="11430000" cy="161925"/>
+            <a:ext cx="2369238" cy="161583"/>
           </a:xfrm>
           <a:prstGeom prst="rect">
             <a:avLst/>
@@ -15796,7 +15802,7 @@
                 <a:solidFill>
                   <a:srgbClr val="0F172A"/>
                 </a:solidFill>
-                <a:latin typeface="Inter"/>
+                <a:latin typeface="Segoe UI" panose="020B0502040204020203" pitchFamily="34" charset="0"/>
               </a:rPr>
               <a:t>Metodología de Desarrollo Mecatrónico</a:t>
             </a:r>
@@ -15812,7 +15818,7 @@
         <p:spPr>
           <a:xfrm>
             <a:off x="762000" y="533400"/>
-            <a:ext cx="11430000" cy="161925"/>
+            <a:ext cx="2776401" cy="161583"/>
           </a:xfrm>
           <a:prstGeom prst="rect">
             <a:avLst/>
@@ -15831,7 +15837,7 @@
                 <a:solidFill>
                   <a:srgbClr val="0284C7"/>
                 </a:solidFill>
-                <a:latin typeface="Inter"/>
+                <a:latin typeface="Segoe UI" panose="020B0502040204020203" pitchFamily="34" charset="0"/>
               </a:rPr>
               <a:t>DEFINICIÓN DEL PROYECTO · PUNTOS 2 Y 3</a:t>
             </a:r>
@@ -15847,7 +15853,7 @@
         <p:spPr>
           <a:xfrm>
             <a:off x="762000" y="771525"/>
-            <a:ext cx="11430000" cy="438150"/>
+            <a:ext cx="5075492" cy="415498"/>
           </a:xfrm>
           <a:prstGeom prst="rect">
             <a:avLst/>
@@ -15866,7 +15872,7 @@
                 <a:solidFill>
                   <a:srgbClr val="0F172A"/>
                 </a:solidFill>
-                <a:latin typeface="Space Grotesk"/>
+                <a:latin typeface="Trebuchet MS" panose="020B0603020202020204" pitchFamily="34" charset="0"/>
               </a:rPr>
               <a:t>Objetivos General y Específicos</a:t>
             </a:r>
@@ -15882,7 +15888,7 @@
         <p:spPr>
           <a:xfrm>
             <a:off x="1076325" y="3308895"/>
-            <a:ext cx="4115246" cy="1173509"/>
+            <a:ext cx="4115246" cy="902619"/>
           </a:xfrm>
           <a:prstGeom prst="rect">
             <a:avLst/>
@@ -15905,7 +15911,7 @@
                 <a:solidFill>
                   <a:srgbClr val="1E293B"/>
                 </a:solidFill>
-                <a:latin typeface="Inter"/>
+                <a:latin typeface="Segoe UI" panose="020B0502040204020203" pitchFamily="34" charset="0"/>
               </a:rPr>
               <a:t>Desarrollar e implementar un brazo robótico articulado de 6-DOF con transmisión remota por poleas síncronas, garantizando manipulación estable con FS=3 aprovechando motores e inventario existente.</a:t>
             </a:r>
@@ -15921,7 +15927,7 @@
         <p:spPr>
           <a:xfrm>
             <a:off x="1419225" y="2889795"/>
-            <a:ext cx="2225278" cy="266700"/>
+            <a:ext cx="1682961" cy="253916"/>
           </a:xfrm>
           <a:prstGeom prst="rect">
             <a:avLst/>
@@ -15940,7 +15946,7 @@
                 <a:solidFill>
                   <a:srgbClr val="166534"/>
                 </a:solidFill>
-                <a:latin typeface="Space Grotesk"/>
+                <a:latin typeface="Trebuchet MS" panose="020B0603020202020204" pitchFamily="34" charset="0"/>
               </a:rPr>
               <a:t>Objetivo General</a:t>
             </a:r>
@@ -15956,7 +15962,7 @@
         <p:spPr>
           <a:xfrm>
             <a:off x="6410771" y="2571750"/>
-            <a:ext cx="2875359" cy="266700"/>
+            <a:ext cx="2095125" cy="253916"/>
           </a:xfrm>
           <a:prstGeom prst="rect">
             <a:avLst/>
@@ -15975,7 +15981,7 @@
                 <a:solidFill>
                   <a:srgbClr val="0F172A"/>
                 </a:solidFill>
-                <a:latin typeface="Space Grotesk"/>
+                <a:latin typeface="Trebuchet MS" panose="020B0603020202020204" pitchFamily="34" charset="0"/>
               </a:rPr>
               <a:t>Objetivos Específicos</a:t>
             </a:r>
@@ -15991,7 +15997,7 @@
         <p:spPr>
           <a:xfrm>
             <a:off x="6067871" y="2971800"/>
-            <a:ext cx="5143053" cy="385762"/>
+            <a:ext cx="5143053" cy="369332"/>
           </a:xfrm>
           <a:prstGeom prst="rect">
             <a:avLst/>
@@ -16014,7 +16020,7 @@
                 <a:solidFill>
                   <a:srgbClr val="334155"/>
                 </a:solidFill>
-                <a:latin typeface="Inter"/>
+                <a:latin typeface="Segoe UI" panose="020B0502040204020203" pitchFamily="34" charset="0"/>
               </a:rPr>
               <a:t>Cinemática y Torques:</a:t>
             </a:r>
@@ -16023,7 +16029,7 @@
                 <a:solidFill>
                   <a:srgbClr val="334155"/>
                 </a:solidFill>
-                <a:latin typeface="Inter"/>
+                <a:latin typeface="Segoe UI" panose="020B0502040204020203" pitchFamily="34" charset="0"/>
               </a:rPr>
               <a:t> Dimensionar articulaciones considerando peso propio y FS=3.</a:t>
             </a:r>
@@ -16039,7 +16045,7 @@
         <p:spPr>
           <a:xfrm>
             <a:off x="6067871" y="3452812"/>
-            <a:ext cx="5143053" cy="385762"/>
+            <a:ext cx="5143053" cy="369332"/>
           </a:xfrm>
           <a:prstGeom prst="rect">
             <a:avLst/>
@@ -16062,7 +16068,7 @@
                 <a:solidFill>
                   <a:srgbClr val="334155"/>
                 </a:solidFill>
-                <a:latin typeface="Inter"/>
+                <a:latin typeface="Segoe UI" panose="020B0502040204020203" pitchFamily="34" charset="0"/>
               </a:rPr>
               <a:t>Transmisión por Poleas:</a:t>
             </a:r>
@@ -16071,7 +16077,7 @@
                 <a:solidFill>
                   <a:srgbClr val="334155"/>
                 </a:solidFill>
-                <a:latin typeface="Inter"/>
+                <a:latin typeface="Segoe UI" panose="020B0502040204020203" pitchFamily="34" charset="0"/>
               </a:rPr>
               <a:t> Reubicar actuadores pesados a la base para minimizar inercia.</a:t>
             </a:r>
@@ -16110,7 +16116,7 @@
                 <a:solidFill>
                   <a:srgbClr val="334155"/>
                 </a:solidFill>
-                <a:latin typeface="Inter"/>
+                <a:latin typeface="Segoe UI" panose="020B0502040204020203" pitchFamily="34" charset="0"/>
               </a:rPr>
               <a:t>Selección</a:t>
             </a:r>
@@ -16119,7 +16125,7 @@
                 <a:solidFill>
                   <a:srgbClr val="334155"/>
                 </a:solidFill>
-                <a:latin typeface="Inter"/>
+                <a:latin typeface="Segoe UI" panose="020B0502040204020203" pitchFamily="34" charset="0"/>
               </a:rPr>
               <a:t> de </a:t>
             </a:r>
@@ -16128,7 +16134,7 @@
                 <a:solidFill>
                   <a:srgbClr val="334155"/>
                 </a:solidFill>
-                <a:latin typeface="Inter"/>
+                <a:latin typeface="Segoe UI" panose="020B0502040204020203" pitchFamily="34" charset="0"/>
               </a:rPr>
               <a:t>Materiales</a:t>
             </a:r>
@@ -16137,7 +16143,7 @@
                 <a:solidFill>
                   <a:srgbClr val="334155"/>
                 </a:solidFill>
-                <a:latin typeface="Inter"/>
+                <a:latin typeface="Segoe UI" panose="020B0502040204020203" pitchFamily="34" charset="0"/>
               </a:rPr>
               <a:t>:</a:t>
             </a:r>
@@ -16146,7 +16152,7 @@
                 <a:solidFill>
                   <a:srgbClr val="334155"/>
                 </a:solidFill>
-                <a:latin typeface="Inter"/>
+                <a:latin typeface="Segoe UI" panose="020B0502040204020203" pitchFamily="34" charset="0"/>
               </a:rPr>
               <a:t> </a:t>
             </a:r>
@@ -16155,7 +16161,7 @@
                 <a:solidFill>
                   <a:srgbClr val="334155"/>
                 </a:solidFill>
-                <a:latin typeface="Inter"/>
+                <a:latin typeface="Segoe UI" panose="020B0502040204020203" pitchFamily="34" charset="0"/>
               </a:rPr>
               <a:t>Comparar</a:t>
             </a:r>
@@ -16164,7 +16170,7 @@
                 <a:solidFill>
                   <a:srgbClr val="334155"/>
                 </a:solidFill>
-                <a:latin typeface="Inter"/>
+                <a:latin typeface="Segoe UI" panose="020B0502040204020203" pitchFamily="34" charset="0"/>
               </a:rPr>
               <a:t> PETG vs Nylon </a:t>
             </a:r>
@@ -16173,7 +16179,7 @@
                 <a:solidFill>
                   <a:srgbClr val="334155"/>
                 </a:solidFill>
-                <a:latin typeface="Inter"/>
+                <a:latin typeface="Segoe UI" panose="020B0502040204020203" pitchFamily="34" charset="0"/>
               </a:rPr>
               <a:t>y</a:t>
             </a:r>
@@ -16182,7 +16188,7 @@
                 <a:solidFill>
                   <a:srgbClr val="334155"/>
                 </a:solidFill>
-                <a:latin typeface="Inter"/>
+                <a:latin typeface="Segoe UI" panose="020B0502040204020203" pitchFamily="34" charset="0"/>
               </a:rPr>
               <a:t> </a:t>
             </a:r>
@@ -16191,7 +16197,7 @@
                 <a:solidFill>
                   <a:srgbClr val="334155"/>
                 </a:solidFill>
-                <a:latin typeface="Inter"/>
+                <a:latin typeface="Segoe UI" panose="020B0502040204020203" pitchFamily="34" charset="0"/>
               </a:rPr>
               <a:t>opcionalmente</a:t>
             </a:r>
@@ -16200,7 +16206,7 @@
                 <a:solidFill>
                   <a:srgbClr val="334155"/>
                 </a:solidFill>
-                <a:latin typeface="Inter"/>
+                <a:latin typeface="Segoe UI" panose="020B0502040204020203" pitchFamily="34" charset="0"/>
               </a:rPr>
               <a:t> </a:t>
             </a:r>
@@ -16209,7 +16215,7 @@
                 <a:solidFill>
                   <a:srgbClr val="334155"/>
                 </a:solidFill>
-                <a:latin typeface="Inter"/>
+                <a:latin typeface="Segoe UI" panose="020B0502040204020203" pitchFamily="34" charset="0"/>
               </a:rPr>
               <a:t>refuerzos</a:t>
             </a:r>
@@ -16218,7 +16224,7 @@
                 <a:solidFill>
                   <a:srgbClr val="334155"/>
                 </a:solidFill>
-                <a:latin typeface="Inter"/>
+                <a:latin typeface="Segoe UI" panose="020B0502040204020203" pitchFamily="34" charset="0"/>
               </a:rPr>
               <a:t> de </a:t>
             </a:r>
@@ -16227,7 +16233,7 @@
                 <a:solidFill>
                   <a:srgbClr val="334155"/>
                 </a:solidFill>
-                <a:latin typeface="Inter"/>
+                <a:latin typeface="Segoe UI" panose="020B0502040204020203" pitchFamily="34" charset="0"/>
               </a:rPr>
               <a:t>aluminio</a:t>
             </a:r>
@@ -16236,7 +16242,7 @@
                 <a:solidFill>
                   <a:srgbClr val="334155"/>
                 </a:solidFill>
-                <a:latin typeface="Inter"/>
+                <a:latin typeface="Segoe UI" panose="020B0502040204020203" pitchFamily="34" charset="0"/>
               </a:rPr>
               <a:t>.</a:t>
             </a:r>
@@ -16252,7 +16258,7 @@
         <p:spPr>
           <a:xfrm>
             <a:off x="6067871" y="4414837"/>
-            <a:ext cx="5143053" cy="385762"/>
+            <a:ext cx="5143053" cy="369332"/>
           </a:xfrm>
           <a:prstGeom prst="rect">
             <a:avLst/>
@@ -16275,7 +16281,7 @@
                 <a:solidFill>
                   <a:srgbClr val="334155"/>
                 </a:solidFill>
-                <a:latin typeface="Inter"/>
+                <a:latin typeface="Segoe UI" panose="020B0502040204020203" pitchFamily="34" charset="0"/>
               </a:rPr>
               <a:t>Seguridad por Software:</a:t>
             </a:r>
@@ -16284,7 +16290,7 @@
                 <a:solidFill>
                   <a:srgbClr val="334155"/>
                 </a:solidFill>
-                <a:latin typeface="Inter"/>
+                <a:latin typeface="Segoe UI" panose="020B0502040204020203" pitchFamily="34" charset="0"/>
               </a:rPr>
               <a:t> Programar límites de carrera digitales y parada de emergencia.</a:t>
             </a:r>
@@ -16565,7 +16571,7 @@
         <p:spPr>
           <a:xfrm>
             <a:off x="762000" y="6162675"/>
-            <a:ext cx="11430000" cy="161925"/>
+            <a:ext cx="2816477" cy="161583"/>
           </a:xfrm>
           <a:prstGeom prst="rect">
             <a:avLst/>
@@ -16584,7 +16590,7 @@
                 <a:solidFill>
                   <a:srgbClr val="0F172A"/>
                 </a:solidFill>
-                <a:latin typeface="Inter"/>
+                <a:latin typeface="Segoe UI" panose="020B0502040204020203" pitchFamily="34" charset="0"/>
               </a:rPr>
               <a:t>Contexto de Interacción Operativa y Académica</a:t>
             </a:r>
@@ -16600,7 +16606,7 @@
         <p:spPr>
           <a:xfrm>
             <a:off x="762000" y="533400"/>
-            <a:ext cx="11430000" cy="161925"/>
+            <a:ext cx="2468625" cy="161583"/>
           </a:xfrm>
           <a:prstGeom prst="rect">
             <a:avLst/>
@@ -16619,7 +16625,7 @@
                 <a:solidFill>
                   <a:srgbClr val="0284C7"/>
                 </a:solidFill>
-                <a:latin typeface="Inter"/>
+                <a:latin typeface="Segoe UI" panose="020B0502040204020203" pitchFamily="34" charset="0"/>
               </a:rPr>
               <a:t>DEFINICIÓN DEL PROYECTO · PUNTO 4</a:t>
             </a:r>
@@ -16635,7 +16641,7 @@
         <p:spPr>
           <a:xfrm>
             <a:off x="762000" y="771525"/>
-            <a:ext cx="11430000" cy="438150"/>
+            <a:ext cx="4924553" cy="415498"/>
           </a:xfrm>
           <a:prstGeom prst="rect">
             <a:avLst/>
@@ -16654,7 +16660,7 @@
                 <a:solidFill>
                   <a:srgbClr val="0F172A"/>
                 </a:solidFill>
-                <a:latin typeface="Space Grotesk"/>
+                <a:latin typeface="Trebuchet MS" panose="020B0603020202020204" pitchFamily="34" charset="0"/>
               </a:rPr>
               <a:t>Usuarios y Actores del Sistema</a:t>
             </a:r>
@@ -16670,7 +16676,7 @@
         <p:spPr>
           <a:xfrm>
             <a:off x="2508250" y="3409950"/>
-            <a:ext cx="664284" cy="230832"/>
+            <a:ext cx="751039" cy="230832"/>
           </a:xfrm>
           <a:prstGeom prst="rect">
             <a:avLst/>
@@ -16689,7 +16695,7 @@
                 <a:solidFill>
                   <a:srgbClr val="0F172A"/>
                 </a:solidFill>
-                <a:latin typeface="Inter"/>
+                <a:latin typeface="Segoe UI" panose="020B0502040204020203" pitchFamily="34" charset="0"/>
               </a:rPr>
               <a:t>Docente</a:t>
             </a:r>
@@ -16697,7 +16703,7 @@
               <a:solidFill>
                 <a:srgbClr val="0F172A"/>
               </a:solidFill>
-              <a:latin typeface="Inter"/>
+              <a:latin typeface="Segoe UI" panose="020B0502040204020203" pitchFamily="34" charset="0"/>
             </a:endParaRPr>
           </a:p>
         </p:txBody>
@@ -16711,7 +16717,7 @@
         <p:spPr>
           <a:xfrm>
             <a:off x="2508250" y="3752850"/>
-            <a:ext cx="3682937" cy="180975"/>
+            <a:ext cx="2122376" cy="173124"/>
           </a:xfrm>
           <a:prstGeom prst="rect">
             <a:avLst/>
@@ -16730,7 +16736,7 @@
                 <a:solidFill>
                   <a:srgbClr val="475569"/>
                 </a:solidFill>
-                <a:latin typeface="Inter"/>
+                <a:latin typeface="Segoe UI" panose="020B0502040204020203" pitchFamily="34" charset="0"/>
               </a:rPr>
               <a:t>Valida el cumplimiento funcional.</a:t>
             </a:r>
@@ -16746,7 +16752,7 @@
         <p:spPr>
           <a:xfrm>
             <a:off x="6140400" y="3409950"/>
-            <a:ext cx="844847" cy="230832"/>
+            <a:ext cx="953018" cy="230832"/>
           </a:xfrm>
           <a:prstGeom prst="rect">
             <a:avLst/>
@@ -16765,7 +16771,7 @@
                 <a:solidFill>
                   <a:srgbClr val="0F172A"/>
                 </a:solidFill>
-                <a:latin typeface="Inter"/>
+                <a:latin typeface="Segoe UI" panose="020B0502040204020203" pitchFamily="34" charset="0"/>
               </a:rPr>
               <a:t>Estudiante</a:t>
             </a:r>
@@ -16773,7 +16779,7 @@
               <a:solidFill>
                 <a:srgbClr val="0F172A"/>
               </a:solidFill>
-              <a:latin typeface="Inter"/>
+              <a:latin typeface="Segoe UI" panose="020B0502040204020203" pitchFamily="34" charset="0"/>
             </a:endParaRPr>
           </a:p>
         </p:txBody>
@@ -16787,7 +16793,7 @@
         <p:spPr>
           <a:xfrm>
             <a:off x="6140400" y="3752850"/>
-            <a:ext cx="1287212" cy="173124"/>
+            <a:ext cx="1391407" cy="173124"/>
           </a:xfrm>
           <a:prstGeom prst="rect">
             <a:avLst/>
@@ -16806,7 +16812,7 @@
                 <a:solidFill>
                   <a:srgbClr val="475569"/>
                 </a:solidFill>
-                <a:latin typeface="Inter"/>
+                <a:latin typeface="Segoe UI" panose="020B0502040204020203" pitchFamily="34" charset="0"/>
               </a:rPr>
               <a:t>Desarrolla</a:t>
             </a:r>
@@ -16815,7 +16821,7 @@
                 <a:solidFill>
                   <a:srgbClr val="475569"/>
                 </a:solidFill>
-                <a:latin typeface="Inter"/>
+                <a:latin typeface="Segoe UI" panose="020B0502040204020203" pitchFamily="34" charset="0"/>
               </a:rPr>
               <a:t> </a:t>
             </a:r>
@@ -16824,7 +16830,7 @@
                 <a:solidFill>
                   <a:srgbClr val="475569"/>
                 </a:solidFill>
-                <a:latin typeface="Inter"/>
+                <a:latin typeface="Segoe UI" panose="020B0502040204020203" pitchFamily="34" charset="0"/>
               </a:rPr>
               <a:t>el</a:t>
             </a:r>
@@ -16833,7 +16839,7 @@
                 <a:solidFill>
                   <a:srgbClr val="475569"/>
                 </a:solidFill>
-                <a:latin typeface="Inter"/>
+                <a:latin typeface="Segoe UI" panose="020B0502040204020203" pitchFamily="34" charset="0"/>
               </a:rPr>
               <a:t> Proyecto</a:t>
             </a:r>
@@ -16841,7 +16847,7 @@
               <a:solidFill>
                 <a:srgbClr val="475569"/>
               </a:solidFill>
-              <a:latin typeface="Inter"/>
+              <a:latin typeface="Segoe UI" panose="020B0502040204020203" pitchFamily="34" charset="0"/>
             </a:endParaRPr>
           </a:p>
         </p:txBody>
@@ -17081,7 +17087,7 @@
         <p:spPr>
           <a:xfrm>
             <a:off x="762000" y="6162675"/>
-            <a:ext cx="11430000" cy="161925"/>
+            <a:ext cx="1695977" cy="161583"/>
           </a:xfrm>
           <a:prstGeom prst="rect">
             <a:avLst/>
@@ -17100,7 +17106,7 @@
                 <a:solidFill>
                   <a:srgbClr val="0F172A"/>
                 </a:solidFill>
-                <a:latin typeface="Inter"/>
+                <a:latin typeface="Segoe UI" panose="020B0502040204020203" pitchFamily="34" charset="0"/>
               </a:rPr>
               <a:t>Matriz Funcional y Operativa</a:t>
             </a:r>
@@ -17116,7 +17122,7 @@
         <p:spPr>
           <a:xfrm>
             <a:off x="762000" y="533400"/>
-            <a:ext cx="11430000" cy="161925"/>
+            <a:ext cx="2736327" cy="161583"/>
           </a:xfrm>
           <a:prstGeom prst="rect">
             <a:avLst/>
@@ -17135,7 +17141,7 @@
                 <a:solidFill>
                   <a:srgbClr val="0284C7"/>
                 </a:solidFill>
-                <a:latin typeface="Inter"/>
+                <a:latin typeface="Segoe UI" panose="020B0502040204020203" pitchFamily="34" charset="0"/>
               </a:rPr>
               <a:t>REQUISITOS FUNCIONALES · PUNTOS 5 Y 6</a:t>
             </a:r>
@@ -17151,7 +17157,7 @@
         <p:spPr>
           <a:xfrm>
             <a:off x="762000" y="771525"/>
-            <a:ext cx="11430000" cy="438150"/>
+            <a:ext cx="5829929" cy="415498"/>
           </a:xfrm>
           <a:prstGeom prst="rect">
             <a:avLst/>
@@ -17170,7 +17176,7 @@
                 <a:solidFill>
                   <a:srgbClr val="0F172A"/>
                 </a:solidFill>
-                <a:latin typeface="Space Grotesk"/>
+                <a:latin typeface="Trebuchet MS" panose="020B0603020202020204" pitchFamily="34" charset="0"/>
               </a:rPr>
               <a:t>Funciones Principales y Secundarias</a:t>
             </a:r>
@@ -17186,7 +17192,7 @@
         <p:spPr>
           <a:xfrm>
             <a:off x="1076325" y="3073896"/>
-            <a:ext cx="4629150" cy="938807"/>
+            <a:ext cx="4629150" cy="902619"/>
           </a:xfrm>
           <a:prstGeom prst="rect">
             <a:avLst/>
@@ -17209,7 +17215,7 @@
                 <a:solidFill>
                   <a:srgbClr val="1E293B"/>
                 </a:solidFill>
-                <a:latin typeface="Inter"/>
+                <a:latin typeface="Segoe UI" panose="020B0502040204020203" pitchFamily="34" charset="0"/>
               </a:rPr>
               <a:t>Manipulación espacial de 6 grados de libertad para tareas de Pick and Place, posicionando cargas útiles de 1.5 kg con capacidad estructural ampliada hacia 5 kg sin salto de pasos ni fatiga.</a:t>
             </a:r>
@@ -17225,7 +17231,7 @@
         <p:spPr>
           <a:xfrm>
             <a:off x="1419225" y="2654796"/>
-            <a:ext cx="2325290" cy="266700"/>
+            <a:ext cx="1714893" cy="253916"/>
           </a:xfrm>
           <a:prstGeom prst="rect">
             <a:avLst/>
@@ -17244,7 +17250,7 @@
                 <a:solidFill>
                   <a:srgbClr val="0F172A"/>
                 </a:solidFill>
-                <a:latin typeface="Space Grotesk"/>
+                <a:latin typeface="Trebuchet MS" panose="020B0603020202020204" pitchFamily="34" charset="0"/>
               </a:rPr>
               <a:t>Función Principal</a:t>
             </a:r>
@@ -17279,7 +17285,7 @@
                 <a:solidFill>
                   <a:srgbClr val="0369A1"/>
                 </a:solidFill>
-                <a:latin typeface="Inter"/>
+                <a:latin typeface="Segoe UI" panose="020B0502040204020203" pitchFamily="34" charset="0"/>
               </a:rPr>
               <a:t>Interpolación angular coordinada y cinemática inversa en tiempo real.</a:t>
             </a:r>
@@ -17295,7 +17301,7 @@
         <p:spPr>
           <a:xfrm>
             <a:off x="6924675" y="2543175"/>
-            <a:ext cx="3137892" cy="266700"/>
+            <a:ext cx="2237472" cy="253916"/>
           </a:xfrm>
           <a:prstGeom prst="rect">
             <a:avLst/>
@@ -17314,7 +17320,7 @@
                 <a:solidFill>
                   <a:srgbClr val="0F172A"/>
                 </a:solidFill>
-                <a:latin typeface="Space Grotesk"/>
+                <a:latin typeface="Trebuchet MS" panose="020B0603020202020204" pitchFamily="34" charset="0"/>
               </a:rPr>
               <a:t>Funciones Secundarias</a:t>
             </a:r>
@@ -17330,7 +17336,7 @@
         <p:spPr>
           <a:xfrm>
             <a:off x="6581775" y="2943225"/>
-            <a:ext cx="4629150" cy="385762"/>
+            <a:ext cx="4629150" cy="369332"/>
           </a:xfrm>
           <a:prstGeom prst="rect">
             <a:avLst/>
@@ -17353,7 +17359,7 @@
                 <a:solidFill>
                   <a:srgbClr val="334155"/>
                 </a:solidFill>
-                <a:latin typeface="Inter"/>
+                <a:latin typeface="Segoe UI" panose="020B0502040204020203" pitchFamily="34" charset="0"/>
               </a:rPr>
               <a:t>Homíng y Calibración:</a:t>
             </a:r>
@@ -17362,7 +17368,7 @@
                 <a:solidFill>
                   <a:srgbClr val="334155"/>
                 </a:solidFill>
-                <a:latin typeface="Inter"/>
+                <a:latin typeface="Segoe UI" panose="020B0502040204020203" pitchFamily="34" charset="0"/>
               </a:rPr>
               <a:t> Secuencia automática para fijar cero de coordenadas.</a:t>
             </a:r>
@@ -17378,7 +17384,7 @@
         <p:spPr>
           <a:xfrm>
             <a:off x="6581775" y="3443287"/>
-            <a:ext cx="4629150" cy="385762"/>
+            <a:ext cx="4629150" cy="369332"/>
           </a:xfrm>
           <a:prstGeom prst="rect">
             <a:avLst/>
@@ -17401,7 +17407,7 @@
                 <a:solidFill>
                   <a:srgbClr val="334155"/>
                 </a:solidFill>
-                <a:latin typeface="Inter"/>
+                <a:latin typeface="Segoe UI" panose="020B0502040204020203" pitchFamily="34" charset="0"/>
               </a:rPr>
               <a:t>Límites Virtuales por Software:</a:t>
             </a:r>
@@ -17410,7 +17416,7 @@
                 <a:solidFill>
                   <a:srgbClr val="334155"/>
                 </a:solidFill>
-                <a:latin typeface="Inter"/>
+                <a:latin typeface="Segoe UI" panose="020B0502040204020203" pitchFamily="34" charset="0"/>
               </a:rPr>
               <a:t> Control estricto de envolvente sin topes físicos.</a:t>
             </a:r>
@@ -17426,7 +17432,7 @@
         <p:spPr>
           <a:xfrm>
             <a:off x="6581775" y="3943350"/>
-            <a:ext cx="4629150" cy="385762"/>
+            <a:ext cx="4629150" cy="181203"/>
           </a:xfrm>
           <a:prstGeom prst="rect">
             <a:avLst/>
@@ -17449,7 +17455,7 @@
                 <a:solidFill>
                   <a:srgbClr val="334155"/>
                 </a:solidFill>
-                <a:latin typeface="Inter"/>
+                <a:latin typeface="Segoe UI" panose="020B0502040204020203" pitchFamily="34" charset="0"/>
               </a:rPr>
               <a:t>Parada de Emergencia:</a:t>
             </a:r>
@@ -17458,7 +17464,7 @@
                 <a:solidFill>
                   <a:srgbClr val="334155"/>
                 </a:solidFill>
-                <a:latin typeface="Inter"/>
+                <a:latin typeface="Segoe UI" panose="020B0502040204020203" pitchFamily="34" charset="0"/>
               </a:rPr>
               <a:t> Corte y deshabilitación inmediata por seguridad.</a:t>
             </a:r>
@@ -17474,7 +17480,7 @@
         <p:spPr>
           <a:xfrm>
             <a:off x="6581775" y="4443412"/>
-            <a:ext cx="4629150" cy="385762"/>
+            <a:ext cx="4629150" cy="369332"/>
           </a:xfrm>
           <a:prstGeom prst="rect">
             <a:avLst/>
@@ -17497,7 +17503,7 @@
                 <a:solidFill>
                   <a:srgbClr val="334155"/>
                 </a:solidFill>
-                <a:latin typeface="Inter"/>
+                <a:latin typeface="Segoe UI" panose="020B0502040204020203" pitchFamily="34" charset="0"/>
               </a:rPr>
               <a:t>Protección en Poleas:</a:t>
             </a:r>
@@ -17506,7 +17512,7 @@
                 <a:solidFill>
                   <a:srgbClr val="334155"/>
                 </a:solidFill>
-                <a:latin typeface="Inter"/>
+                <a:latin typeface="Segoe UI" panose="020B0502040204020203" pitchFamily="34" charset="0"/>
               </a:rPr>
               <a:t> Cubiertas cerradas para evitar atrapamiento durante el giro.</a:t>
             </a:r>
@@ -17701,7 +17707,7 @@
         <p:spPr>
           <a:xfrm>
             <a:off x="762000" y="6162675"/>
-            <a:ext cx="11430000" cy="161925"/>
+            <a:ext cx="2784417" cy="161583"/>
           </a:xfrm>
           <a:prstGeom prst="rect">
             <a:avLst/>
@@ -17720,7 +17726,7 @@
                 <a:solidFill>
                   <a:srgbClr val="0F172A"/>
                 </a:solidFill>
-                <a:latin typeface="Inter"/>
+                <a:latin typeface="Segoe UI" panose="020B0502040204020203" pitchFamily="34" charset="0"/>
               </a:rPr>
               <a:t>Balance de Flujos Energéticos y de Información</a:t>
             </a:r>
@@ -17736,7 +17742,7 @@
         <p:spPr>
           <a:xfrm>
             <a:off x="762000" y="533400"/>
-            <a:ext cx="11430000" cy="161925"/>
+            <a:ext cx="2736327" cy="161583"/>
           </a:xfrm>
           <a:prstGeom prst="rect">
             <a:avLst/>
@@ -17755,7 +17761,7 @@
                 <a:solidFill>
                   <a:srgbClr val="0284C7"/>
                 </a:solidFill>
-                <a:latin typeface="Inter"/>
+                <a:latin typeface="Segoe UI" panose="020B0502040204020203" pitchFamily="34" charset="0"/>
               </a:rPr>
               <a:t>REQUISITOS FUNCIONALES · PUNTOS 7 Y 8</a:t>
             </a:r>
@@ -17771,7 +17777,7 @@
         <p:spPr>
           <a:xfrm>
             <a:off x="762000" y="771525"/>
-            <a:ext cx="11430000" cy="438150"/>
+            <a:ext cx="6724983" cy="415498"/>
           </a:xfrm>
           <a:prstGeom prst="rect">
             <a:avLst/>
@@ -17790,7 +17796,7 @@
                 <a:solidFill>
                   <a:srgbClr val="0F172A"/>
                 </a:solidFill>
-                <a:latin typeface="Space Grotesk"/>
+                <a:latin typeface="Trebuchet MS" panose="020B0603020202020204" pitchFamily="34" charset="0"/>
               </a:rPr>
               <a:t>Entradas y Salidas Principales del Sistema</a:t>
             </a:r>
@@ -17805,8 +17811,8 @@
         </p:nvSpPr>
         <p:spPr>
           <a:xfrm>
-            <a:off x="1304925" y="2581275"/>
-            <a:ext cx="5795724" cy="228600"/>
+            <a:off x="1304925" y="2580159"/>
+            <a:ext cx="1816716" cy="230832"/>
           </a:xfrm>
           <a:prstGeom prst="rect">
             <a:avLst/>
@@ -17825,7 +17831,7 @@
                 <a:solidFill>
                   <a:srgbClr val="0284C7"/>
                 </a:solidFill>
-                <a:latin typeface="Inter"/>
+                <a:latin typeface="Segoe UI" panose="020B0502040204020203" pitchFamily="34" charset="0"/>
               </a:rPr>
               <a:t>Entradas Principales</a:t>
             </a:r>
@@ -17841,7 +17847,7 @@
         <p:spPr>
           <a:xfrm>
             <a:off x="1038225" y="2943225"/>
-            <a:ext cx="4724400" cy="361950"/>
+            <a:ext cx="4724400" cy="173124"/>
           </a:xfrm>
           <a:prstGeom prst="rect">
             <a:avLst/>
@@ -17860,7 +17866,7 @@
                 <a:solidFill>
                   <a:srgbClr val="334155"/>
                 </a:solidFill>
-                <a:latin typeface="Inter"/>
+                <a:latin typeface="Segoe UI" panose="020B0502040204020203" pitchFamily="34" charset="0"/>
               </a:rPr>
               <a:t>Energía Eléctrica:</a:t>
             </a:r>
@@ -17869,7 +17875,7 @@
                 <a:solidFill>
                   <a:srgbClr val="334155"/>
                 </a:solidFill>
-                <a:latin typeface="Inter"/>
+                <a:latin typeface="Segoe UI" panose="020B0502040204020203" pitchFamily="34" charset="0"/>
               </a:rPr>
               <a:t> Líneas de 24V y 36V/48V DC para etapa de potencia.</a:t>
             </a:r>
@@ -17885,7 +17891,7 @@
         <p:spPr>
           <a:xfrm>
             <a:off x="1038225" y="3438525"/>
-            <a:ext cx="4724400" cy="361950"/>
+            <a:ext cx="4724400" cy="346249"/>
           </a:xfrm>
           <a:prstGeom prst="rect">
             <a:avLst/>
@@ -17904,7 +17910,7 @@
                 <a:solidFill>
                   <a:srgbClr val="334155"/>
                 </a:solidFill>
-                <a:latin typeface="Inter"/>
+                <a:latin typeface="Segoe UI" panose="020B0502040204020203" pitchFamily="34" charset="0"/>
               </a:rPr>
               <a:t>Consignas de Movimiento:</a:t>
             </a:r>
@@ -17913,7 +17919,7 @@
                 <a:solidFill>
                   <a:srgbClr val="334155"/>
                 </a:solidFill>
-                <a:latin typeface="Inter"/>
+                <a:latin typeface="Segoe UI" panose="020B0502040204020203" pitchFamily="34" charset="0"/>
               </a:rPr>
               <a:t> Pulsos lógicos Step/Dir y comandos de trayectoria.</a:t>
             </a:r>
@@ -17929,7 +17935,7 @@
         <p:spPr>
           <a:xfrm>
             <a:off x="1038225" y="3933825"/>
-            <a:ext cx="4724400" cy="361950"/>
+            <a:ext cx="4724400" cy="346249"/>
           </a:xfrm>
           <a:prstGeom prst="rect">
             <a:avLst/>
@@ -17948,7 +17954,7 @@
                 <a:solidFill>
                   <a:srgbClr val="334155"/>
                 </a:solidFill>
-                <a:latin typeface="Inter"/>
+                <a:latin typeface="Segoe UI" panose="020B0502040204020203" pitchFamily="34" charset="0"/>
               </a:rPr>
               <a:t>Señal de Seguridad:</a:t>
             </a:r>
@@ -17957,7 +17963,7 @@
                 <a:solidFill>
                   <a:srgbClr val="334155"/>
                 </a:solidFill>
-                <a:latin typeface="Inter"/>
+                <a:latin typeface="Segoe UI" panose="020B0502040204020203" pitchFamily="34" charset="0"/>
               </a:rPr>
               <a:t> Interrupción física directa desde seta de paro de emergencia.</a:t>
             </a:r>
@@ -17973,7 +17979,7 @@
         <p:spPr>
           <a:xfrm>
             <a:off x="1038225" y="4429125"/>
-            <a:ext cx="4724400" cy="361950"/>
+            <a:ext cx="4724400" cy="346249"/>
           </a:xfrm>
           <a:prstGeom prst="rect">
             <a:avLst/>
@@ -17992,7 +17998,7 @@
                 <a:solidFill>
                   <a:srgbClr val="334155"/>
                 </a:solidFill>
-                <a:latin typeface="Inter"/>
+                <a:latin typeface="Segoe UI" panose="020B0502040204020203" pitchFamily="34" charset="0"/>
               </a:rPr>
               <a:t>Carga Externa:</a:t>
             </a:r>
@@ -18001,7 +18007,7 @@
                 <a:solidFill>
                   <a:srgbClr val="334155"/>
                 </a:solidFill>
-                <a:latin typeface="Inter"/>
+                <a:latin typeface="Segoe UI" panose="020B0502040204020203" pitchFamily="34" charset="0"/>
               </a:rPr>
               <a:t> Pieza de manipulación con masa admisible de 1.5 kg a 5 kg.</a:t>
             </a:r>
@@ -18016,8 +18022,8 @@
         </p:nvSpPr>
         <p:spPr>
           <a:xfrm>
-            <a:off x="6791325" y="2581275"/>
-            <a:ext cx="5400675" cy="228600"/>
+            <a:off x="6791325" y="2580159"/>
+            <a:ext cx="1661224" cy="230832"/>
           </a:xfrm>
           <a:prstGeom prst="rect">
             <a:avLst/>
@@ -18036,7 +18042,7 @@
                 <a:solidFill>
                   <a:srgbClr val="0F172A"/>
                 </a:solidFill>
-                <a:latin typeface="Inter"/>
+                <a:latin typeface="Segoe UI" panose="020B0502040204020203" pitchFamily="34" charset="0"/>
               </a:rPr>
               <a:t>Salidas Principales</a:t>
             </a:r>
@@ -18052,7 +18058,7 @@
         <p:spPr>
           <a:xfrm>
             <a:off x="6524625" y="2943225"/>
-            <a:ext cx="4724400" cy="361950"/>
+            <a:ext cx="4724400" cy="346249"/>
           </a:xfrm>
           <a:prstGeom prst="rect">
             <a:avLst/>
@@ -18071,7 +18077,7 @@
                 <a:solidFill>
                   <a:srgbClr val="334155"/>
                 </a:solidFill>
-                <a:latin typeface="Inter"/>
+                <a:latin typeface="Segoe UI" panose="020B0502040204020203" pitchFamily="34" charset="0"/>
               </a:rPr>
               <a:t>Movimiento 6-DOF:</a:t>
             </a:r>
@@ -18080,7 +18086,7 @@
                 <a:solidFill>
                   <a:srgbClr val="334155"/>
                 </a:solidFill>
-                <a:latin typeface="Inter"/>
+                <a:latin typeface="Segoe UI" panose="020B0502040204020203" pitchFamily="34" charset="0"/>
               </a:rPr>
               <a:t> Rotación coordinada en las 6 articulaciones del manipulador.</a:t>
             </a:r>
@@ -18096,7 +18102,7 @@
         <p:spPr>
           <a:xfrm>
             <a:off x="6524625" y="3438525"/>
-            <a:ext cx="4724400" cy="361950"/>
+            <a:ext cx="4724400" cy="346249"/>
           </a:xfrm>
           <a:prstGeom prst="rect">
             <a:avLst/>
@@ -18115,7 +18121,7 @@
                 <a:solidFill>
                   <a:srgbClr val="334155"/>
                 </a:solidFill>
-                <a:latin typeface="Inter"/>
+                <a:latin typeface="Segoe UI" panose="020B0502040204020203" pitchFamily="34" charset="0"/>
               </a:rPr>
               <a:t>Par Transmitido:</a:t>
             </a:r>
@@ -18124,7 +18130,7 @@
                 <a:solidFill>
                   <a:srgbClr val="334155"/>
                 </a:solidFill>
-                <a:latin typeface="Inter"/>
+                <a:latin typeface="Segoe UI" panose="020B0502040204020203" pitchFamily="34" charset="0"/>
               </a:rPr>
               <a:t> Torque multiplicado en hombro y codo mediante bandas.</a:t>
             </a:r>
@@ -18140,7 +18146,7 @@
         <p:spPr>
           <a:xfrm>
             <a:off x="6524625" y="3933825"/>
-            <a:ext cx="4724400" cy="361950"/>
+            <a:ext cx="4724400" cy="173124"/>
           </a:xfrm>
           <a:prstGeom prst="rect">
             <a:avLst/>
@@ -18159,7 +18165,7 @@
                 <a:solidFill>
                   <a:srgbClr val="334155"/>
                 </a:solidFill>
-                <a:latin typeface="Inter"/>
+                <a:latin typeface="Segoe UI" panose="020B0502040204020203" pitchFamily="34" charset="0"/>
               </a:rPr>
               <a:t>Telemetría y Estado:</a:t>
             </a:r>
@@ -18168,7 +18174,7 @@
                 <a:solidFill>
                   <a:srgbClr val="334155"/>
                 </a:solidFill>
-                <a:latin typeface="Inter"/>
+                <a:latin typeface="Segoe UI" panose="020B0502040204020203" pitchFamily="34" charset="0"/>
               </a:rPr>
               <a:t> Posición angular estimada y validación de software.</a:t>
             </a:r>
@@ -18184,7 +18190,7 @@
         <p:spPr>
           <a:xfrm>
             <a:off x="6524625" y="4429125"/>
-            <a:ext cx="4724400" cy="361950"/>
+            <a:ext cx="4724400" cy="173124"/>
           </a:xfrm>
           <a:prstGeom prst="rect">
             <a:avLst/>
@@ -18203,7 +18209,7 @@
                 <a:solidFill>
                   <a:srgbClr val="334155"/>
                 </a:solidFill>
-                <a:latin typeface="Inter"/>
+                <a:latin typeface="Segoe UI" panose="020B0502040204020203" pitchFamily="34" charset="0"/>
               </a:rPr>
               <a:t>Disipación Térmica:</a:t>
             </a:r>
@@ -18212,7 +18218,7 @@
                 <a:solidFill>
                   <a:srgbClr val="334155"/>
                 </a:solidFill>
-                <a:latin typeface="Inter"/>
+                <a:latin typeface="Segoe UI" panose="020B0502040204020203" pitchFamily="34" charset="0"/>
               </a:rPr>
               <a:t> Calor disipado en controladores fijados a la base.</a:t>
             </a:r>
@@ -18438,7 +18444,7 @@
                           <a:solidFill>
                             <a:srgbClr val="0F172A"/>
                           </a:solidFill>
-                          <a:latin typeface="Inter"/>
+                          <a:latin typeface="Segoe UI" panose="020B0502040204020203" pitchFamily="34" charset="0"/>
                         </a:rPr>
                         <a:t>Articulación</a:t>
                       </a:r>
@@ -18473,7 +18479,7 @@
                           <a:solidFill>
                             <a:srgbClr val="0F172A"/>
                           </a:solidFill>
-                          <a:latin typeface="Inter"/>
+                          <a:latin typeface="Segoe UI" panose="020B0502040204020203" pitchFamily="34" charset="0"/>
                         </a:rPr>
                         <a:t>Torque Nominal</a:t>
                       </a:r>
@@ -18508,7 +18514,7 @@
                           <a:solidFill>
                             <a:srgbClr val="DC2626"/>
                           </a:solidFill>
-                          <a:latin typeface="Inter"/>
+                          <a:latin typeface="Segoe UI" panose="020B0502040204020203" pitchFamily="34" charset="0"/>
                         </a:rPr>
                         <a:t>Torque con FS=3</a:t>
                       </a:r>
@@ -18543,7 +18549,7 @@
                           <a:solidFill>
                             <a:srgbClr val="0F172A"/>
                           </a:solidFill>
-                          <a:latin typeface="Inter"/>
+                          <a:latin typeface="Segoe UI" panose="020B0502040204020203" pitchFamily="34" charset="0"/>
                         </a:rPr>
                         <a:t>Diagnóstico</a:t>
                       </a:r>
@@ -18585,7 +18591,7 @@
                           <a:solidFill>
                             <a:srgbClr val="334155"/>
                           </a:solidFill>
-                          <a:latin typeface="Inter"/>
+                          <a:latin typeface="Segoe UI" panose="020B0502040204020203" pitchFamily="34" charset="0"/>
                         </a:rPr>
                         <a:t>Joint 2 (Hombro)</a:t>
                       </a:r>
@@ -18620,7 +18626,7 @@
                           <a:solidFill>
                             <a:srgbClr val="334155"/>
                           </a:solidFill>
-                          <a:latin typeface="Inter"/>
+                          <a:latin typeface="Segoe UI" panose="020B0502040204020203" pitchFamily="34" charset="0"/>
                         </a:rPr>
                         <a:t>~</a:t>
                       </a:r>
@@ -18629,7 +18635,7 @@
                           <a:solidFill>
                             <a:srgbClr val="334155"/>
                           </a:solidFill>
-                          <a:latin typeface="Inter"/>
+                          <a:latin typeface="Segoe UI" panose="020B0502040204020203" pitchFamily="34" charset="0"/>
                         </a:rPr>
                         <a:t>30</a:t>
                       </a:r>
@@ -18638,7 +18644,7 @@
                           <a:solidFill>
                             <a:srgbClr val="334155"/>
                           </a:solidFill>
-                          <a:latin typeface="Inter"/>
+                          <a:latin typeface="Segoe UI" panose="020B0502040204020203" pitchFamily="34" charset="0"/>
                         </a:rPr>
                         <a:t>.</a:t>
                       </a:r>
@@ -18647,7 +18653,7 @@
                           <a:solidFill>
                             <a:srgbClr val="334155"/>
                           </a:solidFill>
-                          <a:latin typeface="Inter"/>
+                          <a:latin typeface="Segoe UI" panose="020B0502040204020203" pitchFamily="34" charset="0"/>
                         </a:rPr>
                         <a:t>2</a:t>
                       </a:r>
@@ -18656,7 +18662,7 @@
                           <a:solidFill>
                             <a:srgbClr val="334155"/>
                           </a:solidFill>
-                          <a:latin typeface="Inter"/>
+                          <a:latin typeface="Segoe UI" panose="020B0502040204020203" pitchFamily="34" charset="0"/>
                         </a:rPr>
                         <a:t> </a:t>
                       </a:r>
@@ -18665,7 +18671,7 @@
                           <a:solidFill>
                             <a:srgbClr val="334155"/>
                           </a:solidFill>
-                          <a:latin typeface="Inter"/>
+                          <a:latin typeface="Segoe UI" panose="020B0502040204020203" pitchFamily="34" charset="0"/>
                         </a:rPr>
                         <a:t>N·m</a:t>
                       </a:r>
@@ -18673,7 +18679,7 @@
                         <a:solidFill>
                           <a:srgbClr val="334155"/>
                         </a:solidFill>
-                        <a:latin typeface="Inter"/>
+                        <a:latin typeface="Segoe UI" panose="020B0502040204020203" pitchFamily="34" charset="0"/>
                       </a:endParaRPr>
                     </a:p>
                   </a:txBody>
@@ -18706,7 +18712,7 @@
                           <a:solidFill>
                             <a:srgbClr val="DC2626"/>
                           </a:solidFill>
-                          <a:latin typeface="Inter"/>
+                          <a:latin typeface="Segoe UI" panose="020B0502040204020203" pitchFamily="34" charset="0"/>
                         </a:rPr>
                         <a:t>90</a:t>
                       </a:r>
@@ -18715,7 +18721,7 @@
                           <a:solidFill>
                             <a:srgbClr val="DC2626"/>
                           </a:solidFill>
-                          <a:latin typeface="Inter"/>
+                          <a:latin typeface="Segoe UI" panose="020B0502040204020203" pitchFamily="34" charset="0"/>
                         </a:rPr>
                         <a:t>.</a:t>
                       </a:r>
@@ -18724,7 +18730,7 @@
                           <a:solidFill>
                             <a:srgbClr val="DC2626"/>
                           </a:solidFill>
-                          <a:latin typeface="Inter"/>
+                          <a:latin typeface="Segoe UI" panose="020B0502040204020203" pitchFamily="34" charset="0"/>
                         </a:rPr>
                         <a:t>6</a:t>
                       </a:r>
@@ -18733,7 +18739,7 @@
                           <a:solidFill>
                             <a:srgbClr val="DC2626"/>
                           </a:solidFill>
-                          <a:latin typeface="Inter"/>
+                          <a:latin typeface="Segoe UI" panose="020B0502040204020203" pitchFamily="34" charset="0"/>
                         </a:rPr>
                         <a:t> </a:t>
                       </a:r>
@@ -18742,7 +18748,7 @@
                           <a:solidFill>
                             <a:srgbClr val="DC2626"/>
                           </a:solidFill>
-                          <a:latin typeface="Inter"/>
+                          <a:latin typeface="Segoe UI" panose="020B0502040204020203" pitchFamily="34" charset="0"/>
                         </a:rPr>
                         <a:t>N·m</a:t>
                       </a:r>
@@ -18750,7 +18756,7 @@
                         <a:solidFill>
                           <a:srgbClr val="DC2626"/>
                         </a:solidFill>
-                        <a:latin typeface="Inter"/>
+                        <a:latin typeface="Segoe UI" panose="020B0502040204020203" pitchFamily="34" charset="0"/>
                       </a:endParaRPr>
                     </a:p>
                   </a:txBody>
@@ -18783,7 +18789,7 @@
                           <a:solidFill>
                             <a:srgbClr val="DC2626"/>
                           </a:solidFill>
-                          <a:latin typeface="Inter"/>
+                          <a:latin typeface="Segoe UI" panose="020B0502040204020203" pitchFamily="34" charset="0"/>
                         </a:rPr>
                         <a:t>Colapso</a:t>
                       </a:r>
@@ -18825,7 +18831,7 @@
                           <a:solidFill>
                             <a:srgbClr val="334155"/>
                           </a:solidFill>
-                          <a:latin typeface="Inter"/>
+                          <a:latin typeface="Segoe UI" panose="020B0502040204020203" pitchFamily="34" charset="0"/>
                         </a:rPr>
                         <a:t>Joint 3 (Codo)</a:t>
                       </a:r>
@@ -18860,7 +18866,7 @@
                           <a:solidFill>
                             <a:srgbClr val="334155"/>
                           </a:solidFill>
-                          <a:latin typeface="Inter"/>
+                          <a:latin typeface="Segoe UI" panose="020B0502040204020203" pitchFamily="34" charset="0"/>
                         </a:rPr>
                         <a:t>~10.4 N·m</a:t>
                       </a:r>
@@ -18895,7 +18901,7 @@
                           <a:solidFill>
                             <a:srgbClr val="DC2626"/>
                           </a:solidFill>
-                          <a:latin typeface="Inter"/>
+                          <a:latin typeface="Segoe UI" panose="020B0502040204020203" pitchFamily="34" charset="0"/>
                         </a:rPr>
                         <a:t>31.3 N·m</a:t>
                       </a:r>
@@ -18930,7 +18936,7 @@
                           <a:solidFill>
                             <a:srgbClr val="DC2626"/>
                           </a:solidFill>
-                          <a:latin typeface="Inter"/>
+                          <a:latin typeface="Segoe UI" panose="020B0502040204020203" pitchFamily="34" charset="0"/>
                         </a:rPr>
                         <a:t>Excede motor</a:t>
                       </a:r>
@@ -18972,7 +18978,7 @@
                           <a:solidFill>
                             <a:srgbClr val="334155"/>
                           </a:solidFill>
-                          <a:latin typeface="Inter"/>
+                          <a:latin typeface="Segoe UI" panose="020B0502040204020203" pitchFamily="34" charset="0"/>
                         </a:rPr>
                         <a:t>Joint 4 y 5 (Muñeca)</a:t>
                       </a:r>
@@ -19007,7 +19013,7 @@
                           <a:solidFill>
                             <a:srgbClr val="334155"/>
                           </a:solidFill>
-                          <a:latin typeface="Inter"/>
+                          <a:latin typeface="Segoe UI" panose="020B0502040204020203" pitchFamily="34" charset="0"/>
                         </a:rPr>
                         <a:t>~2.96 N·m</a:t>
                       </a:r>
@@ -19042,7 +19048,7 @@
                           <a:solidFill>
                             <a:srgbClr val="D97706"/>
                           </a:solidFill>
-                          <a:latin typeface="Inter"/>
+                          <a:latin typeface="Segoe UI" panose="020B0502040204020203" pitchFamily="34" charset="0"/>
                         </a:rPr>
                         <a:t>8.9 N·m</a:t>
                       </a:r>
@@ -19077,7 +19083,7 @@
                           <a:solidFill>
                             <a:srgbClr val="D97706"/>
                           </a:solidFill>
-                          <a:latin typeface="Inter"/>
+                          <a:latin typeface="Segoe UI" panose="020B0502040204020203" pitchFamily="34" charset="0"/>
                         </a:rPr>
                         <a:t>Al límite</a:t>
                       </a:r>
@@ -19119,7 +19125,7 @@
                           <a:solidFill>
                             <a:srgbClr val="334155"/>
                           </a:solidFill>
-                          <a:latin typeface="Inter"/>
+                          <a:latin typeface="Segoe UI" panose="020B0502040204020203" pitchFamily="34" charset="0"/>
                         </a:rPr>
                         <a:t>Joint 1 (Base)</a:t>
                       </a:r>
@@ -19154,7 +19160,7 @@
                           <a:solidFill>
                             <a:srgbClr val="334155"/>
                           </a:solidFill>
-                          <a:latin typeface="Inter"/>
+                          <a:latin typeface="Segoe UI" panose="020B0502040204020203" pitchFamily="34" charset="0"/>
                         </a:rPr>
                         <a:t>~5.0 N·m</a:t>
                       </a:r>
@@ -19189,7 +19195,7 @@
                           <a:solidFill>
                             <a:srgbClr val="16A34A"/>
                           </a:solidFill>
-                          <a:latin typeface="Inter"/>
+                          <a:latin typeface="Segoe UI" panose="020B0502040204020203" pitchFamily="34" charset="0"/>
                         </a:rPr>
                         <a:t>15.0 N·m</a:t>
                       </a:r>
@@ -19224,7 +19230,7 @@
                           <a:solidFill>
                             <a:srgbClr val="16A34A"/>
                           </a:solidFill>
-                          <a:latin typeface="Inter"/>
+                          <a:latin typeface="Segoe UI" panose="020B0502040204020203" pitchFamily="34" charset="0"/>
                         </a:rPr>
                         <a:t>Cumple</a:t>
                       </a:r>
@@ -19232,7 +19238,7 @@
                         <a:solidFill>
                           <a:srgbClr val="16A34A"/>
                         </a:solidFill>
-                        <a:latin typeface="Inter"/>
+                        <a:latin typeface="Segoe UI" panose="020B0502040204020203" pitchFamily="34" charset="0"/>
                       </a:endParaRPr>
                     </a:p>
                   </a:txBody>
@@ -19273,7 +19279,7 @@
         <p:spPr>
           <a:xfrm>
             <a:off x="762000" y="6162675"/>
-            <a:ext cx="11430000" cy="161925"/>
+            <a:ext cx="5238614" cy="161583"/>
           </a:xfrm>
           <a:prstGeom prst="rect">
             <a:avLst/>
@@ -19292,7 +19298,7 @@
                 <a:solidFill>
                   <a:srgbClr val="0F172A"/>
                 </a:solidFill>
-                <a:latin typeface="Inter"/>
+                <a:latin typeface="Segoe UI" panose="020B0502040204020203" pitchFamily="34" charset="0"/>
               </a:rPr>
               <a:t>Conclusión: Los motores colgados obligan a actuadores industriales de costo prohibitivo</a:t>
             </a:r>
@@ -19308,7 +19314,7 @@
         <p:spPr>
           <a:xfrm>
             <a:off x="762000" y="533400"/>
-            <a:ext cx="11430000" cy="161925"/>
+            <a:ext cx="4451540" cy="161583"/>
           </a:xfrm>
           <a:prstGeom prst="rect">
             <a:avLst/>
@@ -19327,7 +19333,7 @@
                 <a:solidFill>
                   <a:srgbClr val="DC2626"/>
                 </a:solidFill>
-                <a:latin typeface="Inter"/>
+                <a:latin typeface="Segoe UI" panose="020B0502040204020203" pitchFamily="34" charset="0"/>
               </a:rPr>
               <a:t>EVOLUCIÓN TÉCNICA · POR QUÉ DESCARTAMOS MOTORES DIRECTOS</a:t>
             </a:r>
@@ -19343,7 +19349,7 @@
         <p:spPr>
           <a:xfrm>
             <a:off x="762000" y="771525"/>
-            <a:ext cx="11430000" cy="409575"/>
+            <a:ext cx="7572907" cy="392415"/>
           </a:xfrm>
           <a:prstGeom prst="rect">
             <a:avLst/>
@@ -19362,7 +19368,7 @@
                 <a:solidFill>
                   <a:srgbClr val="0F172A"/>
                 </a:solidFill>
-                <a:latin typeface="Space Grotesk"/>
+                <a:latin typeface="Trebuchet MS" panose="020B0603020202020204" pitchFamily="34" charset="0"/>
               </a:rPr>
               <a:t>Fallo Físico de Motores Directos en Articulaciones</a:t>
             </a:r>
@@ -19377,8 +19383,8 @@
         </p:nvSpPr>
         <p:spPr>
           <a:xfrm>
-            <a:off x="1304925" y="2657475"/>
-            <a:ext cx="5770721" cy="228600"/>
+            <a:off x="1304925" y="2656359"/>
+            <a:ext cx="2991203" cy="230832"/>
           </a:xfrm>
           <a:prstGeom prst="rect">
             <a:avLst/>
@@ -19397,7 +19403,7 @@
                 <a:solidFill>
                   <a:srgbClr val="991B1B"/>
                 </a:solidFill>
-                <a:latin typeface="Inter"/>
+                <a:latin typeface="Segoe UI" panose="020B0502040204020203" pitchFamily="34" charset="0"/>
               </a:rPr>
               <a:t>Masa Parásita y Brazo de Palanca</a:t>
             </a:r>
@@ -19436,7 +19442,7 @@
                 <a:solidFill>
                   <a:srgbClr val="334155"/>
                 </a:solidFill>
-                <a:latin typeface="Inter"/>
+                <a:latin typeface="Segoe UI" panose="020B0502040204020203" pitchFamily="34" charset="0"/>
               </a:rPr>
               <a:t>Colocar un motor en cada eje añade entre 1.5 kg y 3.5 kg de masa inerte a lo largo de los eslabones móviles.</a:t>
             </a:r>
@@ -19452,7 +19458,7 @@
         <p:spPr>
           <a:xfrm>
             <a:off x="1038225" y="3552825"/>
-            <a:ext cx="4705350" cy="600075"/>
+            <a:ext cx="4705350" cy="397160"/>
           </a:xfrm>
           <a:prstGeom prst="rect">
             <a:avLst/>
@@ -19475,7 +19481,7 @@
                 <a:solidFill>
                   <a:srgbClr val="7F1D1D"/>
                 </a:solidFill>
-                <a:latin typeface="Inter"/>
+                <a:latin typeface="Segoe UI" panose="020B0502040204020203" pitchFamily="34" charset="0"/>
               </a:rPr>
               <a:t>Efecto acumulativo:</a:t>
             </a:r>
@@ -19484,7 +19490,7 @@
                 <a:solidFill>
                   <a:srgbClr val="7F1D1D"/>
                 </a:solidFill>
-                <a:latin typeface="Inter"/>
+                <a:latin typeface="Segoe UI" panose="020B0502040204020203" pitchFamily="34" charset="0"/>
               </a:rPr>
               <a:t> El motor del hombro gastaba el 70% de su torque disponible únicamente en levantar a los otros motores colgados del brazo.</a:t>
             </a:r>
@@ -19523,7 +19529,7 @@
                 <a:solidFill>
                   <a:srgbClr val="7F1D1D"/>
                 </a:solidFill>
-                <a:latin typeface="Inter"/>
+                <a:latin typeface="Segoe UI" panose="020B0502040204020203" pitchFamily="34" charset="0"/>
               </a:rPr>
               <a:t>Cálculo</a:t>
             </a:r>
@@ -19532,7 +19538,7 @@
                 <a:solidFill>
                   <a:srgbClr val="7F1D1D"/>
                 </a:solidFill>
-                <a:latin typeface="Inter"/>
+                <a:latin typeface="Segoe UI" panose="020B0502040204020203" pitchFamily="34" charset="0"/>
               </a:rPr>
               <a:t> con FS=3:</a:t>
             </a:r>
@@ -19541,7 +19547,7 @@
                 <a:solidFill>
                   <a:srgbClr val="7F1D1D"/>
                 </a:solidFill>
-                <a:latin typeface="Inter"/>
+                <a:latin typeface="Segoe UI" panose="020B0502040204020203" pitchFamily="34" charset="0"/>
               </a:rPr>
               <a:t> La </a:t>
             </a:r>
@@ -19550,7 +19556,7 @@
                 <a:solidFill>
                   <a:srgbClr val="7F1D1D"/>
                 </a:solidFill>
-                <a:latin typeface="Inter"/>
+                <a:latin typeface="Segoe UI" panose="020B0502040204020203" pitchFamily="34" charset="0"/>
               </a:rPr>
               <a:t>demanda</a:t>
             </a:r>
@@ -19559,7 +19565,7 @@
                 <a:solidFill>
                   <a:srgbClr val="7F1D1D"/>
                 </a:solidFill>
-                <a:latin typeface="Inter"/>
+                <a:latin typeface="Segoe UI" panose="020B0502040204020203" pitchFamily="34" charset="0"/>
               </a:rPr>
               <a:t> </a:t>
             </a:r>
@@ -19568,7 +19574,7 @@
                 <a:solidFill>
                   <a:srgbClr val="7F1D1D"/>
                 </a:solidFill>
-                <a:latin typeface="Inter"/>
+                <a:latin typeface="Segoe UI" panose="020B0502040204020203" pitchFamily="34" charset="0"/>
               </a:rPr>
               <a:t>en</a:t>
             </a:r>
@@ -19577,7 +19583,7 @@
                 <a:solidFill>
                   <a:srgbClr val="7F1D1D"/>
                 </a:solidFill>
-                <a:latin typeface="Inter"/>
+                <a:latin typeface="Segoe UI" panose="020B0502040204020203" pitchFamily="34" charset="0"/>
               </a:rPr>
               <a:t> </a:t>
             </a:r>
@@ -19586,7 +19592,7 @@
                 <a:solidFill>
                   <a:srgbClr val="7F1D1D"/>
                 </a:solidFill>
-                <a:latin typeface="Inter"/>
+                <a:latin typeface="Segoe UI" panose="020B0502040204020203" pitchFamily="34" charset="0"/>
               </a:rPr>
               <a:t>el</a:t>
             </a:r>
@@ -19595,7 +19601,7 @@
                 <a:solidFill>
                   <a:srgbClr val="7F1D1D"/>
                 </a:solidFill>
-                <a:latin typeface="Inter"/>
+                <a:latin typeface="Segoe UI" panose="020B0502040204020203" pitchFamily="34" charset="0"/>
               </a:rPr>
               <a:t> </a:t>
             </a:r>
@@ -19604,7 +19610,7 @@
                 <a:solidFill>
                   <a:srgbClr val="7F1D1D"/>
                 </a:solidFill>
-                <a:latin typeface="Inter"/>
+                <a:latin typeface="Segoe UI" panose="020B0502040204020203" pitchFamily="34" charset="0"/>
               </a:rPr>
               <a:t>hombro</a:t>
             </a:r>
@@ -19613,7 +19619,7 @@
                 <a:solidFill>
                   <a:srgbClr val="7F1D1D"/>
                 </a:solidFill>
-                <a:latin typeface="Inter"/>
+                <a:latin typeface="Segoe UI" panose="020B0502040204020203" pitchFamily="34" charset="0"/>
               </a:rPr>
               <a:t> </a:t>
             </a:r>
@@ -19622,7 +19628,7 @@
                 <a:solidFill>
                   <a:srgbClr val="7F1D1D"/>
                 </a:solidFill>
-                <a:latin typeface="Inter"/>
+                <a:latin typeface="Segoe UI" panose="020B0502040204020203" pitchFamily="34" charset="0"/>
               </a:rPr>
               <a:t>superaba</a:t>
             </a:r>
@@ -19631,7 +19637,7 @@
                 <a:solidFill>
                   <a:srgbClr val="7F1D1D"/>
                 </a:solidFill>
-                <a:latin typeface="Inter"/>
+                <a:latin typeface="Segoe UI" panose="020B0502040204020203" pitchFamily="34" charset="0"/>
               </a:rPr>
               <a:t> </a:t>
             </a:r>
@@ -19640,7 +19646,7 @@
                 <a:solidFill>
                   <a:srgbClr val="7F1D1D"/>
                 </a:solidFill>
-                <a:latin typeface="Inter"/>
+                <a:latin typeface="Segoe UI" panose="020B0502040204020203" pitchFamily="34" charset="0"/>
               </a:rPr>
               <a:t>los</a:t>
             </a:r>
@@ -19649,7 +19655,7 @@
                 <a:solidFill>
                   <a:srgbClr val="7F1D1D"/>
                 </a:solidFill>
-                <a:latin typeface="Inter"/>
+                <a:latin typeface="Segoe UI" panose="020B0502040204020203" pitchFamily="34" charset="0"/>
               </a:rPr>
               <a:t> </a:t>
             </a:r>
@@ -19658,7 +19664,7 @@
                 <a:solidFill>
                   <a:srgbClr val="7F1D1D"/>
                 </a:solidFill>
-                <a:latin typeface="Inter"/>
+                <a:latin typeface="Segoe UI" panose="020B0502040204020203" pitchFamily="34" charset="0"/>
               </a:rPr>
               <a:t>8</a:t>
             </a:r>
@@ -19667,7 +19673,7 @@
                 <a:solidFill>
                   <a:srgbClr val="7F1D1D"/>
                 </a:solidFill>
-                <a:latin typeface="Inter"/>
+                <a:latin typeface="Segoe UI" panose="020B0502040204020203" pitchFamily="34" charset="0"/>
               </a:rPr>
               <a:t>0 </a:t>
             </a:r>
@@ -19676,7 +19682,7 @@
                 <a:solidFill>
                   <a:srgbClr val="7F1D1D"/>
                 </a:solidFill>
-                <a:latin typeface="Inter"/>
+                <a:latin typeface="Segoe UI" panose="020B0502040204020203" pitchFamily="34" charset="0"/>
               </a:rPr>
               <a:t>N·m</a:t>
             </a:r>
@@ -19685,7 +19691,7 @@
                 <a:solidFill>
                   <a:srgbClr val="7F1D1D"/>
                 </a:solidFill>
-                <a:latin typeface="Inter"/>
+                <a:latin typeface="Segoe UI" panose="020B0502040204020203" pitchFamily="34" charset="0"/>
               </a:rPr>
               <a:t> a </a:t>
             </a:r>
@@ -19694,7 +19700,7 @@
                 <a:solidFill>
                   <a:srgbClr val="7F1D1D"/>
                 </a:solidFill>
-                <a:latin typeface="Inter"/>
+                <a:latin typeface="Segoe UI" panose="020B0502040204020203" pitchFamily="34" charset="0"/>
               </a:rPr>
               <a:t>10</a:t>
             </a:r>
@@ -19703,7 +19709,7 @@
                 <a:solidFill>
                   <a:srgbClr val="7F1D1D"/>
                 </a:solidFill>
-                <a:latin typeface="Inter"/>
+                <a:latin typeface="Segoe UI" panose="020B0502040204020203" pitchFamily="34" charset="0"/>
               </a:rPr>
               <a:t>0 </a:t>
             </a:r>
@@ -19712,7 +19718,7 @@
                 <a:solidFill>
                   <a:srgbClr val="7F1D1D"/>
                 </a:solidFill>
-                <a:latin typeface="Inter"/>
+                <a:latin typeface="Segoe UI" panose="020B0502040204020203" pitchFamily="34" charset="0"/>
               </a:rPr>
               <a:t>N·m</a:t>
             </a:r>
@@ -19721,7 +19727,7 @@
                 <a:solidFill>
                   <a:srgbClr val="7F1D1D"/>
                 </a:solidFill>
-                <a:latin typeface="Inter"/>
+                <a:latin typeface="Segoe UI" panose="020B0502040204020203" pitchFamily="34" charset="0"/>
               </a:rPr>
               <a:t>, </a:t>
             </a:r>
@@ -19730,7 +19736,7 @@
                 <a:solidFill>
                   <a:srgbClr val="7F1D1D"/>
                 </a:solidFill>
-                <a:latin typeface="Inter"/>
+                <a:latin typeface="Segoe UI" panose="020B0502040204020203" pitchFamily="34" charset="0"/>
               </a:rPr>
               <a:t>haciendo</a:t>
             </a:r>
@@ -19739,7 +19745,7 @@
                 <a:solidFill>
                   <a:srgbClr val="7F1D1D"/>
                 </a:solidFill>
-                <a:latin typeface="Inter"/>
+                <a:latin typeface="Segoe UI" panose="020B0502040204020203" pitchFamily="34" charset="0"/>
               </a:rPr>
               <a:t> inviable </a:t>
             </a:r>
@@ -19748,7 +19754,7 @@
                 <a:solidFill>
                   <a:srgbClr val="7F1D1D"/>
                 </a:solidFill>
-                <a:latin typeface="Inter"/>
+                <a:latin typeface="Segoe UI" panose="020B0502040204020203" pitchFamily="34" charset="0"/>
               </a:rPr>
               <a:t>cualquier</a:t>
             </a:r>
@@ -19757,7 +19763,7 @@
                 <a:solidFill>
                   <a:srgbClr val="7F1D1D"/>
                 </a:solidFill>
-                <a:latin typeface="Inter"/>
+                <a:latin typeface="Segoe UI" panose="020B0502040204020203" pitchFamily="34" charset="0"/>
               </a:rPr>
               <a:t> </a:t>
             </a:r>
@@ -19766,7 +19772,7 @@
                 <a:solidFill>
                   <a:srgbClr val="7F1D1D"/>
                 </a:solidFill>
-                <a:latin typeface="Inter"/>
+                <a:latin typeface="Segoe UI" panose="020B0502040204020203" pitchFamily="34" charset="0"/>
               </a:rPr>
               <a:t>actuador</a:t>
             </a:r>
@@ -19775,7 +19781,7 @@
                 <a:solidFill>
                   <a:srgbClr val="7F1D1D"/>
                 </a:solidFill>
-                <a:latin typeface="Inter"/>
+                <a:latin typeface="Segoe UI" panose="020B0502040204020203" pitchFamily="34" charset="0"/>
               </a:rPr>
               <a:t> </a:t>
             </a:r>
@@ -19784,7 +19790,7 @@
                 <a:solidFill>
                   <a:srgbClr val="7F1D1D"/>
                 </a:solidFill>
-                <a:latin typeface="Inter"/>
+                <a:latin typeface="Segoe UI" panose="020B0502040204020203" pitchFamily="34" charset="0"/>
               </a:rPr>
               <a:t>económico</a:t>
             </a:r>
@@ -19793,7 +19799,7 @@
                 <a:solidFill>
                   <a:srgbClr val="7F1D1D"/>
                 </a:solidFill>
-                <a:latin typeface="Inter"/>
+                <a:latin typeface="Segoe UI" panose="020B0502040204020203" pitchFamily="34" charset="0"/>
               </a:rPr>
               <a:t>.</a:t>
             </a:r>
@@ -19809,7 +19815,7 @@
         <p:spPr>
           <a:xfrm>
             <a:off x="6543675" y="2390775"/>
-            <a:ext cx="5648325" cy="228600"/>
+            <a:ext cx="4236031" cy="230832"/>
           </a:xfrm>
           <a:prstGeom prst="rect">
             <a:avLst/>
@@ -19828,7 +19834,7 @@
                 <a:solidFill>
                   <a:srgbClr val="0F172A"/>
                 </a:solidFill>
-                <a:latin typeface="Inter"/>
+                <a:latin typeface="Segoe UI" panose="020B0502040204020203" pitchFamily="34" charset="0"/>
               </a:rPr>
               <a:t>Cálculo Original de Torque (Motores Colgados)</a:t>
             </a:r>
@@ -19844,7 +19850,7 @@
         <p:spPr>
           <a:xfrm>
             <a:off x="6543675" y="4800600"/>
-            <a:ext cx="5648325" cy="152400"/>
+            <a:ext cx="3965829" cy="150041"/>
           </a:xfrm>
           <a:prstGeom prst="rect">
             <a:avLst/>
@@ -19863,7 +19869,7 @@
                 <a:solidFill>
                   <a:srgbClr val="64748B"/>
                 </a:solidFill>
-                <a:latin typeface="Inter"/>
+                <a:latin typeface="Segoe UI" panose="020B0502040204020203" pitchFamily="34" charset="0"/>
               </a:rPr>
               <a:t>El peso propio del brazo alcanzaba 4.5 kg solo en motores suspendidos.</a:t>
             </a:r>
@@ -20083,7 +20089,7 @@
                           <a:solidFill>
                             <a:srgbClr val="0F172A"/>
                           </a:solidFill>
-                          <a:latin typeface="Inter"/>
+                          <a:latin typeface="Segoe UI" panose="020B0502040204020203" pitchFamily="34" charset="0"/>
                         </a:rPr>
                         <a:t>Articulación</a:t>
                       </a:r>
@@ -20118,7 +20124,7 @@
                           <a:solidFill>
                             <a:srgbClr val="DC2626"/>
                           </a:solidFill>
-                          <a:latin typeface="Inter"/>
+                          <a:latin typeface="Segoe UI" panose="020B0502040204020203" pitchFamily="34" charset="0"/>
                         </a:rPr>
                         <a:t>Antes (Directo)</a:t>
                       </a:r>
@@ -20153,7 +20159,7 @@
                           <a:solidFill>
                             <a:srgbClr val="16A34A"/>
                           </a:solidFill>
-                          <a:latin typeface="Inter"/>
+                          <a:latin typeface="Segoe UI" panose="020B0502040204020203" pitchFamily="34" charset="0"/>
                         </a:rPr>
                         <a:t>Con Bandas (FS=3)</a:t>
                       </a:r>
@@ -20188,7 +20194,7 @@
                           <a:solidFill>
                             <a:srgbClr val="0284C7"/>
                           </a:solidFill>
-                          <a:latin typeface="Inter"/>
+                          <a:latin typeface="Segoe UI" panose="020B0502040204020203" pitchFamily="34" charset="0"/>
                         </a:rPr>
                         <a:t>Configuración</a:t>
                       </a:r>
@@ -20230,7 +20236,7 @@
                           <a:solidFill>
                             <a:srgbClr val="334155"/>
                           </a:solidFill>
-                          <a:latin typeface="Inter"/>
+                          <a:latin typeface="Segoe UI" panose="020B0502040204020203" pitchFamily="34" charset="0"/>
                         </a:rPr>
                         <a:t>Joint 1 (Base)</a:t>
                       </a:r>
@@ -20265,7 +20271,7 @@
                           <a:solidFill>
                             <a:srgbClr val="334155"/>
                           </a:solidFill>
-                          <a:latin typeface="Inter"/>
+                          <a:latin typeface="Segoe UI" panose="020B0502040204020203" pitchFamily="34" charset="0"/>
                         </a:rPr>
                         <a:t>15.0 N·m</a:t>
                       </a:r>
@@ -20300,7 +20306,7 @@
                           <a:solidFill>
                             <a:srgbClr val="16A34A"/>
                           </a:solidFill>
-                          <a:latin typeface="Inter"/>
+                          <a:latin typeface="Segoe UI" panose="020B0502040204020203" pitchFamily="34" charset="0"/>
                         </a:rPr>
                         <a:t>~9.0 N·m</a:t>
                       </a:r>
@@ -20335,7 +20341,7 @@
                           <a:solidFill>
                             <a:srgbClr val="334155"/>
                           </a:solidFill>
-                          <a:latin typeface="Inter"/>
+                          <a:latin typeface="Segoe UI" panose="020B0502040204020203" pitchFamily="34" charset="0"/>
                         </a:rPr>
                         <a:t>Reductor 10:1 + 2.5:1</a:t>
                       </a:r>
@@ -20377,7 +20383,7 @@
                           <a:solidFill>
                             <a:srgbClr val="334155"/>
                           </a:solidFill>
-                          <a:latin typeface="Inter"/>
+                          <a:latin typeface="Segoe UI" panose="020B0502040204020203" pitchFamily="34" charset="0"/>
                         </a:rPr>
                         <a:t>Joint 2 (Hombro)</a:t>
                       </a:r>
@@ -20412,7 +20418,7 @@
                           <a:solidFill>
                             <a:srgbClr val="334155"/>
                           </a:solidFill>
-                          <a:latin typeface="Inter"/>
+                          <a:latin typeface="Segoe UI" panose="020B0502040204020203" pitchFamily="34" charset="0"/>
                         </a:rPr>
                         <a:t>59.5 N·m</a:t>
                       </a:r>
@@ -20447,7 +20453,7 @@
                           <a:solidFill>
                             <a:srgbClr val="16A34A"/>
                           </a:solidFill>
-                          <a:latin typeface="Inter"/>
+                          <a:latin typeface="Segoe UI" panose="020B0502040204020203" pitchFamily="34" charset="0"/>
                         </a:rPr>
                         <a:t>46.4 N·m</a:t>
                       </a:r>
@@ -20482,7 +20488,7 @@
                           <a:solidFill>
                             <a:srgbClr val="334155"/>
                           </a:solidFill>
-                          <a:latin typeface="Inter"/>
+                          <a:latin typeface="Segoe UI" panose="020B0502040204020203" pitchFamily="34" charset="0"/>
                         </a:rPr>
                         <a:t>NEMA 34 + Poleas</a:t>
                       </a:r>
@@ -20524,7 +20530,7 @@
                           <a:solidFill>
                             <a:srgbClr val="334155"/>
                           </a:solidFill>
-                          <a:latin typeface="Inter"/>
+                          <a:latin typeface="Segoe UI" panose="020B0502040204020203" pitchFamily="34" charset="0"/>
                         </a:rPr>
                         <a:t>Joint 3 (Codo)</a:t>
                       </a:r>
@@ -20559,7 +20565,7 @@
                           <a:solidFill>
                             <a:srgbClr val="334155"/>
                           </a:solidFill>
-                          <a:latin typeface="Inter"/>
+                          <a:latin typeface="Segoe UI" panose="020B0502040204020203" pitchFamily="34" charset="0"/>
                         </a:rPr>
                         <a:t>31.3 N·m</a:t>
                       </a:r>
@@ -20594,7 +20600,7 @@
                           <a:solidFill>
                             <a:srgbClr val="16A34A"/>
                           </a:solidFill>
-                          <a:latin typeface="Inter"/>
+                          <a:latin typeface="Segoe UI" panose="020B0502040204020203" pitchFamily="34" charset="0"/>
                         </a:rPr>
                         <a:t>25.9 N·m</a:t>
                       </a:r>
@@ -20629,7 +20635,7 @@
                           <a:solidFill>
                             <a:srgbClr val="334155"/>
                           </a:solidFill>
-                          <a:latin typeface="Inter"/>
+                          <a:latin typeface="Segoe UI" panose="020B0502040204020203" pitchFamily="34" charset="0"/>
                         </a:rPr>
                         <a:t>Reductor 10:1 + 6.7:1</a:t>
                       </a:r>
@@ -20671,7 +20677,7 @@
                           <a:solidFill>
                             <a:srgbClr val="334155"/>
                           </a:solidFill>
-                          <a:latin typeface="Inter"/>
+                          <a:latin typeface="Segoe UI" panose="020B0502040204020203" pitchFamily="34" charset="0"/>
                         </a:rPr>
                         <a:t>Joint 4 y 5 (Muñeca)</a:t>
                       </a:r>
@@ -20706,7 +20712,7 @@
                           <a:solidFill>
                             <a:srgbClr val="334155"/>
                           </a:solidFill>
-                          <a:latin typeface="Inter"/>
+                          <a:latin typeface="Segoe UI" panose="020B0502040204020203" pitchFamily="34" charset="0"/>
                         </a:rPr>
                         <a:t>8.9 N·m</a:t>
                       </a:r>
@@ -20741,7 +20747,7 @@
                           <a:solidFill>
                             <a:srgbClr val="16A34A"/>
                           </a:solidFill>
-                          <a:latin typeface="Inter"/>
+                          <a:latin typeface="Segoe UI" panose="020B0502040204020203" pitchFamily="34" charset="0"/>
                         </a:rPr>
                         <a:t>8.3 N·m</a:t>
                       </a:r>
@@ -20776,7 +20782,7 @@
                           <a:solidFill>
                             <a:srgbClr val="334155"/>
                           </a:solidFill>
-                          <a:latin typeface="Inter"/>
+                          <a:latin typeface="Segoe UI" panose="020B0502040204020203" pitchFamily="34" charset="0"/>
                         </a:rPr>
                         <a:t>Reductor 10:1 + 2.2:1</a:t>
                       </a:r>
@@ -20819,7 +20825,7 @@
         <p:spPr>
           <a:xfrm>
             <a:off x="762000" y="6162675"/>
-            <a:ext cx="11430000" cy="161925"/>
+            <a:ext cx="3502562" cy="161583"/>
           </a:xfrm>
           <a:prstGeom prst="rect">
             <a:avLst/>
@@ -20838,7 +20844,7 @@
                 <a:solidFill>
                   <a:srgbClr val="0F172A"/>
                 </a:solidFill>
-                <a:latin typeface="Inter"/>
+                <a:latin typeface="Segoe UI" panose="020B0502040204020203" pitchFamily="34" charset="0"/>
               </a:rPr>
               <a:t>Validación Teórica de la Transmisión Síncrona Desacoplada</a:t>
             </a:r>
@@ -20854,7 +20860,7 @@
         <p:spPr>
           <a:xfrm>
             <a:off x="762000" y="533400"/>
-            <a:ext cx="11430000" cy="161925"/>
+            <a:ext cx="3771866" cy="161583"/>
           </a:xfrm>
           <a:prstGeom prst="rect">
             <a:avLst/>
@@ -20873,7 +20879,7 @@
                 <a:solidFill>
                   <a:srgbClr val="16A34A"/>
                 </a:solidFill>
-                <a:latin typeface="Inter"/>
+                <a:latin typeface="Segoe UI" panose="020B0502040204020203" pitchFamily="34" charset="0"/>
               </a:rPr>
               <a:t>EVOLUCIÓN TÉCNICA · TRANSICIÓN A POLEAS SÍNCRONAS</a:t>
             </a:r>
@@ -20889,7 +20895,7 @@
         <p:spPr>
           <a:xfrm>
             <a:off x="762000" y="771525"/>
-            <a:ext cx="11430000" cy="409575"/>
+            <a:ext cx="7445949" cy="392415"/>
           </a:xfrm>
           <a:prstGeom prst="rect">
             <a:avLst/>
@@ -20908,7 +20914,7 @@
                 <a:solidFill>
                   <a:srgbClr val="0F172A"/>
                 </a:solidFill>
-                <a:latin typeface="Space Grotesk"/>
+                <a:latin typeface="Trebuchet MS" panose="020B0603020202020204" pitchFamily="34" charset="0"/>
               </a:rPr>
               <a:t>Recálculo Dinámico: Motores en Base por Bandas</a:t>
             </a:r>
@@ -20923,8 +20929,8 @@
         </p:nvSpPr>
         <p:spPr>
           <a:xfrm>
-            <a:off x="1304925" y="2757487"/>
-            <a:ext cx="5770721" cy="228600"/>
+            <a:off x="1304925" y="2756371"/>
+            <a:ext cx="3095399" cy="230832"/>
           </a:xfrm>
           <a:prstGeom prst="rect">
             <a:avLst/>
@@ -20943,7 +20949,7 @@
                 <a:solidFill>
                   <a:srgbClr val="166534"/>
                 </a:solidFill>
-                <a:latin typeface="Inter"/>
+                <a:latin typeface="Segoe UI" panose="020B0502040204020203" pitchFamily="34" charset="0"/>
               </a:rPr>
               <a:t>Reducción Drástica de Masa Móvil</a:t>
             </a:r>
@@ -20982,7 +20988,7 @@
                 <a:solidFill>
                   <a:srgbClr val="334155"/>
                 </a:solidFill>
-                <a:latin typeface="Inter"/>
+                <a:latin typeface="Segoe UI" panose="020B0502040204020203" pitchFamily="34" charset="0"/>
               </a:rPr>
               <a:t>Al relocalizar los motores a la base, los eslabones móviles pasan a pesar solo ~1.2 kg de estructura hueca.</a:t>
             </a:r>
@@ -21021,7 +21027,7 @@
                 <a:solidFill>
                   <a:srgbClr val="14532D"/>
                 </a:solidFill>
-                <a:latin typeface="Inter"/>
+                <a:latin typeface="Segoe UI" panose="020B0502040204020203" pitchFamily="34" charset="0"/>
               </a:rPr>
               <a:t>Torque en Hombro reducido:</a:t>
             </a:r>
@@ -21030,7 +21036,7 @@
                 <a:solidFill>
                   <a:srgbClr val="14532D"/>
                 </a:solidFill>
-                <a:latin typeface="Inter"/>
+                <a:latin typeface="Segoe UI" panose="020B0502040204020203" pitchFamily="34" charset="0"/>
               </a:rPr>
               <a:t> De 59.5 N·m a 46.4 N·m con FS=3 (ahorro neto superior al 25% en torque).</a:t>
             </a:r>
@@ -21069,7 +21075,7 @@
                 <a:solidFill>
                   <a:srgbClr val="14532D"/>
                 </a:solidFill>
-                <a:latin typeface="Inter"/>
+                <a:latin typeface="Segoe UI" panose="020B0502040204020203" pitchFamily="34" charset="0"/>
               </a:rPr>
               <a:t>Multiplicación por poleas:</a:t>
             </a:r>
@@ -21078,7 +21084,7 @@
                 <a:solidFill>
                   <a:srgbClr val="14532D"/>
                 </a:solidFill>
-                <a:latin typeface="Inter"/>
+                <a:latin typeface="Segoe UI" panose="020B0502040204020203" pitchFamily="34" charset="0"/>
               </a:rPr>
               <a:t> Permite relaciones de 2.5:1 a 6.7:1 combinando los reductores 10:1 en inventario.</a:t>
             </a:r>
@@ -21094,7 +21100,7 @@
         <p:spPr>
           <a:xfrm>
             <a:off x="6543675" y="2309812"/>
-            <a:ext cx="5648325" cy="228600"/>
+            <a:ext cx="4126322" cy="230832"/>
           </a:xfrm>
           <a:prstGeom prst="rect">
             <a:avLst/>
@@ -21113,7 +21119,7 @@
                 <a:solidFill>
                   <a:srgbClr val="0F172A"/>
                 </a:solidFill>
-                <a:latin typeface="Inter"/>
+                <a:latin typeface="Segoe UI" panose="020B0502040204020203" pitchFamily="34" charset="0"/>
               </a:rPr>
               <a:t>Comparativa de Torques con Motores en Base</a:t>
             </a:r>
@@ -21129,7 +21135,7 @@
         <p:spPr>
           <a:xfrm>
             <a:off x="6543675" y="4881562"/>
-            <a:ext cx="5648325" cy="152400"/>
+            <a:ext cx="3874459" cy="150041"/>
           </a:xfrm>
           <a:prstGeom prst="rect">
             <a:avLst/>
@@ -21148,7 +21154,7 @@
                 <a:solidFill>
                   <a:srgbClr val="64748B"/>
                 </a:solidFill>
-                <a:latin typeface="Inter"/>
+                <a:latin typeface="Segoe UI" panose="020B0502040204020203" pitchFamily="34" charset="0"/>
               </a:rPr>
               <a:t>Joint 4 y 5 comparten torque por geometría esférica y peor caso a 90°.</a:t>
             </a:r>
@@ -21521,7 +21527,7 @@
         <p:spPr>
           <a:xfrm>
             <a:off x="762000" y="6162675"/>
-            <a:ext cx="11430000" cy="161925"/>
+            <a:ext cx="3629199" cy="161583"/>
           </a:xfrm>
           <a:prstGeom prst="rect">
             <a:avLst/>
@@ -21540,7 +21546,7 @@
                 <a:solidFill>
                   <a:srgbClr val="0F172A"/>
                 </a:solidFill>
-                <a:latin typeface="Inter"/>
+                <a:latin typeface="Segoe UI" panose="020B0502040204020203" pitchFamily="34" charset="0"/>
               </a:rPr>
               <a:t>Esquema Cinemático de Ejes y Poleas Locas en Articulaciones</a:t>
             </a:r>
@@ -21556,7 +21562,7 @@
         <p:spPr>
           <a:xfrm>
             <a:off x="762000" y="533400"/>
-            <a:ext cx="11430000" cy="161925"/>
+            <a:ext cx="3726982" cy="161583"/>
           </a:xfrm>
           <a:prstGeom prst="rect">
             <a:avLst/>
@@ -21575,7 +21581,7 @@
                 <a:solidFill>
                   <a:srgbClr val="0284C7"/>
                 </a:solidFill>
-                <a:latin typeface="Inter"/>
+                <a:latin typeface="Segoe UI" panose="020B0502040204020203" pitchFamily="34" charset="0"/>
               </a:rPr>
               <a:t>DESARROLLO DE TRANSMISIÓN · CINEMÁTICA DE POLEAS</a:t>
             </a:r>
@@ -21591,7 +21597,7 @@
         <p:spPr>
           <a:xfrm>
             <a:off x="762000" y="771525"/>
-            <a:ext cx="11430000" cy="409575"/>
+            <a:ext cx="5604098" cy="392415"/>
           </a:xfrm>
           <a:prstGeom prst="rect">
             <a:avLst/>
@@ -21610,7 +21616,7 @@
                 <a:solidFill>
                   <a:srgbClr val="0F172A"/>
                 </a:solidFill>
-                <a:latin typeface="Space Grotesk"/>
+                <a:latin typeface="Trebuchet MS" panose="020B0603020202020204" pitchFamily="34" charset="0"/>
               </a:rPr>
               <a:t>Ejes Coincidentes y Ruteo de Bandas</a:t>
             </a:r>
@@ -21626,7 +21632,7 @@
         <p:spPr>
           <a:xfrm>
             <a:off x="990600" y="1912887"/>
-            <a:ext cx="6225778" cy="200025"/>
+            <a:ext cx="3242170" cy="207749"/>
           </a:xfrm>
           <a:prstGeom prst="rect">
             <a:avLst/>
@@ -21645,7 +21651,7 @@
                 <a:solidFill>
                   <a:srgbClr val="0F172A"/>
                 </a:solidFill>
-                <a:latin typeface="Inter"/>
+                <a:latin typeface="Segoe UI" panose="020B0502040204020203" pitchFamily="34" charset="0"/>
               </a:rPr>
               <a:t>Principio de Distancia Fija entre Centros</a:t>
             </a:r>
@@ -21684,7 +21690,7 @@
                 <a:solidFill>
                   <a:srgbClr val="475569"/>
                 </a:solidFill>
-                <a:latin typeface="Inter"/>
+                <a:latin typeface="Segoe UI" panose="020B0502040204020203" pitchFamily="34" charset="0"/>
               </a:rPr>
               <a:t>Una sola banda continua no puede cruzar una articulación si el ángulo varía. El eje de pivote de cada articulación aloja poleas dobles locas con rodamientos independientes.</a:t>
             </a:r>
@@ -21700,7 +21706,7 @@
         <p:spPr>
           <a:xfrm>
             <a:off x="990600" y="3263354"/>
-            <a:ext cx="6225778" cy="200025"/>
+            <a:ext cx="3085781" cy="207749"/>
           </a:xfrm>
           <a:prstGeom prst="rect">
             <a:avLst/>
@@ -21719,7 +21725,7 @@
                 <a:solidFill>
                   <a:srgbClr val="0F172A"/>
                 </a:solidFill>
-                <a:latin typeface="Inter"/>
+                <a:latin typeface="Segoe UI" panose="020B0502040204020203" pitchFamily="34" charset="0"/>
               </a:rPr>
               <a:t>Multiplicación en la Base vs Eslabones</a:t>
             </a:r>
@@ -21758,7 +21764,7 @@
                 <a:solidFill>
                   <a:srgbClr val="475569"/>
                 </a:solidFill>
-                <a:latin typeface="Inter"/>
+                <a:latin typeface="Segoe UI" panose="020B0502040204020203" pitchFamily="34" charset="0"/>
               </a:rPr>
               <a:t>La reducción de par se realiza con poleas grandes en la base o codo, y viaja hacia los eslabones superiores con poleas gemelas ligeras (20T a 20T) para no ensanchar la muñeca.</a:t>
             </a:r>
@@ -21774,7 +21780,7 @@
         <p:spPr>
           <a:xfrm>
             <a:off x="990600" y="4613820"/>
-            <a:ext cx="6225778" cy="200025"/>
+            <a:ext cx="2958439" cy="207749"/>
           </a:xfrm>
           <a:prstGeom prst="rect">
             <a:avLst/>
@@ -21793,7 +21799,7 @@
                 <a:solidFill>
                   <a:srgbClr val="0F172A"/>
                 </a:solidFill>
-                <a:latin typeface="Inter"/>
+                <a:latin typeface="Segoe UI" panose="020B0502040204020203" pitchFamily="34" charset="0"/>
               </a:rPr>
               <a:t>Ubicación de Actuadores de Muñeca</a:t>
             </a:r>
@@ -21809,7 +21815,7 @@
         <p:spPr>
           <a:xfrm>
             <a:off x="990600" y="4870995"/>
-            <a:ext cx="4838700" cy="559891"/>
+            <a:ext cx="4838700" cy="367088"/>
           </a:xfrm>
           <a:prstGeom prst="rect">
             <a:avLst/>
@@ -21832,7 +21838,7 @@
                 <a:solidFill>
                   <a:srgbClr val="475569"/>
                 </a:solidFill>
-                <a:latin typeface="Inter"/>
+                <a:latin typeface="Segoe UI" panose="020B0502040204020203" pitchFamily="34" charset="0"/>
               </a:rPr>
               <a:t>Los NEMA 17 de muñeca se montan tras el codo como contrapeso dinámico, permitiendo tramos rectos de banda hacia la muñeca sin torsión axial.</a:t>
             </a:r>
